--- a/docs/Sentinel_Solution_Presentation.pptx
+++ b/docs/Sentinel_Solution_Presentation.pptx
@@ -10274,7 +10274,7 @@
               </a:spcAft>
             </a:pPr>
             <a:r>
-              <a:rPr sz="1500">
+              <a:rPr sz="1450">
                 <a:solidFill>
                   <a:srgbClr val="9FB0C6"/>
                 </a:solidFill>
@@ -10293,13 +10293,13 @@
               </a:spcAft>
             </a:pPr>
             <a:r>
-              <a:rPr sz="1500">
+              <a:rPr sz="1450">
                 <a:solidFill>
                   <a:srgbClr val="9FB0C6"/>
                 </a:solidFill>
                 <a:latin typeface="Inter"/>
               </a:rPr>
-              <a:t>▸ Verified: one real vehicle detected 4 times within 16 seconds, correctly linked across OCR readings of BV2807 and 8V2807 — the confusion-variant matching fix, found via this exact data.</a:t>
+              <a:t>▸ Cross-camera candidate found: plate GJ18ZT1282 detected on cam06 (Timbavadi gate, Junagadh) and cam22 (BK Mervada tran Rasta) ~26 hours apart, OCR confidence 0.95 and 0.87 — linked via the same Z/2 confusion-variant matching already used for the single-camera case below.</a:t>
             </a:r>
           </a:p>
         </p:txBody>
@@ -10380,8 +10380,8 @@
         </p:nvSpPr>
         <p:spPr>
           <a:xfrm>
-            <a:off x="548640" y="3749039"/>
-            <a:ext cx="5120640" cy="2286000"/>
+            <a:off x="548640" y="3520440"/>
+            <a:ext cx="5120640" cy="2651760"/>
           </a:xfrm>
           <a:prstGeom prst="roundRect">
             <a:avLst>
@@ -10428,7 +10428,7 @@
         </p:nvSpPr>
         <p:spPr>
           <a:xfrm>
-            <a:off x="777240" y="3931920"/>
+            <a:off x="777240" y="3675887"/>
             <a:ext cx="4663440" cy="320040"/>
           </a:xfrm>
           <a:prstGeom prst="rect">
@@ -10467,8 +10467,8 @@
         </p:nvSpPr>
         <p:spPr>
           <a:xfrm>
-            <a:off x="777240" y="4297680"/>
-            <a:ext cx="4663440" cy="1645920"/>
+            <a:off x="777240" y="4023360"/>
+            <a:ext cx="4663440" cy="2057400"/>
           </a:xfrm>
           <a:prstGeom prst="rect">
             <a:avLst/>
@@ -10486,17 +10486,17 @@
                 <a:spcPct val="120000"/>
               </a:lnSpc>
               <a:spcAft>
-                <a:spcPts val="800"/>
+                <a:spcPts val="600"/>
               </a:spcAft>
             </a:pPr>
             <a:r>
-              <a:rPr sz="1300">
+              <a:rPr sz="1100">
                 <a:solidFill>
                   <a:srgbClr val="9FB0C6"/>
                 </a:solidFill>
                 <a:latin typeface="Inter"/>
               </a:rPr>
-              <a:t>▸ Three cameras independently confirmed ANPR-viable, ran simultaneously for hours, 480+ real detections.</a:t>
+              <a:t>▸ Three cameras independently confirmed ANPR-viable, ran for days, 21,000+ real detections.</a:t>
             </a:r>
           </a:p>
           <a:p>
@@ -10505,17 +10505,36 @@
                 <a:spcPct val="120000"/>
               </a:lnSpc>
               <a:spcAft>
-                <a:spcPts val="800"/>
+                <a:spcPts val="600"/>
               </a:spcAft>
             </a:pPr>
             <a:r>
-              <a:rPr sz="1300">
+              <a:rPr sz="1100">
                 <a:solidFill>
                   <a:srgbClr val="9FB0C6"/>
                 </a:solidFill>
                 <a:latin typeface="Inter"/>
               </a:rPr>
-              <a:t>▸ Comprehensive exact + confusion-variant check: no same-plate sighting across two different cameras yet — real traffic timing and this sandbox's camera mix, not a code limitation.</a:t>
+              <a:t>▸ One cross-camera candidate found via exact + confusion-variant matching (GJ18ZT1282 / GJ182T1282, cam06 &lt;-&gt; cam22): a strong OCR-level match, not database-verified as the same physical vehicle — reported as candidate evidence, not certainty.</a:t>
+            </a:r>
+          </a:p>
+          <a:p>
+            <a:pPr>
+              <a:lnSpc>
+                <a:spcPct val="120000"/>
+              </a:lnSpc>
+              <a:spcAft>
+                <a:spcPts val="600"/>
+              </a:spcAft>
+            </a:pPr>
+            <a:r>
+              <a:rPr sz="1100">
+                <a:solidFill>
+                  <a:srgbClr val="9FB0C6"/>
+                </a:solidFill>
+                <a:latin typeface="Inter"/>
+              </a:rPr>
+              <a:t>▸ The confirmed, unambiguous trace remains the single-camera case: one vehicle detected 4 times within 16 seconds on cam12, correctly linked across BV2807 / 8V2807 OCR readings.</a:t>
             </a:r>
           </a:p>
         </p:txBody>

--- a/docs/Sentinel_Solution_Presentation.pptx
+++ b/docs/Sentinel_Solution_Presentation.pptx
@@ -20,6 +20,7 @@
     <p:sldId id="268" r:id="rId19"/>
     <p:sldId id="269" r:id="rId20"/>
     <p:sldId id="270" r:id="rId21"/>
+    <p:sldId id="271" r:id="rId22"/>
   </p:sldIdLst>
   <p:sldSz cx="12191695" cy="6858000" type="screen4x3"/>
   <p:notesSz cx="6858000" cy="9144000"/>
@@ -3490,7 +3491,7 @@
                 </a:solidFill>
                 <a:latin typeface="Consolas"/>
               </a:rPr>
-              <a:t>UNIFIED CONTROL-ROOM VIEW</a:t>
+              <a:t>THE EVALUATION'S CORE TEST</a:t>
             </a:r>
           </a:p>
         </p:txBody>
@@ -3529,7 +3530,7 @@
                 </a:solidFill>
                 <a:latin typeface="Inter"/>
               </a:rPr>
-              <a:t>The Dashboard</a:t>
+              <a:t>Vehicle Route Reconstruction</a:t>
             </a:r>
           </a:p>
         </p:txBody>
@@ -3578,9 +3579,70 @@
           </a:p>
         </p:txBody>
       </p:sp>
+      <p:sp>
+        <p:nvSpPr>
+          <p:cNvPr id="7" name="TextBox 6"/>
+          <p:cNvSpPr txBox="1"/>
+          <p:nvPr/>
+        </p:nvSpPr>
+        <p:spPr>
+          <a:xfrm>
+            <a:off x="548640" y="1417320"/>
+            <a:ext cx="5120640" cy="2103120"/>
+          </a:xfrm>
+          <a:prstGeom prst="rect">
+            <a:avLst/>
+          </a:prstGeom>
+          <a:noFill/>
+        </p:spPr>
+        <p:txBody>
+          <a:bodyPr wrap="square">
+            <a:spAutoFit/>
+          </a:bodyPr>
+          <a:lstStyle/>
+          <a:p>
+            <a:pPr>
+              <a:lnSpc>
+                <a:spcPct val="120000"/>
+              </a:lnSpc>
+              <a:spcAft>
+                <a:spcPts val="1400"/>
+              </a:spcAft>
+            </a:pPr>
+            <a:r>
+              <a:rPr sz="1450">
+                <a:solidFill>
+                  <a:srgbClr val="9FB0C6"/>
+                </a:solidFill>
+                <a:latin typeface="Inter"/>
+              </a:rPr>
+              <a:t>▸ Given a plate, returns every (camera, location, timestamp) detection in chronological order.</a:t>
+            </a:r>
+          </a:p>
+          <a:p>
+            <a:pPr>
+              <a:lnSpc>
+                <a:spcPct val="120000"/>
+              </a:lnSpc>
+              <a:spcAft>
+                <a:spcPts val="1400"/>
+              </a:spcAft>
+            </a:pPr>
+            <a:r>
+              <a:rPr sz="1450">
+                <a:solidFill>
+                  <a:srgbClr val="9FB0C6"/>
+                </a:solidFill>
+                <a:latin typeface="Inter"/>
+              </a:rPr>
+              <a:t>▸ Cross-camera candidate found: plate GJ18ZT1282 detected on cam06 (Timbavadi gate, Junagadh) and cam22 (BK Mervada tran Rasta) ~26 hours apart, OCR confidence 0.95 and 0.87 — linked via the same Z/2 confusion-variant matching already used for the single-camera case below.</a:t>
+            </a:r>
+          </a:p>
+        </p:txBody>
+      </p:sp>
       <p:pic>
         <p:nvPicPr>
-          <p:cNvPr id="7" name="Picture 6" descr="camera_feed.png"/>
+          <p:cNvPr id="8" name="Picture 7" descr="trace.png"/>
           <p:cNvPicPr>
             <a:picLocks noChangeAspect="1"/>
           </p:cNvPicPr>
@@ -3594,8 +3656,8 @@
         </p:blipFill>
         <p:spPr>
           <a:xfrm>
-            <a:off x="640080" y="1417320"/>
-            <a:ext cx="5394960" cy="2732658"/>
+            <a:off x="5989320" y="1417320"/>
+            <a:ext cx="5623560" cy="2830847"/>
           </a:xfrm>
           <a:prstGeom prst="rect">
             <a:avLst/>
@@ -3609,14 +3671,14 @@
       </p:pic>
       <p:sp>
         <p:nvSpPr>
-          <p:cNvPr id="8" name="TextBox 7"/>
+          <p:cNvPr id="9" name="TextBox 8"/>
           <p:cNvSpPr txBox="1"/>
           <p:nvPr/>
         </p:nvSpPr>
         <p:spPr>
           <a:xfrm>
-            <a:off x="640080" y="4204842"/>
-            <a:ext cx="5394960" cy="274320"/>
+            <a:off x="5989320" y="4303031"/>
+            <a:ext cx="5623560" cy="274320"/>
           </a:xfrm>
           <a:prstGeom prst="rect">
             <a:avLst/>
@@ -3641,50 +3703,69 @@
                 </a:solidFill>
                 <a:latin typeface="Consolas"/>
               </a:rPr>
-              <a:t>Camera grid — live thumbnails, last-seen plate per camera.</a:t>
-            </a:r>
-          </a:p>
-        </p:txBody>
-      </p:sp>
-      <p:pic>
-        <p:nvPicPr>
-          <p:cNvPr id="9" name="Picture 8" descr="watchlist.png"/>
-          <p:cNvPicPr>
-            <a:picLocks noChangeAspect="1"/>
-          </p:cNvPicPr>
-          <p:nvPr/>
-        </p:nvPicPr>
-        <p:blipFill>
-          <a:blip r:embed="rId4"/>
-          <a:stretch>
-            <a:fillRect/>
-          </a:stretch>
-        </p:blipFill>
-        <p:spPr>
-          <a:xfrm>
-            <a:off x="6172200" y="1417320"/>
-            <a:ext cx="5394960" cy="2732658"/>
-          </a:xfrm>
-          <a:prstGeom prst="rect">
-            <a:avLst/>
-          </a:prstGeom>
-          <a:ln w="19050">
+              <a:t>Real search result — visual timeline with plate crop.</a:t>
+            </a:r>
+          </a:p>
+        </p:txBody>
+      </p:sp>
+      <p:sp>
+        <p:nvSpPr>
+          <p:cNvPr id="10" name="Rounded Rectangle 9"/>
+          <p:cNvSpPr/>
+          <p:nvPr/>
+        </p:nvSpPr>
+        <p:spPr>
+          <a:xfrm>
+            <a:off x="548640" y="3520440"/>
+            <a:ext cx="5120640" cy="2651760"/>
+          </a:xfrm>
+          <a:prstGeom prst="roundRect">
+            <a:avLst>
+              <a:gd name="adj" fmla="val 6000"/>
+            </a:avLst>
+          </a:prstGeom>
+          <a:solidFill>
+            <a:srgbClr val="1A1408"/>
+          </a:solidFill>
+          <a:ln w="12700">
             <a:solidFill>
-              <a:srgbClr val="1E2A3A"/>
+              <a:srgbClr val="F59E0B"/>
             </a:solidFill>
           </a:ln>
-        </p:spPr>
-      </p:pic>
-      <p:sp>
-        <p:nvSpPr>
-          <p:cNvPr id="10" name="TextBox 9"/>
+          <a:effectLst/>
+        </p:spPr>
+        <p:style>
+          <a:lnRef idx="1">
+            <a:schemeClr val="accent1"/>
+          </a:lnRef>
+          <a:fillRef idx="3">
+            <a:schemeClr val="accent1"/>
+          </a:fillRef>
+          <a:effectRef idx="2">
+            <a:schemeClr val="accent1"/>
+          </a:effectRef>
+          <a:fontRef idx="minor">
+            <a:schemeClr val="lt1"/>
+          </a:fontRef>
+        </p:style>
+        <p:txBody>
+          <a:bodyPr rtlCol="0" anchor="ctr"/>
+          <a:lstStyle/>
+          <a:p>
+            <a:pPr algn="ctr"/>
+          </a:p>
+        </p:txBody>
+      </p:sp>
+      <p:sp>
+        <p:nvSpPr>
+          <p:cNvPr id="11" name="TextBox 10"/>
           <p:cNvSpPr txBox="1"/>
           <p:nvPr/>
         </p:nvSpPr>
         <p:spPr>
           <a:xfrm>
-            <a:off x="6172200" y="4204842"/>
-            <a:ext cx="5394960" cy="274320"/>
+            <a:off x="777240" y="3675887"/>
+            <a:ext cx="4663440" cy="320040"/>
           </a:xfrm>
           <a:prstGeom prst="rect">
             <a:avLst/>
@@ -3697,33 +3778,33 @@
           </a:bodyPr>
           <a:lstStyle/>
           <a:p>
-            <a:pPr algn="ctr">
+            <a:pPr algn="l">
               <a:lnSpc>
                 <a:spcPct val="115000"/>
               </a:lnSpc>
             </a:pPr>
             <a:r>
-              <a:rPr sz="1100" b="0">
-                <a:solidFill>
-                  <a:srgbClr val="5C6B86"/>
+              <a:rPr sz="1200" b="1">
+                <a:solidFill>
+                  <a:srgbClr val="F59E0B"/>
                 </a:solidFill>
                 <a:latin typeface="Consolas"/>
               </a:rPr>
-              <a:t>Watchlist administration.</a:t>
-            </a:r>
-          </a:p>
-        </p:txBody>
-      </p:sp>
-      <p:sp>
-        <p:nvSpPr>
-          <p:cNvPr id="11" name="TextBox 10"/>
+              <a:t>HONEST STATUS</a:t>
+            </a:r>
+          </a:p>
+        </p:txBody>
+      </p:sp>
+      <p:sp>
+        <p:nvSpPr>
+          <p:cNvPr id="12" name="TextBox 11"/>
           <p:cNvSpPr txBox="1"/>
           <p:nvPr/>
         </p:nvSpPr>
         <p:spPr>
           <a:xfrm>
-            <a:off x="548640" y="6473952"/>
-            <a:ext cx="5486400" cy="274320"/>
+            <a:off x="777240" y="4023360"/>
+            <a:ext cx="4663440" cy="2057400"/>
           </a:xfrm>
           <a:prstGeom prst="rect">
             <a:avLst/>
@@ -3736,6 +3817,105 @@
           </a:bodyPr>
           <a:lstStyle/>
           <a:p>
+            <a:pPr>
+              <a:lnSpc>
+                <a:spcPct val="120000"/>
+              </a:lnSpc>
+              <a:spcAft>
+                <a:spcPts val="600"/>
+              </a:spcAft>
+            </a:pPr>
+            <a:r>
+              <a:rPr sz="1100">
+                <a:solidFill>
+                  <a:srgbClr val="9FB0C6"/>
+                </a:solidFill>
+                <a:latin typeface="Inter"/>
+              </a:rPr>
+              <a:t>▸ Three cameras independently confirmed ANPR-viable, ran for days, 21,000+ real detections.</a:t>
+            </a:r>
+          </a:p>
+          <a:p>
+            <a:pPr>
+              <a:lnSpc>
+                <a:spcPct val="120000"/>
+              </a:lnSpc>
+              <a:spcAft>
+                <a:spcPts val="600"/>
+              </a:spcAft>
+            </a:pPr>
+            <a:r>
+              <a:rPr sz="1100">
+                <a:solidFill>
+                  <a:srgbClr val="9FB0C6"/>
+                </a:solidFill>
+                <a:latin typeface="Inter"/>
+              </a:rPr>
+              <a:t>▸ One cross-camera candidate found via exact + confusion-variant matching (GJ18ZT1282 / GJ182T1282, cam06 &lt;-&gt; cam22): a strong OCR-level match, not database-verified as the same physical vehicle — reported as candidate evidence, not certainty.</a:t>
+            </a:r>
+          </a:p>
+          <a:p>
+            <a:pPr>
+              <a:lnSpc>
+                <a:spcPct val="120000"/>
+              </a:lnSpc>
+              <a:spcAft>
+                <a:spcPts val="600"/>
+              </a:spcAft>
+            </a:pPr>
+            <a:r>
+              <a:rPr sz="1100">
+                <a:solidFill>
+                  <a:srgbClr val="9FB0C6"/>
+                </a:solidFill>
+                <a:latin typeface="Inter"/>
+              </a:rPr>
+              <a:t>▸ The confirmed, unambiguous trace remains the single-camera case: one vehicle detected 4 times within 16 seconds on cam12, correctly linked across BV2807 / 8V2807 OCR readings.</a:t>
+            </a:r>
+          </a:p>
+          <a:p>
+            <a:pPr>
+              <a:lnSpc>
+                <a:spcPct val="120000"/>
+              </a:lnSpc>
+              <a:spcAft>
+                <a:spcPts val="600"/>
+              </a:spcAft>
+            </a:pPr>
+            <a:r>
+              <a:rPr sz="1100">
+                <a:solidFill>
+                  <a:srgbClr val="9FB0C6"/>
+                </a:solidFill>
+                <a:latin typeface="Inter"/>
+              </a:rPr>
+              <a:t>▸ A map view of the same route is now available alongside this list view, plotted using the Model 1 registry's camera coordinates.</a:t>
+            </a:r>
+          </a:p>
+        </p:txBody>
+      </p:sp>
+      <p:sp>
+        <p:nvSpPr>
+          <p:cNvPr id="13" name="TextBox 12"/>
+          <p:cNvSpPr txBox="1"/>
+          <p:nvPr/>
+        </p:nvSpPr>
+        <p:spPr>
+          <a:xfrm>
+            <a:off x="548640" y="6473952"/>
+            <a:ext cx="5486400" cy="274320"/>
+          </a:xfrm>
+          <a:prstGeom prst="rect">
+            <a:avLst/>
+          </a:prstGeom>
+          <a:noFill/>
+        </p:spPr>
+        <p:txBody>
+          <a:bodyPr wrap="square">
+            <a:spAutoFit/>
+          </a:bodyPr>
+          <a:lstStyle/>
+          <a:p>
             <a:pPr algn="l">
               <a:lnSpc>
                 <a:spcPct val="115000"/>
@@ -3755,7 +3935,7 @@
       </p:sp>
       <p:sp>
         <p:nvSpPr>
-          <p:cNvPr id="12" name="TextBox 11"/>
+          <p:cNvPr id="14" name="TextBox 13"/>
           <p:cNvSpPr txBox="1"/>
           <p:nvPr/>
         </p:nvSpPr>
@@ -3912,7 +4092,7 @@
                 </a:solidFill>
                 <a:latin typeface="Consolas"/>
               </a:rPr>
-              <a:t>IMPLEMENTATION</a:t>
+              <a:t>UNIFIED CONTROL-ROOM VIEW</a:t>
             </a:r>
           </a:p>
         </p:txBody>
@@ -3951,7 +4131,7 @@
                 </a:solidFill>
                 <a:latin typeface="Inter"/>
               </a:rPr>
-              <a:t>Technology Stack</a:t>
+              <a:t>The Dashboard</a:t>
             </a:r>
           </a:p>
         </p:txBody>
@@ -4000,54 +4180,35 @@
           </a:p>
         </p:txBody>
       </p:sp>
-      <p:sp>
-        <p:nvSpPr>
-          <p:cNvPr id="7" name="Rounded Rectangle 6"/>
-          <p:cNvSpPr/>
-          <p:nvPr/>
-        </p:nvSpPr>
-        <p:spPr>
-          <a:xfrm>
-            <a:off x="548640" y="1554480"/>
-            <a:ext cx="10881360" cy="658368"/>
-          </a:xfrm>
-          <a:prstGeom prst="roundRect">
-            <a:avLst>
-              <a:gd name="adj" fmla="val 6000"/>
-            </a:avLst>
-          </a:prstGeom>
-          <a:solidFill>
-            <a:srgbClr val="111823"/>
-          </a:solidFill>
-          <a:ln w="12700">
+      <p:pic>
+        <p:nvPicPr>
+          <p:cNvPr id="7" name="Picture 6" descr="camera_feed.png"/>
+          <p:cNvPicPr>
+            <a:picLocks noChangeAspect="1"/>
+          </p:cNvPicPr>
+          <p:nvPr/>
+        </p:nvPicPr>
+        <p:blipFill>
+          <a:blip r:embed="rId3"/>
+          <a:stretch>
+            <a:fillRect/>
+          </a:stretch>
+        </p:blipFill>
+        <p:spPr>
+          <a:xfrm>
+            <a:off x="640080" y="1417320"/>
+            <a:ext cx="5394960" cy="2732658"/>
+          </a:xfrm>
+          <a:prstGeom prst="rect">
+            <a:avLst/>
+          </a:prstGeom>
+          <a:ln w="19050">
             <a:solidFill>
               <a:srgbClr val="1E2A3A"/>
             </a:solidFill>
           </a:ln>
-          <a:effectLst/>
-        </p:spPr>
-        <p:style>
-          <a:lnRef idx="1">
-            <a:schemeClr val="accent1"/>
-          </a:lnRef>
-          <a:fillRef idx="3">
-            <a:schemeClr val="accent1"/>
-          </a:fillRef>
-          <a:effectRef idx="2">
-            <a:schemeClr val="accent1"/>
-          </a:effectRef>
-          <a:fontRef idx="minor">
-            <a:schemeClr val="lt1"/>
-          </a:fontRef>
-        </p:style>
-        <p:txBody>
-          <a:bodyPr rtlCol="0" anchor="ctr"/>
-          <a:lstStyle/>
-          <a:p>
-            <a:pPr algn="ctr"/>
-          </a:p>
-        </p:txBody>
-      </p:sp>
+        </p:spPr>
+      </p:pic>
       <p:sp>
         <p:nvSpPr>
           <p:cNvPr id="8" name="TextBox 7"/>
@@ -4056,8 +4217,8 @@
         </p:nvSpPr>
         <p:spPr>
           <a:xfrm>
-            <a:off x="822960" y="1673352"/>
-            <a:ext cx="2103120" cy="411480"/>
+            <a:off x="640080" y="4204842"/>
+            <a:ext cx="5394960" cy="274320"/>
           </a:xfrm>
           <a:prstGeom prst="rect">
             <a:avLst/>
@@ -4070,120 +4231,62 @@
           </a:bodyPr>
           <a:lstStyle/>
           <a:p>
-            <a:pPr algn="l">
+            <a:pPr algn="ctr">
               <a:lnSpc>
                 <a:spcPct val="115000"/>
               </a:lnSpc>
             </a:pPr>
             <a:r>
-              <a:rPr sz="1500" b="1">
-                <a:solidFill>
-                  <a:srgbClr val="3B82F6"/>
+              <a:rPr sz="1100" b="0">
+                <a:solidFill>
+                  <a:srgbClr val="5C6B86"/>
                 </a:solidFill>
                 <a:latin typeface="Consolas"/>
               </a:rPr>
-              <a:t>Capture</a:t>
-            </a:r>
-          </a:p>
-        </p:txBody>
-      </p:sp>
-      <p:sp>
-        <p:nvSpPr>
-          <p:cNvPr id="9" name="TextBox 8"/>
-          <p:cNvSpPr txBox="1"/>
-          <p:nvPr/>
-        </p:nvSpPr>
-        <p:spPr>
-          <a:xfrm>
-            <a:off x="3017520" y="1673352"/>
-            <a:ext cx="8229600" cy="411480"/>
-          </a:xfrm>
-          <a:prstGeom prst="rect">
-            <a:avLst/>
-          </a:prstGeom>
-          <a:noFill/>
-        </p:spPr>
-        <p:txBody>
-          <a:bodyPr wrap="square">
-            <a:spAutoFit/>
-          </a:bodyPr>
-          <a:lstStyle/>
-          <a:p>
-            <a:pPr algn="l">
-              <a:lnSpc>
-                <a:spcPct val="115000"/>
-              </a:lnSpc>
-            </a:pPr>
-            <a:r>
-              <a:rPr sz="1500" b="0">
-                <a:solidFill>
-                  <a:srgbClr val="E6EDF5"/>
-                </a:solidFill>
-                <a:latin typeface="Inter"/>
-              </a:rPr>
-              <a:t>OpenCV + FFmpeg backend (Python)</a:t>
-            </a:r>
-          </a:p>
-        </p:txBody>
-      </p:sp>
-      <p:sp>
-        <p:nvSpPr>
-          <p:cNvPr id="10" name="Rounded Rectangle 9"/>
-          <p:cNvSpPr/>
-          <p:nvPr/>
-        </p:nvSpPr>
-        <p:spPr>
-          <a:xfrm>
-            <a:off x="548640" y="2377440"/>
-            <a:ext cx="10881360" cy="658368"/>
-          </a:xfrm>
-          <a:prstGeom prst="roundRect">
-            <a:avLst>
-              <a:gd name="adj" fmla="val 6000"/>
-            </a:avLst>
-          </a:prstGeom>
-          <a:solidFill>
-            <a:srgbClr val="111823"/>
-          </a:solidFill>
-          <a:ln w="12700">
+              <a:t>Camera grid — live thumbnails, last-seen plate per camera.</a:t>
+            </a:r>
+          </a:p>
+        </p:txBody>
+      </p:sp>
+      <p:pic>
+        <p:nvPicPr>
+          <p:cNvPr id="9" name="Picture 8" descr="watchlist.png"/>
+          <p:cNvPicPr>
+            <a:picLocks noChangeAspect="1"/>
+          </p:cNvPicPr>
+          <p:nvPr/>
+        </p:nvPicPr>
+        <p:blipFill>
+          <a:blip r:embed="rId4"/>
+          <a:stretch>
+            <a:fillRect/>
+          </a:stretch>
+        </p:blipFill>
+        <p:spPr>
+          <a:xfrm>
+            <a:off x="6172200" y="1417320"/>
+            <a:ext cx="5394960" cy="2732658"/>
+          </a:xfrm>
+          <a:prstGeom prst="rect">
+            <a:avLst/>
+          </a:prstGeom>
+          <a:ln w="19050">
             <a:solidFill>
               <a:srgbClr val="1E2A3A"/>
             </a:solidFill>
           </a:ln>
-          <a:effectLst/>
-        </p:spPr>
-        <p:style>
-          <a:lnRef idx="1">
-            <a:schemeClr val="accent1"/>
-          </a:lnRef>
-          <a:fillRef idx="3">
-            <a:schemeClr val="accent1"/>
-          </a:fillRef>
-          <a:effectRef idx="2">
-            <a:schemeClr val="accent1"/>
-          </a:effectRef>
-          <a:fontRef idx="minor">
-            <a:schemeClr val="lt1"/>
-          </a:fontRef>
-        </p:style>
-        <p:txBody>
-          <a:bodyPr rtlCol="0" anchor="ctr"/>
-          <a:lstStyle/>
-          <a:p>
-            <a:pPr algn="ctr"/>
-          </a:p>
-        </p:txBody>
-      </p:sp>
-      <p:sp>
-        <p:nvSpPr>
-          <p:cNvPr id="11" name="TextBox 10"/>
+        </p:spPr>
+      </p:pic>
+      <p:sp>
+        <p:nvSpPr>
+          <p:cNvPr id="10" name="TextBox 9"/>
           <p:cNvSpPr txBox="1"/>
           <p:nvPr/>
         </p:nvSpPr>
         <p:spPr>
           <a:xfrm>
-            <a:off x="822960" y="2496312"/>
-            <a:ext cx="2103120" cy="411480"/>
+            <a:off x="6172200" y="4204842"/>
+            <a:ext cx="5394960" cy="274320"/>
           </a:xfrm>
           <a:prstGeom prst="rect">
             <a:avLst/>
@@ -4196,33 +4299,33 @@
           </a:bodyPr>
           <a:lstStyle/>
           <a:p>
-            <a:pPr algn="l">
+            <a:pPr algn="ctr">
               <a:lnSpc>
                 <a:spcPct val="115000"/>
               </a:lnSpc>
             </a:pPr>
             <a:r>
-              <a:rPr sz="1500" b="1">
-                <a:solidFill>
-                  <a:srgbClr val="3B82F6"/>
+              <a:rPr sz="1100" b="0">
+                <a:solidFill>
+                  <a:srgbClr val="5C6B86"/>
                 </a:solidFill>
                 <a:latin typeface="Consolas"/>
               </a:rPr>
-              <a:t>Detection</a:t>
-            </a:r>
-          </a:p>
-        </p:txBody>
-      </p:sp>
-      <p:sp>
-        <p:nvSpPr>
-          <p:cNvPr id="12" name="TextBox 11"/>
+              <a:t>Watchlist administration.</a:t>
+            </a:r>
+          </a:p>
+        </p:txBody>
+      </p:sp>
+      <p:sp>
+        <p:nvSpPr>
+          <p:cNvPr id="11" name="TextBox 10"/>
           <p:cNvSpPr txBox="1"/>
           <p:nvPr/>
         </p:nvSpPr>
         <p:spPr>
           <a:xfrm>
-            <a:off x="3017520" y="2496312"/>
-            <a:ext cx="8229600" cy="411480"/>
+            <a:off x="548640" y="6473952"/>
+            <a:ext cx="5486400" cy="274320"/>
           </a:xfrm>
           <a:prstGeom prst="rect">
             <a:avLst/>
@@ -4241,468 +4344,12 @@
               </a:lnSpc>
             </a:pPr>
             <a:r>
-              <a:rPr sz="1500" b="0">
-                <a:solidFill>
-                  <a:srgbClr val="E6EDF5"/>
-                </a:solidFill>
-                <a:latin typeface="Inter"/>
-              </a:rPr>
-              <a:t>Ultralytics YOLO — pretrained, CPU-only</a:t>
-            </a:r>
-          </a:p>
-        </p:txBody>
-      </p:sp>
-      <p:sp>
-        <p:nvSpPr>
-          <p:cNvPr id="13" name="Rounded Rectangle 12"/>
-          <p:cNvSpPr/>
-          <p:nvPr/>
-        </p:nvSpPr>
-        <p:spPr>
-          <a:xfrm>
-            <a:off x="548640" y="3200400"/>
-            <a:ext cx="10881360" cy="658368"/>
-          </a:xfrm>
-          <a:prstGeom prst="roundRect">
-            <a:avLst>
-              <a:gd name="adj" fmla="val 6000"/>
-            </a:avLst>
-          </a:prstGeom>
-          <a:solidFill>
-            <a:srgbClr val="111823"/>
-          </a:solidFill>
-          <a:ln w="12700">
-            <a:solidFill>
-              <a:srgbClr val="1E2A3A"/>
-            </a:solidFill>
-          </a:ln>
-          <a:effectLst/>
-        </p:spPr>
-        <p:style>
-          <a:lnRef idx="1">
-            <a:schemeClr val="accent1"/>
-          </a:lnRef>
-          <a:fillRef idx="3">
-            <a:schemeClr val="accent1"/>
-          </a:fillRef>
-          <a:effectRef idx="2">
-            <a:schemeClr val="accent1"/>
-          </a:effectRef>
-          <a:fontRef idx="minor">
-            <a:schemeClr val="lt1"/>
-          </a:fontRef>
-        </p:style>
-        <p:txBody>
-          <a:bodyPr rtlCol="0" anchor="ctr"/>
-          <a:lstStyle/>
-          <a:p>
-            <a:pPr algn="ctr"/>
-          </a:p>
-        </p:txBody>
-      </p:sp>
-      <p:sp>
-        <p:nvSpPr>
-          <p:cNvPr id="14" name="TextBox 13"/>
-          <p:cNvSpPr txBox="1"/>
-          <p:nvPr/>
-        </p:nvSpPr>
-        <p:spPr>
-          <a:xfrm>
-            <a:off x="822960" y="3319272"/>
-            <a:ext cx="2103120" cy="411480"/>
-          </a:xfrm>
-          <a:prstGeom prst="rect">
-            <a:avLst/>
-          </a:prstGeom>
-          <a:noFill/>
-        </p:spPr>
-        <p:txBody>
-          <a:bodyPr wrap="square">
-            <a:spAutoFit/>
-          </a:bodyPr>
-          <a:lstStyle/>
-          <a:p>
-            <a:pPr algn="l">
-              <a:lnSpc>
-                <a:spcPct val="115000"/>
-              </a:lnSpc>
-            </a:pPr>
-            <a:r>
-              <a:rPr sz="1500" b="1">
-                <a:solidFill>
-                  <a:srgbClr val="3B82F6"/>
+              <a:rPr sz="900" b="0">
+                <a:solidFill>
+                  <a:srgbClr val="5C6B86"/>
                 </a:solidFill>
                 <a:latin typeface="Consolas"/>
               </a:rPr>
-              <a:t>OCR</a:t>
-            </a:r>
-          </a:p>
-        </p:txBody>
-      </p:sp>
-      <p:sp>
-        <p:nvSpPr>
-          <p:cNvPr id="15" name="TextBox 14"/>
-          <p:cNvSpPr txBox="1"/>
-          <p:nvPr/>
-        </p:nvSpPr>
-        <p:spPr>
-          <a:xfrm>
-            <a:off x="3017520" y="3319272"/>
-            <a:ext cx="8229600" cy="411480"/>
-          </a:xfrm>
-          <a:prstGeom prst="rect">
-            <a:avLst/>
-          </a:prstGeom>
-          <a:noFill/>
-        </p:spPr>
-        <p:txBody>
-          <a:bodyPr wrap="square">
-            <a:spAutoFit/>
-          </a:bodyPr>
-          <a:lstStyle/>
-          <a:p>
-            <a:pPr algn="l">
-              <a:lnSpc>
-                <a:spcPct val="115000"/>
-              </a:lnSpc>
-            </a:pPr>
-            <a:r>
-              <a:rPr sz="1500" b="0">
-                <a:solidFill>
-                  <a:srgbClr val="E6EDF5"/>
-                </a:solidFill>
-                <a:latin typeface="Inter"/>
-              </a:rPr>
-              <a:t>PaddleOCR (PP-OCRv6)</a:t>
-            </a:r>
-          </a:p>
-        </p:txBody>
-      </p:sp>
-      <p:sp>
-        <p:nvSpPr>
-          <p:cNvPr id="16" name="Rounded Rectangle 15"/>
-          <p:cNvSpPr/>
-          <p:nvPr/>
-        </p:nvSpPr>
-        <p:spPr>
-          <a:xfrm>
-            <a:off x="548640" y="4023360"/>
-            <a:ext cx="10881360" cy="658368"/>
-          </a:xfrm>
-          <a:prstGeom prst="roundRect">
-            <a:avLst>
-              <a:gd name="adj" fmla="val 6000"/>
-            </a:avLst>
-          </a:prstGeom>
-          <a:solidFill>
-            <a:srgbClr val="111823"/>
-          </a:solidFill>
-          <a:ln w="12700">
-            <a:solidFill>
-              <a:srgbClr val="1E2A3A"/>
-            </a:solidFill>
-          </a:ln>
-          <a:effectLst/>
-        </p:spPr>
-        <p:style>
-          <a:lnRef idx="1">
-            <a:schemeClr val="accent1"/>
-          </a:lnRef>
-          <a:fillRef idx="3">
-            <a:schemeClr val="accent1"/>
-          </a:fillRef>
-          <a:effectRef idx="2">
-            <a:schemeClr val="accent1"/>
-          </a:effectRef>
-          <a:fontRef idx="minor">
-            <a:schemeClr val="lt1"/>
-          </a:fontRef>
-        </p:style>
-        <p:txBody>
-          <a:bodyPr rtlCol="0" anchor="ctr"/>
-          <a:lstStyle/>
-          <a:p>
-            <a:pPr algn="ctr"/>
-          </a:p>
-        </p:txBody>
-      </p:sp>
-      <p:sp>
-        <p:nvSpPr>
-          <p:cNvPr id="17" name="TextBox 16"/>
-          <p:cNvSpPr txBox="1"/>
-          <p:nvPr/>
-        </p:nvSpPr>
-        <p:spPr>
-          <a:xfrm>
-            <a:off x="822960" y="4142232"/>
-            <a:ext cx="2103120" cy="411480"/>
-          </a:xfrm>
-          <a:prstGeom prst="rect">
-            <a:avLst/>
-          </a:prstGeom>
-          <a:noFill/>
-        </p:spPr>
-        <p:txBody>
-          <a:bodyPr wrap="square">
-            <a:spAutoFit/>
-          </a:bodyPr>
-          <a:lstStyle/>
-          <a:p>
-            <a:pPr algn="l">
-              <a:lnSpc>
-                <a:spcPct val="115000"/>
-              </a:lnSpc>
-            </a:pPr>
-            <a:r>
-              <a:rPr sz="1500" b="1">
-                <a:solidFill>
-                  <a:srgbClr val="3B82F6"/>
-                </a:solidFill>
-                <a:latin typeface="Consolas"/>
-              </a:rPr>
-              <a:t>Storage</a:t>
-            </a:r>
-          </a:p>
-        </p:txBody>
-      </p:sp>
-      <p:sp>
-        <p:nvSpPr>
-          <p:cNvPr id="18" name="TextBox 17"/>
-          <p:cNvSpPr txBox="1"/>
-          <p:nvPr/>
-        </p:nvSpPr>
-        <p:spPr>
-          <a:xfrm>
-            <a:off x="3017520" y="4142232"/>
-            <a:ext cx="8229600" cy="411480"/>
-          </a:xfrm>
-          <a:prstGeom prst="rect">
-            <a:avLst/>
-          </a:prstGeom>
-          <a:noFill/>
-        </p:spPr>
-        <p:txBody>
-          <a:bodyPr wrap="square">
-            <a:spAutoFit/>
-          </a:bodyPr>
-          <a:lstStyle/>
-          <a:p>
-            <a:pPr algn="l">
-              <a:lnSpc>
-                <a:spcPct val="115000"/>
-              </a:lnSpc>
-            </a:pPr>
-            <a:r>
-              <a:rPr sz="1500" b="0">
-                <a:solidFill>
-                  <a:srgbClr val="E6EDF5"/>
-                </a:solidFill>
-                <a:latin typeface="Inter"/>
-              </a:rPr>
-              <a:t>SQLite (pilot); schema-compatible path to PostgreSQL</a:t>
-            </a:r>
-          </a:p>
-        </p:txBody>
-      </p:sp>
-      <p:sp>
-        <p:nvSpPr>
-          <p:cNvPr id="19" name="Rounded Rectangle 18"/>
-          <p:cNvSpPr/>
-          <p:nvPr/>
-        </p:nvSpPr>
-        <p:spPr>
-          <a:xfrm>
-            <a:off x="548640" y="4846320"/>
-            <a:ext cx="10881360" cy="658368"/>
-          </a:xfrm>
-          <a:prstGeom prst="roundRect">
-            <a:avLst>
-              <a:gd name="adj" fmla="val 6000"/>
-            </a:avLst>
-          </a:prstGeom>
-          <a:solidFill>
-            <a:srgbClr val="111823"/>
-          </a:solidFill>
-          <a:ln w="12700">
-            <a:solidFill>
-              <a:srgbClr val="1E2A3A"/>
-            </a:solidFill>
-          </a:ln>
-          <a:effectLst/>
-        </p:spPr>
-        <p:style>
-          <a:lnRef idx="1">
-            <a:schemeClr val="accent1"/>
-          </a:lnRef>
-          <a:fillRef idx="3">
-            <a:schemeClr val="accent1"/>
-          </a:fillRef>
-          <a:effectRef idx="2">
-            <a:schemeClr val="accent1"/>
-          </a:effectRef>
-          <a:fontRef idx="minor">
-            <a:schemeClr val="lt1"/>
-          </a:fontRef>
-        </p:style>
-        <p:txBody>
-          <a:bodyPr rtlCol="0" anchor="ctr"/>
-          <a:lstStyle/>
-          <a:p>
-            <a:pPr algn="ctr"/>
-          </a:p>
-        </p:txBody>
-      </p:sp>
-      <p:sp>
-        <p:nvSpPr>
-          <p:cNvPr id="20" name="TextBox 19"/>
-          <p:cNvSpPr txBox="1"/>
-          <p:nvPr/>
-        </p:nvSpPr>
-        <p:spPr>
-          <a:xfrm>
-            <a:off x="822960" y="4965192"/>
-            <a:ext cx="2103120" cy="411480"/>
-          </a:xfrm>
-          <a:prstGeom prst="rect">
-            <a:avLst/>
-          </a:prstGeom>
-          <a:noFill/>
-        </p:spPr>
-        <p:txBody>
-          <a:bodyPr wrap="square">
-            <a:spAutoFit/>
-          </a:bodyPr>
-          <a:lstStyle/>
-          <a:p>
-            <a:pPr algn="l">
-              <a:lnSpc>
-                <a:spcPct val="115000"/>
-              </a:lnSpc>
-            </a:pPr>
-            <a:r>
-              <a:rPr sz="1500" b="1">
-                <a:solidFill>
-                  <a:srgbClr val="3B82F6"/>
-                </a:solidFill>
-                <a:latin typeface="Consolas"/>
-              </a:rPr>
-              <a:t>Dashboard</a:t>
-            </a:r>
-          </a:p>
-        </p:txBody>
-      </p:sp>
-      <p:sp>
-        <p:nvSpPr>
-          <p:cNvPr id="21" name="TextBox 20"/>
-          <p:cNvSpPr txBox="1"/>
-          <p:nvPr/>
-        </p:nvSpPr>
-        <p:spPr>
-          <a:xfrm>
-            <a:off x="3017520" y="4965192"/>
-            <a:ext cx="8229600" cy="411480"/>
-          </a:xfrm>
-          <a:prstGeom prst="rect">
-            <a:avLst/>
-          </a:prstGeom>
-          <a:noFill/>
-        </p:spPr>
-        <p:txBody>
-          <a:bodyPr wrap="square">
-            <a:spAutoFit/>
-          </a:bodyPr>
-          <a:lstStyle/>
-          <a:p>
-            <a:pPr algn="l">
-              <a:lnSpc>
-                <a:spcPct val="115000"/>
-              </a:lnSpc>
-            </a:pPr>
-            <a:r>
-              <a:rPr sz="1500" b="0">
-                <a:solidFill>
-                  <a:srgbClr val="E6EDF5"/>
-                </a:solidFill>
-                <a:latin typeface="Inter"/>
-              </a:rPr>
-              <a:t>Streamlit, custom dark theme</a:t>
-            </a:r>
-          </a:p>
-        </p:txBody>
-      </p:sp>
-      <p:sp>
-        <p:nvSpPr>
-          <p:cNvPr id="22" name="TextBox 21"/>
-          <p:cNvSpPr txBox="1"/>
-          <p:nvPr/>
-        </p:nvSpPr>
-        <p:spPr>
-          <a:xfrm>
-            <a:off x="548640" y="5760720"/>
-            <a:ext cx="10881360" cy="457200"/>
-          </a:xfrm>
-          <a:prstGeom prst="rect">
-            <a:avLst/>
-          </a:prstGeom>
-          <a:noFill/>
-        </p:spPr>
-        <p:txBody>
-          <a:bodyPr wrap="square">
-            <a:spAutoFit/>
-          </a:bodyPr>
-          <a:lstStyle/>
-          <a:p>
-            <a:pPr algn="l">
-              <a:lnSpc>
-                <a:spcPct val="115000"/>
-              </a:lnSpc>
-            </a:pPr>
-            <a:r>
-              <a:rPr sz="1400" b="0">
-                <a:solidFill>
-                  <a:srgbClr val="9FB0C6"/>
-                </a:solidFill>
-                <a:latin typeface="Inter"/>
-              </a:rPr>
-              <a:t>No GPU, no external message bus required at this scale — deliberately minimal-dependency for fast, reliable deployment.</a:t>
-            </a:r>
-          </a:p>
-        </p:txBody>
-      </p:sp>
-      <p:sp>
-        <p:nvSpPr>
-          <p:cNvPr id="23" name="TextBox 22"/>
-          <p:cNvSpPr txBox="1"/>
-          <p:nvPr/>
-        </p:nvSpPr>
-        <p:spPr>
-          <a:xfrm>
-            <a:off x="548640" y="6473952"/>
-            <a:ext cx="5486400" cy="274320"/>
-          </a:xfrm>
-          <a:prstGeom prst="rect">
-            <a:avLst/>
-          </a:prstGeom>
-          <a:noFill/>
-        </p:spPr>
-        <p:txBody>
-          <a:bodyPr wrap="square">
-            <a:spAutoFit/>
-          </a:bodyPr>
-          <a:lstStyle/>
-          <a:p>
-            <a:pPr algn="l">
-              <a:lnSpc>
-                <a:spcPct val="115000"/>
-              </a:lnSpc>
-            </a:pPr>
-            <a:r>
-              <a:rPr sz="900" b="0">
-                <a:solidFill>
-                  <a:srgbClr val="5C6B86"/>
-                </a:solidFill>
-                <a:latin typeface="Consolas"/>
-              </a:rPr>
               <a:t>SENTINEL — Gujarat Police Innovation Challenge 2026 · Model 2</a:t>
             </a:r>
           </a:p>
@@ -4710,7 +4357,7 @@
       </p:sp>
       <p:sp>
         <p:nvSpPr>
-          <p:cNvPr id="24" name="TextBox 23"/>
+          <p:cNvPr id="12" name="TextBox 11"/>
           <p:cNvSpPr txBox="1"/>
           <p:nvPr/>
         </p:nvSpPr>
@@ -4867,7 +4514,7 @@
                 </a:solidFill>
                 <a:latin typeface="Consolas"/>
               </a:rPr>
-              <a:t>PATH TO STATEWIDE SCALE</a:t>
+              <a:t>IMPLEMENTATION</a:t>
             </a:r>
           </a:p>
         </p:txBody>
@@ -4906,7 +4553,7 @@
                 </a:solidFill>
                 <a:latin typeface="Inter"/>
               </a:rPr>
-              <a:t>Scalability, Security &amp; Deployment</a:t>
+              <a:t>Technology Stack</a:t>
             </a:r>
           </a:p>
         </p:txBody>
@@ -4957,14 +4604,62 @@
       </p:sp>
       <p:sp>
         <p:nvSpPr>
-          <p:cNvPr id="7" name="TextBox 6"/>
+          <p:cNvPr id="7" name="Rounded Rectangle 6"/>
+          <p:cNvSpPr/>
+          <p:nvPr/>
+        </p:nvSpPr>
+        <p:spPr>
+          <a:xfrm>
+            <a:off x="548640" y="1554480"/>
+            <a:ext cx="10881360" cy="658368"/>
+          </a:xfrm>
+          <a:prstGeom prst="roundRect">
+            <a:avLst>
+              <a:gd name="adj" fmla="val 6000"/>
+            </a:avLst>
+          </a:prstGeom>
+          <a:solidFill>
+            <a:srgbClr val="111823"/>
+          </a:solidFill>
+          <a:ln w="12700">
+            <a:solidFill>
+              <a:srgbClr val="1E2A3A"/>
+            </a:solidFill>
+          </a:ln>
+          <a:effectLst/>
+        </p:spPr>
+        <p:style>
+          <a:lnRef idx="1">
+            <a:schemeClr val="accent1"/>
+          </a:lnRef>
+          <a:fillRef idx="3">
+            <a:schemeClr val="accent1"/>
+          </a:fillRef>
+          <a:effectRef idx="2">
+            <a:schemeClr val="accent1"/>
+          </a:effectRef>
+          <a:fontRef idx="minor">
+            <a:schemeClr val="lt1"/>
+          </a:fontRef>
+        </p:style>
+        <p:txBody>
+          <a:bodyPr rtlCol="0" anchor="ctr"/>
+          <a:lstStyle/>
+          <a:p>
+            <a:pPr algn="ctr"/>
+          </a:p>
+        </p:txBody>
+      </p:sp>
+      <p:sp>
+        <p:nvSpPr>
+          <p:cNvPr id="8" name="TextBox 7"/>
           <p:cNvSpPr txBox="1"/>
           <p:nvPr/>
         </p:nvSpPr>
         <p:spPr>
           <a:xfrm>
-            <a:off x="548640" y="1463040"/>
-            <a:ext cx="10881360" cy="4389120"/>
+            <a:off x="822960" y="1673352"/>
+            <a:ext cx="2103120" cy="411480"/>
           </a:xfrm>
           <a:prstGeom prst="rect">
             <a:avLst/>
@@ -4977,112 +4672,33 @@
           </a:bodyPr>
           <a:lstStyle/>
           <a:p>
-            <a:pPr>
-              <a:lnSpc>
-                <a:spcPct val="120000"/>
-              </a:lnSpc>
-              <a:spcAft>
-                <a:spcPts val="1800"/>
-              </a:spcAft>
-            </a:pPr>
-            <a:r>
-              <a:rPr sz="1600">
-                <a:solidFill>
-                  <a:srgbClr val="9FB0C6"/>
-                </a:solidFill>
-                <a:latin typeface="Inter"/>
-              </a:rPr>
-              <a:t>▸ Horizontal scale-out: independent capture/ANPR workers, sharded by camera set — no component assumes a single-machine camera count.</a:t>
-            </a:r>
-          </a:p>
-          <a:p>
-            <a:pPr>
-              <a:lnSpc>
-                <a:spcPct val="120000"/>
-              </a:lnSpc>
-              <a:spcAft>
-                <a:spcPts val="1800"/>
-              </a:spcAft>
-            </a:pPr>
-            <a:r>
-              <a:rPr sz="1600">
-                <a:solidFill>
-                  <a:srgbClr val="9FB0C6"/>
-                </a:solidFill>
-                <a:latin typeface="Inter"/>
-              </a:rPr>
-              <a:t>▸ Edge pre-filtering + GPU/accelerator path is the realistic route to ~80,000-camera scale; this prototype's frame-sampling and confidence knobs are exactly what moves to edge-side config.</a:t>
-            </a:r>
-          </a:p>
-          <a:p>
-            <a:pPr>
-              <a:lnSpc>
-                <a:spcPct val="120000"/>
-              </a:lnSpc>
-              <a:spcAft>
-                <a:spcPts val="1800"/>
-              </a:spcAft>
-            </a:pPr>
-            <a:r>
-              <a:rPr sz="1600">
-                <a:solidFill>
-                  <a:srgbClr val="9FB0C6"/>
-                </a:solidFill>
-                <a:latin typeface="Inter"/>
-              </a:rPr>
-              <a:t>▸ Credentials never logged (verified in code); consume-only design — never pushes to or controls any gateway.</a:t>
-            </a:r>
-          </a:p>
-          <a:p>
-            <a:pPr>
-              <a:lnSpc>
-                <a:spcPct val="120000"/>
-              </a:lnSpc>
-              <a:spcAft>
-                <a:spcPts val="1800"/>
-              </a:spcAft>
-            </a:pPr>
-            <a:r>
-              <a:rPr sz="1600">
-                <a:solidFill>
-                  <a:srgbClr val="9FB0C6"/>
-                </a:solidFill>
-                <a:latin typeface="Inter"/>
-              </a:rPr>
-              <a:t>▸ No department's existing VMS, storage, or retention policy is touched.</a:t>
-            </a:r>
-          </a:p>
-          <a:p>
-            <a:pPr>
-              <a:lnSpc>
-                <a:spcPct val="120000"/>
-              </a:lnSpc>
-              <a:spcAft>
-                <a:spcPts val="1800"/>
-              </a:spcAft>
-            </a:pPr>
-            <a:r>
-              <a:rPr sz="1600">
-                <a:solidFill>
-                  <a:srgbClr val="9FB0C6"/>
-                </a:solidFill>
-                <a:latin typeface="Inter"/>
-              </a:rPr>
-              <a:t>▸ RBAC, audit logging, and TLS-everywhere are the production hardening path beyond this prototype.</a:t>
-            </a:r>
-          </a:p>
-        </p:txBody>
-      </p:sp>
-      <p:sp>
-        <p:nvSpPr>
-          <p:cNvPr id="8" name="TextBox 7"/>
+            <a:pPr algn="l">
+              <a:lnSpc>
+                <a:spcPct val="115000"/>
+              </a:lnSpc>
+            </a:pPr>
+            <a:r>
+              <a:rPr sz="1500" b="1">
+                <a:solidFill>
+                  <a:srgbClr val="3B82F6"/>
+                </a:solidFill>
+                <a:latin typeface="Consolas"/>
+              </a:rPr>
+              <a:t>Capture</a:t>
+            </a:r>
+          </a:p>
+        </p:txBody>
+      </p:sp>
+      <p:sp>
+        <p:nvSpPr>
+          <p:cNvPr id="9" name="TextBox 8"/>
           <p:cNvSpPr txBox="1"/>
           <p:nvPr/>
         </p:nvSpPr>
         <p:spPr>
           <a:xfrm>
-            <a:off x="548640" y="6473952"/>
-            <a:ext cx="5486400" cy="274320"/>
+            <a:off x="3017520" y="1673352"/>
+            <a:ext cx="8229600" cy="411480"/>
           </a:xfrm>
           <a:prstGeom prst="rect">
             <a:avLst/>
@@ -5101,6 +4717,588 @@
               </a:lnSpc>
             </a:pPr>
             <a:r>
+              <a:rPr sz="1500" b="0">
+                <a:solidFill>
+                  <a:srgbClr val="E6EDF5"/>
+                </a:solidFill>
+                <a:latin typeface="Inter"/>
+              </a:rPr>
+              <a:t>OpenCV + FFmpeg backend (Python)</a:t>
+            </a:r>
+          </a:p>
+        </p:txBody>
+      </p:sp>
+      <p:sp>
+        <p:nvSpPr>
+          <p:cNvPr id="10" name="Rounded Rectangle 9"/>
+          <p:cNvSpPr/>
+          <p:nvPr/>
+        </p:nvSpPr>
+        <p:spPr>
+          <a:xfrm>
+            <a:off x="548640" y="2377440"/>
+            <a:ext cx="10881360" cy="658368"/>
+          </a:xfrm>
+          <a:prstGeom prst="roundRect">
+            <a:avLst>
+              <a:gd name="adj" fmla="val 6000"/>
+            </a:avLst>
+          </a:prstGeom>
+          <a:solidFill>
+            <a:srgbClr val="111823"/>
+          </a:solidFill>
+          <a:ln w="12700">
+            <a:solidFill>
+              <a:srgbClr val="1E2A3A"/>
+            </a:solidFill>
+          </a:ln>
+          <a:effectLst/>
+        </p:spPr>
+        <p:style>
+          <a:lnRef idx="1">
+            <a:schemeClr val="accent1"/>
+          </a:lnRef>
+          <a:fillRef idx="3">
+            <a:schemeClr val="accent1"/>
+          </a:fillRef>
+          <a:effectRef idx="2">
+            <a:schemeClr val="accent1"/>
+          </a:effectRef>
+          <a:fontRef idx="minor">
+            <a:schemeClr val="lt1"/>
+          </a:fontRef>
+        </p:style>
+        <p:txBody>
+          <a:bodyPr rtlCol="0" anchor="ctr"/>
+          <a:lstStyle/>
+          <a:p>
+            <a:pPr algn="ctr"/>
+          </a:p>
+        </p:txBody>
+      </p:sp>
+      <p:sp>
+        <p:nvSpPr>
+          <p:cNvPr id="11" name="TextBox 10"/>
+          <p:cNvSpPr txBox="1"/>
+          <p:nvPr/>
+        </p:nvSpPr>
+        <p:spPr>
+          <a:xfrm>
+            <a:off x="822960" y="2496312"/>
+            <a:ext cx="2103120" cy="411480"/>
+          </a:xfrm>
+          <a:prstGeom prst="rect">
+            <a:avLst/>
+          </a:prstGeom>
+          <a:noFill/>
+        </p:spPr>
+        <p:txBody>
+          <a:bodyPr wrap="square">
+            <a:spAutoFit/>
+          </a:bodyPr>
+          <a:lstStyle/>
+          <a:p>
+            <a:pPr algn="l">
+              <a:lnSpc>
+                <a:spcPct val="115000"/>
+              </a:lnSpc>
+            </a:pPr>
+            <a:r>
+              <a:rPr sz="1500" b="1">
+                <a:solidFill>
+                  <a:srgbClr val="3B82F6"/>
+                </a:solidFill>
+                <a:latin typeface="Consolas"/>
+              </a:rPr>
+              <a:t>Detection</a:t>
+            </a:r>
+          </a:p>
+        </p:txBody>
+      </p:sp>
+      <p:sp>
+        <p:nvSpPr>
+          <p:cNvPr id="12" name="TextBox 11"/>
+          <p:cNvSpPr txBox="1"/>
+          <p:nvPr/>
+        </p:nvSpPr>
+        <p:spPr>
+          <a:xfrm>
+            <a:off x="3017520" y="2496312"/>
+            <a:ext cx="8229600" cy="411480"/>
+          </a:xfrm>
+          <a:prstGeom prst="rect">
+            <a:avLst/>
+          </a:prstGeom>
+          <a:noFill/>
+        </p:spPr>
+        <p:txBody>
+          <a:bodyPr wrap="square">
+            <a:spAutoFit/>
+          </a:bodyPr>
+          <a:lstStyle/>
+          <a:p>
+            <a:pPr algn="l">
+              <a:lnSpc>
+                <a:spcPct val="115000"/>
+              </a:lnSpc>
+            </a:pPr>
+            <a:r>
+              <a:rPr sz="1500" b="0">
+                <a:solidFill>
+                  <a:srgbClr val="E6EDF5"/>
+                </a:solidFill>
+                <a:latin typeface="Inter"/>
+              </a:rPr>
+              <a:t>Ultralytics YOLO — pretrained, CPU-only</a:t>
+            </a:r>
+          </a:p>
+        </p:txBody>
+      </p:sp>
+      <p:sp>
+        <p:nvSpPr>
+          <p:cNvPr id="13" name="Rounded Rectangle 12"/>
+          <p:cNvSpPr/>
+          <p:nvPr/>
+        </p:nvSpPr>
+        <p:spPr>
+          <a:xfrm>
+            <a:off x="548640" y="3200400"/>
+            <a:ext cx="10881360" cy="658368"/>
+          </a:xfrm>
+          <a:prstGeom prst="roundRect">
+            <a:avLst>
+              <a:gd name="adj" fmla="val 6000"/>
+            </a:avLst>
+          </a:prstGeom>
+          <a:solidFill>
+            <a:srgbClr val="111823"/>
+          </a:solidFill>
+          <a:ln w="12700">
+            <a:solidFill>
+              <a:srgbClr val="1E2A3A"/>
+            </a:solidFill>
+          </a:ln>
+          <a:effectLst/>
+        </p:spPr>
+        <p:style>
+          <a:lnRef idx="1">
+            <a:schemeClr val="accent1"/>
+          </a:lnRef>
+          <a:fillRef idx="3">
+            <a:schemeClr val="accent1"/>
+          </a:fillRef>
+          <a:effectRef idx="2">
+            <a:schemeClr val="accent1"/>
+          </a:effectRef>
+          <a:fontRef idx="minor">
+            <a:schemeClr val="lt1"/>
+          </a:fontRef>
+        </p:style>
+        <p:txBody>
+          <a:bodyPr rtlCol="0" anchor="ctr"/>
+          <a:lstStyle/>
+          <a:p>
+            <a:pPr algn="ctr"/>
+          </a:p>
+        </p:txBody>
+      </p:sp>
+      <p:sp>
+        <p:nvSpPr>
+          <p:cNvPr id="14" name="TextBox 13"/>
+          <p:cNvSpPr txBox="1"/>
+          <p:nvPr/>
+        </p:nvSpPr>
+        <p:spPr>
+          <a:xfrm>
+            <a:off x="822960" y="3319272"/>
+            <a:ext cx="2103120" cy="411480"/>
+          </a:xfrm>
+          <a:prstGeom prst="rect">
+            <a:avLst/>
+          </a:prstGeom>
+          <a:noFill/>
+        </p:spPr>
+        <p:txBody>
+          <a:bodyPr wrap="square">
+            <a:spAutoFit/>
+          </a:bodyPr>
+          <a:lstStyle/>
+          <a:p>
+            <a:pPr algn="l">
+              <a:lnSpc>
+                <a:spcPct val="115000"/>
+              </a:lnSpc>
+            </a:pPr>
+            <a:r>
+              <a:rPr sz="1500" b="1">
+                <a:solidFill>
+                  <a:srgbClr val="3B82F6"/>
+                </a:solidFill>
+                <a:latin typeface="Consolas"/>
+              </a:rPr>
+              <a:t>OCR</a:t>
+            </a:r>
+          </a:p>
+        </p:txBody>
+      </p:sp>
+      <p:sp>
+        <p:nvSpPr>
+          <p:cNvPr id="15" name="TextBox 14"/>
+          <p:cNvSpPr txBox="1"/>
+          <p:nvPr/>
+        </p:nvSpPr>
+        <p:spPr>
+          <a:xfrm>
+            <a:off x="3017520" y="3319272"/>
+            <a:ext cx="8229600" cy="411480"/>
+          </a:xfrm>
+          <a:prstGeom prst="rect">
+            <a:avLst/>
+          </a:prstGeom>
+          <a:noFill/>
+        </p:spPr>
+        <p:txBody>
+          <a:bodyPr wrap="square">
+            <a:spAutoFit/>
+          </a:bodyPr>
+          <a:lstStyle/>
+          <a:p>
+            <a:pPr algn="l">
+              <a:lnSpc>
+                <a:spcPct val="115000"/>
+              </a:lnSpc>
+            </a:pPr>
+            <a:r>
+              <a:rPr sz="1500" b="0">
+                <a:solidFill>
+                  <a:srgbClr val="E6EDF5"/>
+                </a:solidFill>
+                <a:latin typeface="Inter"/>
+              </a:rPr>
+              <a:t>PaddleOCR (PP-OCRv6)</a:t>
+            </a:r>
+          </a:p>
+        </p:txBody>
+      </p:sp>
+      <p:sp>
+        <p:nvSpPr>
+          <p:cNvPr id="16" name="Rounded Rectangle 15"/>
+          <p:cNvSpPr/>
+          <p:nvPr/>
+        </p:nvSpPr>
+        <p:spPr>
+          <a:xfrm>
+            <a:off x="548640" y="4023360"/>
+            <a:ext cx="10881360" cy="658368"/>
+          </a:xfrm>
+          <a:prstGeom prst="roundRect">
+            <a:avLst>
+              <a:gd name="adj" fmla="val 6000"/>
+            </a:avLst>
+          </a:prstGeom>
+          <a:solidFill>
+            <a:srgbClr val="111823"/>
+          </a:solidFill>
+          <a:ln w="12700">
+            <a:solidFill>
+              <a:srgbClr val="1E2A3A"/>
+            </a:solidFill>
+          </a:ln>
+          <a:effectLst/>
+        </p:spPr>
+        <p:style>
+          <a:lnRef idx="1">
+            <a:schemeClr val="accent1"/>
+          </a:lnRef>
+          <a:fillRef idx="3">
+            <a:schemeClr val="accent1"/>
+          </a:fillRef>
+          <a:effectRef idx="2">
+            <a:schemeClr val="accent1"/>
+          </a:effectRef>
+          <a:fontRef idx="minor">
+            <a:schemeClr val="lt1"/>
+          </a:fontRef>
+        </p:style>
+        <p:txBody>
+          <a:bodyPr rtlCol="0" anchor="ctr"/>
+          <a:lstStyle/>
+          <a:p>
+            <a:pPr algn="ctr"/>
+          </a:p>
+        </p:txBody>
+      </p:sp>
+      <p:sp>
+        <p:nvSpPr>
+          <p:cNvPr id="17" name="TextBox 16"/>
+          <p:cNvSpPr txBox="1"/>
+          <p:nvPr/>
+        </p:nvSpPr>
+        <p:spPr>
+          <a:xfrm>
+            <a:off x="822960" y="4142232"/>
+            <a:ext cx="2103120" cy="411480"/>
+          </a:xfrm>
+          <a:prstGeom prst="rect">
+            <a:avLst/>
+          </a:prstGeom>
+          <a:noFill/>
+        </p:spPr>
+        <p:txBody>
+          <a:bodyPr wrap="square">
+            <a:spAutoFit/>
+          </a:bodyPr>
+          <a:lstStyle/>
+          <a:p>
+            <a:pPr algn="l">
+              <a:lnSpc>
+                <a:spcPct val="115000"/>
+              </a:lnSpc>
+            </a:pPr>
+            <a:r>
+              <a:rPr sz="1500" b="1">
+                <a:solidFill>
+                  <a:srgbClr val="3B82F6"/>
+                </a:solidFill>
+                <a:latin typeface="Consolas"/>
+              </a:rPr>
+              <a:t>Storage</a:t>
+            </a:r>
+          </a:p>
+        </p:txBody>
+      </p:sp>
+      <p:sp>
+        <p:nvSpPr>
+          <p:cNvPr id="18" name="TextBox 17"/>
+          <p:cNvSpPr txBox="1"/>
+          <p:nvPr/>
+        </p:nvSpPr>
+        <p:spPr>
+          <a:xfrm>
+            <a:off x="3017520" y="4142232"/>
+            <a:ext cx="8229600" cy="411480"/>
+          </a:xfrm>
+          <a:prstGeom prst="rect">
+            <a:avLst/>
+          </a:prstGeom>
+          <a:noFill/>
+        </p:spPr>
+        <p:txBody>
+          <a:bodyPr wrap="square">
+            <a:spAutoFit/>
+          </a:bodyPr>
+          <a:lstStyle/>
+          <a:p>
+            <a:pPr algn="l">
+              <a:lnSpc>
+                <a:spcPct val="115000"/>
+              </a:lnSpc>
+            </a:pPr>
+            <a:r>
+              <a:rPr sz="1500" b="0">
+                <a:solidFill>
+                  <a:srgbClr val="E6EDF5"/>
+                </a:solidFill>
+                <a:latin typeface="Inter"/>
+              </a:rPr>
+              <a:t>SQLite (pilot); schema-compatible path to PostgreSQL</a:t>
+            </a:r>
+          </a:p>
+        </p:txBody>
+      </p:sp>
+      <p:sp>
+        <p:nvSpPr>
+          <p:cNvPr id="19" name="Rounded Rectangle 18"/>
+          <p:cNvSpPr/>
+          <p:nvPr/>
+        </p:nvSpPr>
+        <p:spPr>
+          <a:xfrm>
+            <a:off x="548640" y="4846320"/>
+            <a:ext cx="10881360" cy="658368"/>
+          </a:xfrm>
+          <a:prstGeom prst="roundRect">
+            <a:avLst>
+              <a:gd name="adj" fmla="val 6000"/>
+            </a:avLst>
+          </a:prstGeom>
+          <a:solidFill>
+            <a:srgbClr val="111823"/>
+          </a:solidFill>
+          <a:ln w="12700">
+            <a:solidFill>
+              <a:srgbClr val="1E2A3A"/>
+            </a:solidFill>
+          </a:ln>
+          <a:effectLst/>
+        </p:spPr>
+        <p:style>
+          <a:lnRef idx="1">
+            <a:schemeClr val="accent1"/>
+          </a:lnRef>
+          <a:fillRef idx="3">
+            <a:schemeClr val="accent1"/>
+          </a:fillRef>
+          <a:effectRef idx="2">
+            <a:schemeClr val="accent1"/>
+          </a:effectRef>
+          <a:fontRef idx="minor">
+            <a:schemeClr val="lt1"/>
+          </a:fontRef>
+        </p:style>
+        <p:txBody>
+          <a:bodyPr rtlCol="0" anchor="ctr"/>
+          <a:lstStyle/>
+          <a:p>
+            <a:pPr algn="ctr"/>
+          </a:p>
+        </p:txBody>
+      </p:sp>
+      <p:sp>
+        <p:nvSpPr>
+          <p:cNvPr id="20" name="TextBox 19"/>
+          <p:cNvSpPr txBox="1"/>
+          <p:nvPr/>
+        </p:nvSpPr>
+        <p:spPr>
+          <a:xfrm>
+            <a:off x="822960" y="4965192"/>
+            <a:ext cx="2103120" cy="411480"/>
+          </a:xfrm>
+          <a:prstGeom prst="rect">
+            <a:avLst/>
+          </a:prstGeom>
+          <a:noFill/>
+        </p:spPr>
+        <p:txBody>
+          <a:bodyPr wrap="square">
+            <a:spAutoFit/>
+          </a:bodyPr>
+          <a:lstStyle/>
+          <a:p>
+            <a:pPr algn="l">
+              <a:lnSpc>
+                <a:spcPct val="115000"/>
+              </a:lnSpc>
+            </a:pPr>
+            <a:r>
+              <a:rPr sz="1500" b="1">
+                <a:solidFill>
+                  <a:srgbClr val="3B82F6"/>
+                </a:solidFill>
+                <a:latin typeface="Consolas"/>
+              </a:rPr>
+              <a:t>Dashboard</a:t>
+            </a:r>
+          </a:p>
+        </p:txBody>
+      </p:sp>
+      <p:sp>
+        <p:nvSpPr>
+          <p:cNvPr id="21" name="TextBox 20"/>
+          <p:cNvSpPr txBox="1"/>
+          <p:nvPr/>
+        </p:nvSpPr>
+        <p:spPr>
+          <a:xfrm>
+            <a:off x="3017520" y="4965192"/>
+            <a:ext cx="8229600" cy="411480"/>
+          </a:xfrm>
+          <a:prstGeom prst="rect">
+            <a:avLst/>
+          </a:prstGeom>
+          <a:noFill/>
+        </p:spPr>
+        <p:txBody>
+          <a:bodyPr wrap="square">
+            <a:spAutoFit/>
+          </a:bodyPr>
+          <a:lstStyle/>
+          <a:p>
+            <a:pPr algn="l">
+              <a:lnSpc>
+                <a:spcPct val="115000"/>
+              </a:lnSpc>
+            </a:pPr>
+            <a:r>
+              <a:rPr sz="1500" b="0">
+                <a:solidFill>
+                  <a:srgbClr val="E6EDF5"/>
+                </a:solidFill>
+                <a:latin typeface="Inter"/>
+              </a:rPr>
+              <a:t>Streamlit, custom dark theme</a:t>
+            </a:r>
+          </a:p>
+        </p:txBody>
+      </p:sp>
+      <p:sp>
+        <p:nvSpPr>
+          <p:cNvPr id="22" name="TextBox 21"/>
+          <p:cNvSpPr txBox="1"/>
+          <p:nvPr/>
+        </p:nvSpPr>
+        <p:spPr>
+          <a:xfrm>
+            <a:off x="548640" y="5760720"/>
+            <a:ext cx="10881360" cy="457200"/>
+          </a:xfrm>
+          <a:prstGeom prst="rect">
+            <a:avLst/>
+          </a:prstGeom>
+          <a:noFill/>
+        </p:spPr>
+        <p:txBody>
+          <a:bodyPr wrap="square">
+            <a:spAutoFit/>
+          </a:bodyPr>
+          <a:lstStyle/>
+          <a:p>
+            <a:pPr algn="l">
+              <a:lnSpc>
+                <a:spcPct val="115000"/>
+              </a:lnSpc>
+            </a:pPr>
+            <a:r>
+              <a:rPr sz="1400" b="0">
+                <a:solidFill>
+                  <a:srgbClr val="9FB0C6"/>
+                </a:solidFill>
+                <a:latin typeface="Inter"/>
+              </a:rPr>
+              <a:t>No GPU, no external message bus required at this scale — deliberately minimal-dependency for fast, reliable deployment.</a:t>
+            </a:r>
+          </a:p>
+        </p:txBody>
+      </p:sp>
+      <p:sp>
+        <p:nvSpPr>
+          <p:cNvPr id="23" name="TextBox 22"/>
+          <p:cNvSpPr txBox="1"/>
+          <p:nvPr/>
+        </p:nvSpPr>
+        <p:spPr>
+          <a:xfrm>
+            <a:off x="548640" y="6473952"/>
+            <a:ext cx="5486400" cy="274320"/>
+          </a:xfrm>
+          <a:prstGeom prst="rect">
+            <a:avLst/>
+          </a:prstGeom>
+          <a:noFill/>
+        </p:spPr>
+        <p:txBody>
+          <a:bodyPr wrap="square">
+            <a:spAutoFit/>
+          </a:bodyPr>
+          <a:lstStyle/>
+          <a:p>
+            <a:pPr algn="l">
+              <a:lnSpc>
+                <a:spcPct val="115000"/>
+              </a:lnSpc>
+            </a:pPr>
+            <a:r>
               <a:rPr sz="900" b="0">
                 <a:solidFill>
                   <a:srgbClr val="5C6B86"/>
@@ -5114,7 +5312,7 @@
       </p:sp>
       <p:sp>
         <p:nvSpPr>
-          <p:cNvPr id="9" name="TextBox 8"/>
+          <p:cNvPr id="24" name="TextBox 23"/>
           <p:cNvSpPr txBox="1"/>
           <p:nvPr/>
         </p:nvSpPr>
@@ -5271,7 +5469,7 @@
                 </a:solidFill>
                 <a:latin typeface="Consolas"/>
               </a:rPr>
-              <a:t>EXPECTED OUTCOMES</a:t>
+              <a:t>PATH TO STATEWIDE SCALE</a:t>
             </a:r>
           </a:p>
         </p:txBody>
@@ -5310,7 +5508,7 @@
                 </a:solidFill>
                 <a:latin typeface="Inter"/>
               </a:rPr>
-              <a:t>Operational Benefits</a:t>
+              <a:t>Scalability, Security &amp; Deployment</a:t>
             </a:r>
           </a:p>
         </p:txBody>
@@ -5368,7 +5566,7 @@
         <p:spPr>
           <a:xfrm>
             <a:off x="548640" y="1463040"/>
-            <a:ext cx="10881360" cy="4114800"/>
+            <a:ext cx="10881360" cy="4389120"/>
           </a:xfrm>
           <a:prstGeom prst="rect">
             <a:avLst/>
@@ -5386,17 +5584,17 @@
                 <a:spcPct val="120000"/>
               </a:lnSpc>
               <a:spcAft>
-                <a:spcPts val="2200"/>
+                <a:spcPts val="1800"/>
               </a:spcAft>
             </a:pPr>
             <a:r>
-              <a:rPr sz="1800">
+              <a:rPr sz="1600">
                 <a:solidFill>
                   <a:srgbClr val="9FB0C6"/>
                 </a:solidFill>
                 <a:latin typeface="Inter"/>
               </a:rPr>
-              <a:t>▸ Single pane of glass across departments — without a multi-year federation program.</a:t>
+              <a:t>▸ Horizontal scale-out: independent capture/ANPR workers, sharded by camera set — no component assumes a single-machine camera count.</a:t>
             </a:r>
           </a:p>
           <a:p>
@@ -5405,17 +5603,17 @@
                 <a:spcPct val="120000"/>
               </a:lnSpc>
               <a:spcAft>
-                <a:spcPts val="2200"/>
+                <a:spcPts val="1800"/>
               </a:spcAft>
             </a:pPr>
             <a:r>
-              <a:rPr sz="1800">
+              <a:rPr sz="1600">
                 <a:solidFill>
                   <a:srgbClr val="9FB0C6"/>
                 </a:solidFill>
                 <a:latin typeface="Inter"/>
               </a:rPr>
-              <a:t>▸ Automated, continuous watchlist correlation — proactive alerting instead of manual after-the-fact video review.</a:t>
+              <a:t>▸ Edge pre-filtering + GPU/accelerator path is the realistic route to ~80,000-camera scale; this prototype's frame-sampling and confidence knobs are exactly what moves to edge-side config.</a:t>
             </a:r>
           </a:p>
           <a:p>
@@ -5424,17 +5622,55 @@
                 <a:spcPct val="120000"/>
               </a:lnSpc>
               <a:spcAft>
-                <a:spcPts val="2200"/>
+                <a:spcPts val="1800"/>
               </a:spcAft>
             </a:pPr>
             <a:r>
-              <a:rPr sz="1800">
+              <a:rPr sz="1600">
                 <a:solidFill>
                   <a:srgbClr val="9FB0C6"/>
                 </a:solidFill>
                 <a:latin typeface="Inter"/>
               </a:rPr>
-              <a:t>▸ Fast, low-risk path to statewide expansion: same architecture, more camera shards, no redesign required.</a:t>
+              <a:t>▸ Credentials never logged (verified in code); consume-only design — never pushes to or controls any gateway.</a:t>
+            </a:r>
+          </a:p>
+          <a:p>
+            <a:pPr>
+              <a:lnSpc>
+                <a:spcPct val="120000"/>
+              </a:lnSpc>
+              <a:spcAft>
+                <a:spcPts val="1800"/>
+              </a:spcAft>
+            </a:pPr>
+            <a:r>
+              <a:rPr sz="1600">
+                <a:solidFill>
+                  <a:srgbClr val="9FB0C6"/>
+                </a:solidFill>
+                <a:latin typeface="Inter"/>
+              </a:rPr>
+              <a:t>▸ No department's existing VMS, storage, or retention policy is touched.</a:t>
+            </a:r>
+          </a:p>
+          <a:p>
+            <a:pPr>
+              <a:lnSpc>
+                <a:spcPct val="120000"/>
+              </a:lnSpc>
+              <a:spcAft>
+                <a:spcPts val="1800"/>
+              </a:spcAft>
+            </a:pPr>
+            <a:r>
+              <a:rPr sz="1600">
+                <a:solidFill>
+                  <a:srgbClr val="9FB0C6"/>
+                </a:solidFill>
+                <a:latin typeface="Inter"/>
+              </a:rPr>
+              <a:t>▸ RBAC, audit logging, and TLS-everywhere are the production hardening path beyond this prototype.</a:t>
             </a:r>
           </a:p>
         </p:txBody>
@@ -5637,7 +5873,7 @@
                 </a:solidFill>
                 <a:latin typeface="Consolas"/>
               </a:rPr>
-              <a:t>HONEST ABOUT CURRENT SCOPE</a:t>
+              <a:t>EXPECTED OUTCOMES</a:t>
             </a:r>
           </a:p>
         </p:txBody>
@@ -5676,7 +5912,7 @@
                 </a:solidFill>
                 <a:latin typeface="Inter"/>
               </a:rPr>
-              <a:t>What's Next</a:t>
+              <a:t>Operational Benefits</a:t>
             </a:r>
           </a:p>
         </p:txBody>
@@ -5752,17 +5988,17 @@
                 <a:spcPct val="120000"/>
               </a:lnSpc>
               <a:spcAft>
-                <a:spcPts val="1800"/>
+                <a:spcPts val="2200"/>
               </a:spcAft>
             </a:pPr>
             <a:r>
-              <a:rPr sz="1700">
+              <a:rPr sz="1800">
                 <a:solidFill>
                   <a:srgbClr val="9FB0C6"/>
                 </a:solidFill>
                 <a:latin typeface="Inter"/>
               </a:rPr>
-              <a:t>▸ Face Recognition (FRS) and other analytics — explicitly out of scope for this build, bonus territory.</a:t>
+              <a:t>▸ Single pane of glass across departments — without a multi-year federation program.</a:t>
             </a:r>
           </a:p>
           <a:p>
@@ -5771,17 +6007,17 @@
                 <a:spcPct val="120000"/>
               </a:lnSpc>
               <a:spcAft>
-                <a:spcPts val="1800"/>
+                <a:spcPts val="2200"/>
               </a:spcAft>
             </a:pPr>
             <a:r>
-              <a:rPr sz="1700">
+              <a:rPr sz="1800">
                 <a:solidFill>
                   <a:srgbClr val="9FB0C6"/>
                 </a:solidFill>
                 <a:latin typeface="Inter"/>
               </a:rPr>
-              <a:t>▸ Live VAHAN / eGujCop integration — currently a representative demo watchlist, as explicitly permitted by the challenge rules.</a:t>
+              <a:t>▸ Automated, continuous watchlist correlation — proactive alerting instead of manual after-the-fact video review.</a:t>
             </a:r>
           </a:p>
           <a:p>
@@ -5790,17 +6026,17 @@
                 <a:spcPct val="120000"/>
               </a:lnSpc>
               <a:spcAft>
-                <a:spcPts val="1800"/>
+                <a:spcPts val="2200"/>
               </a:spcAft>
             </a:pPr>
             <a:r>
-              <a:rPr sz="1700">
+              <a:rPr sz="1800">
                 <a:solidFill>
                   <a:srgbClr val="9FB0C6"/>
                 </a:solidFill>
                 <a:latin typeface="Inter"/>
               </a:rPr>
-              <a:t>▸ Edge deployment pilot for bandwidth-constrained districts.</a:t>
+              <a:t>▸ Fast, low-risk path to statewide expansion: same architecture, more camera shards, no redesign required.</a:t>
             </a:r>
           </a:p>
         </p:txBody>
@@ -5977,6 +6213,372 @@
         </p:nvSpPr>
         <p:spPr>
           <a:xfrm>
+            <a:off x="548640" y="320040"/>
+            <a:ext cx="7315200" cy="320040"/>
+          </a:xfrm>
+          <a:prstGeom prst="rect">
+            <a:avLst/>
+          </a:prstGeom>
+          <a:noFill/>
+        </p:spPr>
+        <p:txBody>
+          <a:bodyPr wrap="square">
+            <a:spAutoFit/>
+          </a:bodyPr>
+          <a:lstStyle/>
+          <a:p>
+            <a:pPr algn="l">
+              <a:lnSpc>
+                <a:spcPct val="115000"/>
+              </a:lnSpc>
+            </a:pPr>
+            <a:r>
+              <a:rPr sz="1200" b="1">
+                <a:solidFill>
+                  <a:srgbClr val="3B82F6"/>
+                </a:solidFill>
+                <a:latin typeface="Consolas"/>
+              </a:rPr>
+              <a:t>HONEST ABOUT CURRENT SCOPE</a:t>
+            </a:r>
+          </a:p>
+        </p:txBody>
+      </p:sp>
+      <p:sp>
+        <p:nvSpPr>
+          <p:cNvPr id="5" name="TextBox 4"/>
+          <p:cNvSpPr txBox="1"/>
+          <p:nvPr/>
+        </p:nvSpPr>
+        <p:spPr>
+          <a:xfrm>
+            <a:off x="548640" y="621792"/>
+            <a:ext cx="10058400" cy="640080"/>
+          </a:xfrm>
+          <a:prstGeom prst="rect">
+            <a:avLst/>
+          </a:prstGeom>
+          <a:noFill/>
+        </p:spPr>
+        <p:txBody>
+          <a:bodyPr wrap="square">
+            <a:spAutoFit/>
+          </a:bodyPr>
+          <a:lstStyle/>
+          <a:p>
+            <a:pPr algn="l">
+              <a:lnSpc>
+                <a:spcPct val="115000"/>
+              </a:lnSpc>
+            </a:pPr>
+            <a:r>
+              <a:rPr sz="2800" b="1">
+                <a:solidFill>
+                  <a:srgbClr val="E6EDF5"/>
+                </a:solidFill>
+                <a:latin typeface="Inter"/>
+              </a:rPr>
+              <a:t>What's Next</a:t>
+            </a:r>
+          </a:p>
+        </p:txBody>
+      </p:sp>
+      <p:sp>
+        <p:nvSpPr>
+          <p:cNvPr id="6" name="Rectangle 5"/>
+          <p:cNvSpPr/>
+          <p:nvPr/>
+        </p:nvSpPr>
+        <p:spPr>
+          <a:xfrm>
+            <a:off x="548640" y="1234440"/>
+            <a:ext cx="11064240" cy="19050"/>
+          </a:xfrm>
+          <a:prstGeom prst="rect">
+            <a:avLst/>
+          </a:prstGeom>
+          <a:solidFill>
+            <a:srgbClr val="1E2A3A"/>
+          </a:solidFill>
+          <a:ln>
+            <a:noFill/>
+          </a:ln>
+          <a:effectLst/>
+        </p:spPr>
+        <p:style>
+          <a:lnRef idx="1">
+            <a:schemeClr val="accent1"/>
+          </a:lnRef>
+          <a:fillRef idx="3">
+            <a:schemeClr val="accent1"/>
+          </a:fillRef>
+          <a:effectRef idx="2">
+            <a:schemeClr val="accent1"/>
+          </a:effectRef>
+          <a:fontRef idx="minor">
+            <a:schemeClr val="lt1"/>
+          </a:fontRef>
+        </p:style>
+        <p:txBody>
+          <a:bodyPr rtlCol="0" anchor="ctr"/>
+          <a:lstStyle/>
+          <a:p>
+            <a:pPr algn="ctr"/>
+          </a:p>
+        </p:txBody>
+      </p:sp>
+      <p:sp>
+        <p:nvSpPr>
+          <p:cNvPr id="7" name="TextBox 6"/>
+          <p:cNvSpPr txBox="1"/>
+          <p:nvPr/>
+        </p:nvSpPr>
+        <p:spPr>
+          <a:xfrm>
+            <a:off x="548640" y="1463040"/>
+            <a:ext cx="10881360" cy="4114800"/>
+          </a:xfrm>
+          <a:prstGeom prst="rect">
+            <a:avLst/>
+          </a:prstGeom>
+          <a:noFill/>
+        </p:spPr>
+        <p:txBody>
+          <a:bodyPr wrap="square">
+            <a:spAutoFit/>
+          </a:bodyPr>
+          <a:lstStyle/>
+          <a:p>
+            <a:pPr>
+              <a:lnSpc>
+                <a:spcPct val="120000"/>
+              </a:lnSpc>
+              <a:spcAft>
+                <a:spcPts val="1800"/>
+              </a:spcAft>
+            </a:pPr>
+            <a:r>
+              <a:rPr sz="1700">
+                <a:solidFill>
+                  <a:srgbClr val="9FB0C6"/>
+                </a:solidFill>
+                <a:latin typeface="Inter"/>
+              </a:rPr>
+              <a:t>▸ Face Recognition (FRS) and other analytics — explicitly out of scope for this build, bonus territory.</a:t>
+            </a:r>
+          </a:p>
+          <a:p>
+            <a:pPr>
+              <a:lnSpc>
+                <a:spcPct val="120000"/>
+              </a:lnSpc>
+              <a:spcAft>
+                <a:spcPts val="1800"/>
+              </a:spcAft>
+            </a:pPr>
+            <a:r>
+              <a:rPr sz="1700">
+                <a:solidFill>
+                  <a:srgbClr val="9FB0C6"/>
+                </a:solidFill>
+                <a:latin typeface="Inter"/>
+              </a:rPr>
+              <a:t>▸ Live VAHAN / eGujCop integration — currently a representative demo watchlist, as explicitly permitted by the challenge rules.</a:t>
+            </a:r>
+          </a:p>
+          <a:p>
+            <a:pPr>
+              <a:lnSpc>
+                <a:spcPct val="120000"/>
+              </a:lnSpc>
+              <a:spcAft>
+                <a:spcPts val="1800"/>
+              </a:spcAft>
+            </a:pPr>
+            <a:r>
+              <a:rPr sz="1700">
+                <a:solidFill>
+                  <a:srgbClr val="9FB0C6"/>
+                </a:solidFill>
+                <a:latin typeface="Inter"/>
+              </a:rPr>
+              <a:t>▸ Edge deployment pilot for bandwidth-constrained districts.</a:t>
+            </a:r>
+          </a:p>
+        </p:txBody>
+      </p:sp>
+      <p:sp>
+        <p:nvSpPr>
+          <p:cNvPr id="8" name="TextBox 7"/>
+          <p:cNvSpPr txBox="1"/>
+          <p:nvPr/>
+        </p:nvSpPr>
+        <p:spPr>
+          <a:xfrm>
+            <a:off x="548640" y="6473952"/>
+            <a:ext cx="5486400" cy="274320"/>
+          </a:xfrm>
+          <a:prstGeom prst="rect">
+            <a:avLst/>
+          </a:prstGeom>
+          <a:noFill/>
+        </p:spPr>
+        <p:txBody>
+          <a:bodyPr wrap="square">
+            <a:spAutoFit/>
+          </a:bodyPr>
+          <a:lstStyle/>
+          <a:p>
+            <a:pPr algn="l">
+              <a:lnSpc>
+                <a:spcPct val="115000"/>
+              </a:lnSpc>
+            </a:pPr>
+            <a:r>
+              <a:rPr sz="900" b="0">
+                <a:solidFill>
+                  <a:srgbClr val="5C6B86"/>
+                </a:solidFill>
+                <a:latin typeface="Consolas"/>
+              </a:rPr>
+              <a:t>SENTINEL — Gujarat Police Innovation Challenge 2026 · Model 2</a:t>
+            </a:r>
+          </a:p>
+        </p:txBody>
+      </p:sp>
+      <p:sp>
+        <p:nvSpPr>
+          <p:cNvPr id="9" name="TextBox 8"/>
+          <p:cNvSpPr txBox="1"/>
+          <p:nvPr/>
+        </p:nvSpPr>
+        <p:spPr>
+          <a:xfrm>
+            <a:off x="10972800" y="6473952"/>
+            <a:ext cx="640080" cy="274320"/>
+          </a:xfrm>
+          <a:prstGeom prst="rect">
+            <a:avLst/>
+          </a:prstGeom>
+          <a:noFill/>
+        </p:spPr>
+        <p:txBody>
+          <a:bodyPr wrap="square">
+            <a:spAutoFit/>
+          </a:bodyPr>
+          <a:lstStyle/>
+          <a:p>
+            <a:pPr algn="r">
+              <a:lnSpc>
+                <a:spcPct val="115000"/>
+              </a:lnSpc>
+            </a:pPr>
+            <a:r>
+              <a:rPr sz="900" b="0">
+                <a:solidFill>
+                  <a:srgbClr val="5C6B86"/>
+                </a:solidFill>
+                <a:latin typeface="Consolas"/>
+              </a:rPr>
+              <a:t>15</a:t>
+            </a:r>
+          </a:p>
+        </p:txBody>
+      </p:sp>
+    </p:spTree>
+  </p:cSld>
+  <p:clrMapOvr>
+    <a:masterClrMapping/>
+  </p:clrMapOvr>
+</p:sld>
+</file>
+
+<file path=ppt/slides/slide16.xml><?xml version="1.0" encoding="utf-8"?>
+<p:sld xmlns:a="http://schemas.openxmlformats.org/drawingml/2006/main" xmlns:p="http://schemas.openxmlformats.org/presentationml/2006/main" xmlns:r="http://schemas.openxmlformats.org/officeDocument/2006/relationships">
+  <p:cSld>
+    <p:spTree>
+      <p:nvGrpSpPr>
+        <p:cNvPr id="1" name=""/>
+        <p:cNvGrpSpPr/>
+        <p:nvPr/>
+      </p:nvGrpSpPr>
+      <p:grpSpPr/>
+      <p:sp>
+        <p:nvSpPr>
+          <p:cNvPr id="2" name="Rectangle 1"/>
+          <p:cNvSpPr/>
+          <p:nvPr/>
+        </p:nvSpPr>
+        <p:spPr>
+          <a:xfrm>
+            <a:off x="0" y="0"/>
+            <a:ext cx="12191695" cy="6858000"/>
+          </a:xfrm>
+          <a:prstGeom prst="rect">
+            <a:avLst/>
+          </a:prstGeom>
+          <a:solidFill>
+            <a:srgbClr val="0A0E14"/>
+          </a:solidFill>
+          <a:ln>
+            <a:noFill/>
+          </a:ln>
+          <a:effectLst/>
+        </p:spPr>
+        <p:style>
+          <a:lnRef idx="1">
+            <a:schemeClr val="accent1"/>
+          </a:lnRef>
+          <a:fillRef idx="3">
+            <a:schemeClr val="accent1"/>
+          </a:fillRef>
+          <a:effectRef idx="2">
+            <a:schemeClr val="accent1"/>
+          </a:effectRef>
+          <a:fontRef idx="minor">
+            <a:schemeClr val="lt1"/>
+          </a:fontRef>
+        </p:style>
+        <p:txBody>
+          <a:bodyPr rtlCol="0" anchor="ctr"/>
+          <a:lstStyle/>
+          <a:p>
+            <a:pPr algn="ctr"/>
+          </a:p>
+        </p:txBody>
+      </p:sp>
+      <p:pic>
+        <p:nvPicPr>
+          <p:cNvPr id="3" name="Picture 2" descr="ruvision_logo_small.png"/>
+          <p:cNvPicPr>
+            <a:picLocks noChangeAspect="1"/>
+          </p:cNvPicPr>
+          <p:nvPr/>
+        </p:nvPicPr>
+        <p:blipFill>
+          <a:blip r:embed="rId2"/>
+          <a:stretch>
+            <a:fillRect/>
+          </a:stretch>
+        </p:blipFill>
+        <p:spPr>
+          <a:xfrm>
+            <a:off x="11383419" y="182880"/>
+            <a:ext cx="533956" cy="365760"/>
+          </a:xfrm>
+          <a:prstGeom prst="rect">
+            <a:avLst/>
+          </a:prstGeom>
+        </p:spPr>
+      </p:pic>
+      <p:sp>
+        <p:nvSpPr>
+          <p:cNvPr id="4" name="TextBox 3"/>
+          <p:cNvSpPr txBox="1"/>
+          <p:nvPr/>
+        </p:nvSpPr>
+        <p:spPr>
+          <a:xfrm>
             <a:off x="0" y="2743200"/>
             <a:ext cx="12191695" cy="914400"/>
           </a:xfrm>
@@ -6565,8 +7167,8 @@
         </p:nvSpPr>
         <p:spPr>
           <a:xfrm>
-            <a:off x="548640" y="621792"/>
-            <a:ext cx="10058400" cy="640080"/>
+            <a:off x="548640" y="594360"/>
+            <a:ext cx="11064240" cy="868680"/>
           </a:xfrm>
           <a:prstGeom prst="rect">
             <a:avLst/>
@@ -6585,13 +7187,13 @@
               </a:lnSpc>
             </a:pPr>
             <a:r>
-              <a:rPr sz="2800" b="1">
+              <a:rPr sz="2200" b="1">
                 <a:solidFill>
                   <a:srgbClr val="E6EDF5"/>
                 </a:solidFill>
                 <a:latin typeface="Inter"/>
               </a:rPr>
-              <a:t>Model 2 — Unified Viewing &amp; Metadata Analytics</a:t>
+              <a:t>Model 1 (Foundation) + Model 2 (Primary) — Registry &amp; GIS Foundation with Unified Viewing &amp; Metadata Analytics</a:t>
             </a:r>
           </a:p>
         </p:txBody>
@@ -6604,7 +7206,7 @@
         </p:nvSpPr>
         <p:spPr>
           <a:xfrm>
-            <a:off x="548640" y="1234440"/>
+            <a:off x="548640" y="1481328"/>
             <a:ext cx="11064240" cy="19050"/>
           </a:xfrm>
           <a:prstGeom prst="rect">
@@ -6648,7 +7250,7 @@
         </p:nvSpPr>
         <p:spPr>
           <a:xfrm>
-            <a:off x="548640" y="1463040"/>
+            <a:off x="548640" y="1691640"/>
             <a:ext cx="6400800" cy="4389120"/>
           </a:xfrm>
           <a:prstGeom prst="rect">
@@ -6728,7 +7330,7 @@
         </p:nvSpPr>
         <p:spPr>
           <a:xfrm>
-            <a:off x="7315200" y="1463040"/>
+            <a:off x="7315200" y="1600200"/>
             <a:ext cx="4297680" cy="4389120"/>
           </a:xfrm>
           <a:prstGeom prst="roundRect">
@@ -6776,7 +7378,7 @@
         </p:nvSpPr>
         <p:spPr>
           <a:xfrm>
-            <a:off x="7589520" y="1691640"/>
+            <a:off x="7589520" y="1828800"/>
             <a:ext cx="3749039" cy="365760"/>
           </a:xfrm>
           <a:prstGeom prst="rect">
@@ -6815,7 +7417,7 @@
         </p:nvSpPr>
         <p:spPr>
           <a:xfrm>
-            <a:off x="7589520" y="2148840"/>
+            <a:off x="7589520" y="2286000"/>
             <a:ext cx="3794760" cy="3566160"/>
           </a:xfrm>
           <a:prstGeom prst="rect">
@@ -6834,7 +7436,7 @@
                 <a:spcPct val="120000"/>
               </a:lnSpc>
               <a:spcAft>
-                <a:spcPts val="1200"/>
+                <a:spcPts val="1000"/>
               </a:spcAft>
             </a:pPr>
             <a:r>
@@ -6853,7 +7455,7 @@
                 <a:spcPct val="120000"/>
               </a:lnSpc>
               <a:spcAft>
-                <a:spcPts val="1200"/>
+                <a:spcPts val="1000"/>
               </a:spcAft>
             </a:pPr>
             <a:r>
@@ -6872,7 +7474,7 @@
                 <a:spcPct val="120000"/>
               </a:lnSpc>
               <a:spcAft>
-                <a:spcPts val="1200"/>
+                <a:spcPts val="1000"/>
               </a:spcAft>
             </a:pPr>
             <a:r>
@@ -6883,6 +7485,25 @@
                 <a:latin typeface="Inter"/>
               </a:rPr>
               <a:t>▸ Lowest integration risk: zero dependency on any department changing its systems.</a:t>
+            </a:r>
+          </a:p>
+          <a:p>
+            <a:pPr>
+              <a:lnSpc>
+                <a:spcPct val="120000"/>
+              </a:lnSpc>
+              <a:spcAft>
+                <a:spcPts val="1000"/>
+              </a:spcAft>
+            </a:pPr>
+            <a:r>
+              <a:rPr sz="1400">
+                <a:solidFill>
+                  <a:srgbClr val="9FB0C6"/>
+                </a:solidFill>
+                <a:latin typeface="Inter"/>
+              </a:rPr>
+              <a:t>▸ Model 1 (Registry &amp; GIS Foundation) is built underneath as the mandatory foundation every submission requires.</a:t>
             </a:r>
           </a:p>
         </p:txBody>
@@ -7085,7 +7706,7 @@
                 </a:solidFill>
                 <a:latin typeface="Consolas"/>
               </a:rPr>
-              <a:t>ARCHITECTURE</a:t>
+              <a:t>MANDATORY FOUNDATION, BUILT UNDERNEATH</a:t>
             </a:r>
           </a:p>
         </p:txBody>
@@ -7124,7 +7745,7 @@
                 </a:solidFill>
                 <a:latin typeface="Inter"/>
               </a:rPr>
-              <a:t>End-to-End Data Flow</a:t>
+              <a:t>Model 1 Foundation — Registry &amp; GIS</a:t>
             </a:r>
           </a:p>
         </p:txBody>
@@ -7175,26 +7796,106 @@
       </p:sp>
       <p:sp>
         <p:nvSpPr>
-          <p:cNvPr id="7" name="Rounded Rectangle 6"/>
+          <p:cNvPr id="7" name="TextBox 6"/>
+          <p:cNvSpPr txBox="1"/>
+          <p:nvPr/>
+        </p:nvSpPr>
+        <p:spPr>
+          <a:xfrm>
+            <a:off x="548640" y="1463040"/>
+            <a:ext cx="6492240" cy="2377440"/>
+          </a:xfrm>
+          <a:prstGeom prst="rect">
+            <a:avLst/>
+          </a:prstGeom>
+          <a:noFill/>
+        </p:spPr>
+        <p:txBody>
+          <a:bodyPr wrap="square">
+            <a:spAutoFit/>
+          </a:bodyPr>
+          <a:lstStyle/>
+          <a:p>
+            <a:pPr>
+              <a:lnSpc>
+                <a:spcPct val="120000"/>
+              </a:lnSpc>
+              <a:spcAft>
+                <a:spcPts val="1400"/>
+              </a:spcAft>
+            </a:pPr>
+            <a:r>
+              <a:rPr sz="1550">
+                <a:solidFill>
+                  <a:srgbClr val="9FB0C6"/>
+                </a:solidFill>
+                <a:latin typeface="Inter"/>
+              </a:rPr>
+              <a:t>▸ Camera registry auto-synced from the live catalogue — all 30 sandbox cameras, zero manual entry.</a:t>
+            </a:r>
+          </a:p>
+          <a:p>
+            <a:pPr>
+              <a:lnSpc>
+                <a:spcPct val="120000"/>
+              </a:lnSpc>
+              <a:spcAft>
+                <a:spcPts val="1400"/>
+              </a:spcAft>
+            </a:pPr>
+            <a:r>
+              <a:rPr sz="1550">
+                <a:solidFill>
+                  <a:srgbClr val="9FB0C6"/>
+                </a:solidFill>
+                <a:latin typeface="Inter"/>
+              </a:rPr>
+              <a:t>▸ Two additional onboarding paths demonstrated: CSV bulk-import and a manual single-camera entry form.</a:t>
+            </a:r>
+          </a:p>
+          <a:p>
+            <a:pPr>
+              <a:lnSpc>
+                <a:spcPct val="120000"/>
+              </a:lnSpc>
+              <a:spcAft>
+                <a:spcPts val="1400"/>
+              </a:spcAft>
+            </a:pPr>
+            <a:r>
+              <a:rPr sz="1550">
+                <a:solidFill>
+                  <a:srgbClr val="9FB0C6"/>
+                </a:solidFill>
+                <a:latin typeface="Inter"/>
+              </a:rPr>
+              <a:t>▸ Department and camera type are inferred from location-name patterns (toll/gate/bypass/junction) — the same signal already validated in our plate-legibility findings.</a:t>
+            </a:r>
+          </a:p>
+        </p:txBody>
+      </p:sp>
+      <p:sp>
+        <p:nvSpPr>
+          <p:cNvPr id="8" name="Rounded Rectangle 7"/>
           <p:cNvSpPr/>
           <p:nvPr/>
         </p:nvSpPr>
         <p:spPr>
           <a:xfrm>
-            <a:off x="380847" y="2377440"/>
-            <a:ext cx="1691640" cy="1051560"/>
+            <a:off x="548640" y="3977639"/>
+            <a:ext cx="6492240" cy="2194560"/>
           </a:xfrm>
           <a:prstGeom prst="roundRect">
             <a:avLst>
-              <a:gd name="adj" fmla="val 12000"/>
+              <a:gd name="adj" fmla="val 6000"/>
             </a:avLst>
           </a:prstGeom>
           <a:solidFill>
-            <a:srgbClr val="111823"/>
+            <a:srgbClr val="1A1408"/>
           </a:solidFill>
-          <a:ln w="19050">
+          <a:ln w="12700">
             <a:solidFill>
-              <a:srgbClr val="9FB0C6"/>
+              <a:srgbClr val="F59E0B"/>
             </a:solidFill>
           </a:ln>
           <a:effectLst/>
@@ -7214,32 +7915,23 @@
           </a:fontRef>
         </p:style>
         <p:txBody>
-          <a:bodyPr rtlCol="0" anchor="ctr" wrap="square"/>
+          <a:bodyPr rtlCol="0" anchor="ctr"/>
           <a:lstStyle/>
           <a:p>
             <a:pPr algn="ctr"/>
-            <a:r>
-              <a:rPr sz="1250" b="1">
-                <a:solidFill>
-                  <a:srgbClr val="E6EDF5"/>
-                </a:solidFill>
-              </a:rPr>
-              <a:t>Departmental
-CCTV / VMS</a:t>
-            </a:r>
-          </a:p>
-        </p:txBody>
-      </p:sp>
-      <p:sp>
-        <p:nvSpPr>
-          <p:cNvPr id="8" name="TextBox 7"/>
+          </a:p>
+        </p:txBody>
+      </p:sp>
+      <p:sp>
+        <p:nvSpPr>
+          <p:cNvPr id="9" name="TextBox 8"/>
           <p:cNvSpPr txBox="1"/>
           <p:nvPr/>
         </p:nvSpPr>
         <p:spPr>
           <a:xfrm>
-            <a:off x="2072487" y="2697480"/>
-            <a:ext cx="256032" cy="457200"/>
+            <a:off x="777240" y="4133087"/>
+            <a:ext cx="5943600" cy="320040"/>
           </a:xfrm>
           <a:prstGeom prst="rect">
             <a:avLst/>
@@ -7252,75 +7944,19 @@
           </a:bodyPr>
           <a:lstStyle/>
           <a:p>
-            <a:pPr algn="ctr">
+            <a:pPr algn="l">
               <a:lnSpc>
                 <a:spcPct val="115000"/>
               </a:lnSpc>
             </a:pPr>
             <a:r>
-              <a:rPr sz="2000" b="0">
-                <a:solidFill>
-                  <a:srgbClr val="5C6B86"/>
-                </a:solidFill>
-                <a:latin typeface="Inter"/>
-              </a:rPr>
-              <a:t>→</a:t>
-            </a:r>
-          </a:p>
-        </p:txBody>
-      </p:sp>
-      <p:sp>
-        <p:nvSpPr>
-          <p:cNvPr id="9" name="Rounded Rectangle 8"/>
-          <p:cNvSpPr/>
-          <p:nvPr/>
-        </p:nvSpPr>
-        <p:spPr>
-          <a:xfrm>
-            <a:off x="2328519" y="2377440"/>
-            <a:ext cx="1691640" cy="1051560"/>
-          </a:xfrm>
-          <a:prstGeom prst="roundRect">
-            <a:avLst>
-              <a:gd name="adj" fmla="val 12000"/>
-            </a:avLst>
-          </a:prstGeom>
-          <a:solidFill>
-            <a:srgbClr val="111823"/>
-          </a:solidFill>
-          <a:ln w="19050">
-            <a:solidFill>
-              <a:srgbClr val="3B82F6"/>
-            </a:solidFill>
-          </a:ln>
-          <a:effectLst/>
-        </p:spPr>
-        <p:style>
-          <a:lnRef idx="1">
-            <a:schemeClr val="accent1"/>
-          </a:lnRef>
-          <a:fillRef idx="3">
-            <a:schemeClr val="accent1"/>
-          </a:fillRef>
-          <a:effectRef idx="2">
-            <a:schemeClr val="accent1"/>
-          </a:effectRef>
-          <a:fontRef idx="minor">
-            <a:schemeClr val="lt1"/>
-          </a:fontRef>
-        </p:style>
-        <p:txBody>
-          <a:bodyPr rtlCol="0" anchor="ctr" wrap="square"/>
-          <a:lstStyle/>
-          <a:p>
-            <a:pPr algn="ctr"/>
-            <a:r>
-              <a:rPr sz="1250" b="1">
-                <a:solidFill>
-                  <a:srgbClr val="E6EDF5"/>
-                </a:solidFill>
-              </a:rPr>
-              <a:t>Capture Layer</a:t>
+              <a:rPr sz="1200" b="1">
+                <a:solidFill>
+                  <a:srgbClr val="F59E0B"/>
+                </a:solidFill>
+                <a:latin typeface="Consolas"/>
+              </a:rPr>
+              <a:t>HONEST STATUS</a:t>
             </a:r>
           </a:p>
         </p:txBody>
@@ -7333,8 +7969,8 @@
         </p:nvSpPr>
         <p:spPr>
           <a:xfrm>
-            <a:off x="4020159" y="2697480"/>
-            <a:ext cx="256032" cy="457200"/>
+            <a:off x="777240" y="4480560"/>
+            <a:ext cx="6035040" cy="1645920"/>
           </a:xfrm>
           <a:prstGeom prst="rect">
             <a:avLst/>
@@ -7347,19 +7983,60 @@
           </a:bodyPr>
           <a:lstStyle/>
           <a:p>
-            <a:pPr algn="ctr">
-              <a:lnSpc>
-                <a:spcPct val="115000"/>
-              </a:lnSpc>
-            </a:pPr>
-            <a:r>
-              <a:rPr sz="2000" b="0">
-                <a:solidFill>
-                  <a:srgbClr val="5C6B86"/>
+            <a:pPr>
+              <a:lnSpc>
+                <a:spcPct val="120000"/>
+              </a:lnSpc>
+              <a:spcAft>
+                <a:spcPts val="800"/>
+              </a:spcAft>
+            </a:pPr>
+            <a:r>
+              <a:rPr sz="1200">
+                <a:solidFill>
+                  <a:srgbClr val="9FB0C6"/>
                 </a:solidFill>
                 <a:latin typeface="Inter"/>
               </a:rPr>
-              <a:t>→</a:t>
+              <a:t>▸ GIS map: 23 of 30 cameras geocoded and plotted; 7 failed on genuinely ambiguous location names and are omitted from the map, not guessed — still visible in the registry table.</a:t>
+            </a:r>
+          </a:p>
+          <a:p>
+            <a:pPr>
+              <a:lnSpc>
+                <a:spcPct val="120000"/>
+              </a:lnSpc>
+              <a:spcAft>
+                <a:spcPts val="800"/>
+              </a:spcAft>
+            </a:pPr>
+            <a:r>
+              <a:rPr sz="1200">
+                <a:solidFill>
+                  <a:srgbClr val="9FB0C6"/>
+                </a:solidFill>
+                <a:latin typeface="Inter"/>
+              </a:rPr>
+              <a:t>▸ Caught one bad match during development (a location name that resolved to Kashmir); rejected by a Gujarat bounding-box check before it could reach the map.</a:t>
+            </a:r>
+          </a:p>
+          <a:p>
+            <a:pPr>
+              <a:lnSpc>
+                <a:spcPct val="120000"/>
+              </a:lnSpc>
+              <a:spcAft>
+                <a:spcPts val="800"/>
+              </a:spcAft>
+            </a:pPr>
+            <a:r>
+              <a:rPr sz="1200">
+                <a:solidFill>
+                  <a:srgbClr val="9FB0C6"/>
+                </a:solidFill>
+                <a:latin typeface="Inter"/>
+              </a:rPr>
+              <a:t>▸ Department/camera-type mapping is illustrative, inferred from naming patterns — not department-supplied ownership data.</a:t>
             </a:r>
           </a:p>
         </p:txBody>
@@ -7372,392 +8049,8 @@
         </p:nvSpPr>
         <p:spPr>
           <a:xfrm>
-            <a:off x="4276191" y="2377440"/>
-            <a:ext cx="1691640" cy="1051560"/>
-          </a:xfrm>
-          <a:prstGeom prst="roundRect">
-            <a:avLst>
-              <a:gd name="adj" fmla="val 12000"/>
-            </a:avLst>
-          </a:prstGeom>
-          <a:solidFill>
-            <a:srgbClr val="111823"/>
-          </a:solidFill>
-          <a:ln w="19050">
-            <a:solidFill>
-              <a:srgbClr val="3B82F6"/>
-            </a:solidFill>
-          </a:ln>
-          <a:effectLst/>
-        </p:spPr>
-        <p:style>
-          <a:lnRef idx="1">
-            <a:schemeClr val="accent1"/>
-          </a:lnRef>
-          <a:fillRef idx="3">
-            <a:schemeClr val="accent1"/>
-          </a:fillRef>
-          <a:effectRef idx="2">
-            <a:schemeClr val="accent1"/>
-          </a:effectRef>
-          <a:fontRef idx="minor">
-            <a:schemeClr val="lt1"/>
-          </a:fontRef>
-        </p:style>
-        <p:txBody>
-          <a:bodyPr rtlCol="0" anchor="ctr" wrap="square"/>
-          <a:lstStyle/>
-          <a:p>
-            <a:pPr algn="ctr"/>
-            <a:r>
-              <a:rPr sz="1250" b="1">
-                <a:solidFill>
-                  <a:srgbClr val="E6EDF5"/>
-                </a:solidFill>
-              </a:rPr>
-              <a:t>ANPR
-Analytics</a:t>
-            </a:r>
-          </a:p>
-        </p:txBody>
-      </p:sp>
-      <p:sp>
-        <p:nvSpPr>
-          <p:cNvPr id="12" name="TextBox 11"/>
-          <p:cNvSpPr txBox="1"/>
-          <p:nvPr/>
-        </p:nvSpPr>
-        <p:spPr>
-          <a:xfrm>
-            <a:off x="5967831" y="2697480"/>
-            <a:ext cx="256032" cy="457200"/>
-          </a:xfrm>
-          <a:prstGeom prst="rect">
-            <a:avLst/>
-          </a:prstGeom>
-          <a:noFill/>
-        </p:spPr>
-        <p:txBody>
-          <a:bodyPr wrap="square">
-            <a:spAutoFit/>
-          </a:bodyPr>
-          <a:lstStyle/>
-          <a:p>
-            <a:pPr algn="ctr">
-              <a:lnSpc>
-                <a:spcPct val="115000"/>
-              </a:lnSpc>
-            </a:pPr>
-            <a:r>
-              <a:rPr sz="2000" b="0">
-                <a:solidFill>
-                  <a:srgbClr val="5C6B86"/>
-                </a:solidFill>
-                <a:latin typeface="Inter"/>
-              </a:rPr>
-              <a:t>→</a:t>
-            </a:r>
-          </a:p>
-        </p:txBody>
-      </p:sp>
-      <p:sp>
-        <p:nvSpPr>
-          <p:cNvPr id="13" name="Rounded Rectangle 12"/>
-          <p:cNvSpPr/>
-          <p:nvPr/>
-        </p:nvSpPr>
-        <p:spPr>
-          <a:xfrm>
-            <a:off x="6223863" y="2377440"/>
-            <a:ext cx="1691640" cy="1051560"/>
-          </a:xfrm>
-          <a:prstGeom prst="roundRect">
-            <a:avLst>
-              <a:gd name="adj" fmla="val 12000"/>
-            </a:avLst>
-          </a:prstGeom>
-          <a:solidFill>
-            <a:srgbClr val="111823"/>
-          </a:solidFill>
-          <a:ln w="19050">
-            <a:solidFill>
-              <a:srgbClr val="F59E0B"/>
-            </a:solidFill>
-          </a:ln>
-          <a:effectLst/>
-        </p:spPr>
-        <p:style>
-          <a:lnRef idx="1">
-            <a:schemeClr val="accent1"/>
-          </a:lnRef>
-          <a:fillRef idx="3">
-            <a:schemeClr val="accent1"/>
-          </a:fillRef>
-          <a:effectRef idx="2">
-            <a:schemeClr val="accent1"/>
-          </a:effectRef>
-          <a:fontRef idx="minor">
-            <a:schemeClr val="lt1"/>
-          </a:fontRef>
-        </p:style>
-        <p:txBody>
-          <a:bodyPr rtlCol="0" anchor="ctr" wrap="square"/>
-          <a:lstStyle/>
-          <a:p>
-            <a:pPr algn="ctr"/>
-            <a:r>
-              <a:rPr sz="1250" b="1">
-                <a:solidFill>
-                  <a:srgbClr val="E6EDF5"/>
-                </a:solidFill>
-              </a:rPr>
-              <a:t>Watchlist &amp;
-Alerting</a:t>
-            </a:r>
-          </a:p>
-        </p:txBody>
-      </p:sp>
-      <p:sp>
-        <p:nvSpPr>
-          <p:cNvPr id="14" name="TextBox 13"/>
-          <p:cNvSpPr txBox="1"/>
-          <p:nvPr/>
-        </p:nvSpPr>
-        <p:spPr>
-          <a:xfrm>
-            <a:off x="7915503" y="2697480"/>
-            <a:ext cx="256032" cy="457200"/>
-          </a:xfrm>
-          <a:prstGeom prst="rect">
-            <a:avLst/>
-          </a:prstGeom>
-          <a:noFill/>
-        </p:spPr>
-        <p:txBody>
-          <a:bodyPr wrap="square">
-            <a:spAutoFit/>
-          </a:bodyPr>
-          <a:lstStyle/>
-          <a:p>
-            <a:pPr algn="ctr">
-              <a:lnSpc>
-                <a:spcPct val="115000"/>
-              </a:lnSpc>
-            </a:pPr>
-            <a:r>
-              <a:rPr sz="2000" b="0">
-                <a:solidFill>
-                  <a:srgbClr val="5C6B86"/>
-                </a:solidFill>
-                <a:latin typeface="Inter"/>
-              </a:rPr>
-              <a:t>→</a:t>
-            </a:r>
-          </a:p>
-        </p:txBody>
-      </p:sp>
-      <p:sp>
-        <p:nvSpPr>
-          <p:cNvPr id="15" name="Rounded Rectangle 14"/>
-          <p:cNvSpPr/>
-          <p:nvPr/>
-        </p:nvSpPr>
-        <p:spPr>
-          <a:xfrm>
-            <a:off x="8171535" y="2377440"/>
-            <a:ext cx="1691640" cy="1051560"/>
-          </a:xfrm>
-          <a:prstGeom prst="roundRect">
-            <a:avLst>
-              <a:gd name="adj" fmla="val 12000"/>
-            </a:avLst>
-          </a:prstGeom>
-          <a:solidFill>
-            <a:srgbClr val="111823"/>
-          </a:solidFill>
-          <a:ln w="19050">
-            <a:solidFill>
-              <a:srgbClr val="3B82F6"/>
-            </a:solidFill>
-          </a:ln>
-          <a:effectLst/>
-        </p:spPr>
-        <p:style>
-          <a:lnRef idx="1">
-            <a:schemeClr val="accent1"/>
-          </a:lnRef>
-          <a:fillRef idx="3">
-            <a:schemeClr val="accent1"/>
-          </a:fillRef>
-          <a:effectRef idx="2">
-            <a:schemeClr val="accent1"/>
-          </a:effectRef>
-          <a:fontRef idx="minor">
-            <a:schemeClr val="lt1"/>
-          </a:fontRef>
-        </p:style>
-        <p:txBody>
-          <a:bodyPr rtlCol="0" anchor="ctr" wrap="square"/>
-          <a:lstStyle/>
-          <a:p>
-            <a:pPr algn="ctr"/>
-            <a:r>
-              <a:rPr sz="1250" b="1">
-                <a:solidFill>
-                  <a:srgbClr val="E6EDF5"/>
-                </a:solidFill>
-              </a:rPr>
-              <a:t>Route
-Reconstruction</a:t>
-            </a:r>
-          </a:p>
-        </p:txBody>
-      </p:sp>
-      <p:sp>
-        <p:nvSpPr>
-          <p:cNvPr id="16" name="TextBox 15"/>
-          <p:cNvSpPr txBox="1"/>
-          <p:nvPr/>
-        </p:nvSpPr>
-        <p:spPr>
-          <a:xfrm>
-            <a:off x="9863175" y="2697480"/>
-            <a:ext cx="256032" cy="457200"/>
-          </a:xfrm>
-          <a:prstGeom prst="rect">
-            <a:avLst/>
-          </a:prstGeom>
-          <a:noFill/>
-        </p:spPr>
-        <p:txBody>
-          <a:bodyPr wrap="square">
-            <a:spAutoFit/>
-          </a:bodyPr>
-          <a:lstStyle/>
-          <a:p>
-            <a:pPr algn="ctr">
-              <a:lnSpc>
-                <a:spcPct val="115000"/>
-              </a:lnSpc>
-            </a:pPr>
-            <a:r>
-              <a:rPr sz="2000" b="0">
-                <a:solidFill>
-                  <a:srgbClr val="5C6B86"/>
-                </a:solidFill>
-                <a:latin typeface="Inter"/>
-              </a:rPr>
-              <a:t>→</a:t>
-            </a:r>
-          </a:p>
-        </p:txBody>
-      </p:sp>
-      <p:sp>
-        <p:nvSpPr>
-          <p:cNvPr id="17" name="Rounded Rectangle 16"/>
-          <p:cNvSpPr/>
-          <p:nvPr/>
-        </p:nvSpPr>
-        <p:spPr>
-          <a:xfrm>
-            <a:off x="10119207" y="2377440"/>
-            <a:ext cx="1691640" cy="1051560"/>
-          </a:xfrm>
-          <a:prstGeom prst="roundRect">
-            <a:avLst>
-              <a:gd name="adj" fmla="val 12000"/>
-            </a:avLst>
-          </a:prstGeom>
-          <a:solidFill>
-            <a:srgbClr val="111823"/>
-          </a:solidFill>
-          <a:ln w="19050">
-            <a:solidFill>
-              <a:srgbClr val="22C55E"/>
-            </a:solidFill>
-          </a:ln>
-          <a:effectLst/>
-        </p:spPr>
-        <p:style>
-          <a:lnRef idx="1">
-            <a:schemeClr val="accent1"/>
-          </a:lnRef>
-          <a:fillRef idx="3">
-            <a:schemeClr val="accent1"/>
-          </a:fillRef>
-          <a:effectRef idx="2">
-            <a:schemeClr val="accent1"/>
-          </a:effectRef>
-          <a:fontRef idx="minor">
-            <a:schemeClr val="lt1"/>
-          </a:fontRef>
-        </p:style>
-        <p:txBody>
-          <a:bodyPr rtlCol="0" anchor="ctr" wrap="square"/>
-          <a:lstStyle/>
-          <a:p>
-            <a:pPr algn="ctr"/>
-            <a:r>
-              <a:rPr sz="1250" b="1">
-                <a:solidFill>
-                  <a:srgbClr val="E6EDF5"/>
-                </a:solidFill>
-              </a:rPr>
-              <a:t>Unified
-Dashboard</a:t>
-            </a:r>
-          </a:p>
-        </p:txBody>
-      </p:sp>
-      <p:sp>
-        <p:nvSpPr>
-          <p:cNvPr id="18" name="TextBox 17"/>
-          <p:cNvSpPr txBox="1"/>
-          <p:nvPr/>
-        </p:nvSpPr>
-        <p:spPr>
-          <a:xfrm>
-            <a:off x="548640" y="3931920"/>
-            <a:ext cx="11064240" cy="457200"/>
-          </a:xfrm>
-          <a:prstGeom prst="rect">
-            <a:avLst/>
-          </a:prstGeom>
-          <a:noFill/>
-        </p:spPr>
-        <p:txBody>
-          <a:bodyPr wrap="square">
-            <a:spAutoFit/>
-          </a:bodyPr>
-          <a:lstStyle/>
-          <a:p>
-            <a:pPr algn="ctr">
-              <a:lnSpc>
-                <a:spcPct val="115000"/>
-              </a:lnSpc>
-            </a:pPr>
-            <a:r>
-              <a:rPr sz="1500" b="0">
-                <a:solidFill>
-                  <a:srgbClr val="9FB0C6"/>
-                </a:solidFill>
-                <a:latin typeface="Inter"/>
-              </a:rPr>
-              <a:t>No video is ever centrally stored — only structured detection metadata (plate text, camera, timestamp, confidence).</a:t>
-            </a:r>
-          </a:p>
-        </p:txBody>
-      </p:sp>
-      <p:sp>
-        <p:nvSpPr>
-          <p:cNvPr id="19" name="Rounded Rectangle 18"/>
-          <p:cNvSpPr/>
-          <p:nvPr/>
-        </p:nvSpPr>
-        <p:spPr>
-          <a:xfrm>
-            <a:off x="1828800" y="4663440"/>
-            <a:ext cx="8503920" cy="1371600"/>
+            <a:off x="7315200" y="1463040"/>
+            <a:ext cx="4297680" cy="2834640"/>
           </a:xfrm>
           <a:prstGeom prst="roundRect">
             <a:avLst>
@@ -7798,14 +8091,14 @@
       </p:sp>
       <p:sp>
         <p:nvSpPr>
-          <p:cNvPr id="20" name="TextBox 19"/>
+          <p:cNvPr id="12" name="TextBox 11"/>
           <p:cNvSpPr txBox="1"/>
           <p:nvPr/>
         </p:nvSpPr>
         <p:spPr>
           <a:xfrm>
-            <a:off x="2103120" y="4846320"/>
-            <a:ext cx="8046720" cy="1097280"/>
+            <a:off x="7589520" y="1645920"/>
+            <a:ext cx="3749039" cy="320040"/>
           </a:xfrm>
           <a:prstGeom prst="rect">
             <a:avLst/>
@@ -7818,74 +8111,33 @@
           </a:bodyPr>
           <a:lstStyle/>
           <a:p>
-            <a:pPr>
-              <a:lnSpc>
-                <a:spcPct val="120000"/>
-              </a:lnSpc>
-              <a:spcAft>
-                <a:spcPts val="800"/>
-              </a:spcAft>
-            </a:pPr>
-            <a:r>
-              <a:rPr sz="1350">
-                <a:solidFill>
-                  <a:srgbClr val="9FB0C6"/>
-                </a:solidFill>
-                <a:latin typeface="Inter"/>
-              </a:rPr>
-              <a:t>▸ Capture: TCP-forced RTSP, PTS-derived timing, exponential-backoff reconnect.</a:t>
-            </a:r>
-          </a:p>
-          <a:p>
-            <a:pPr>
-              <a:lnSpc>
-                <a:spcPct val="120000"/>
-              </a:lnSpc>
-              <a:spcAft>
-                <a:spcPts val="800"/>
-              </a:spcAft>
-            </a:pPr>
-            <a:r>
-              <a:rPr sz="1350">
-                <a:solidFill>
-                  <a:srgbClr val="9FB0C6"/>
-                </a:solidFill>
-                <a:latin typeface="Inter"/>
-              </a:rPr>
-              <a:t>▸ Analytics: YOLO plate detector + PaddleOCR, CPU-only, configurable sample rate.</a:t>
-            </a:r>
-          </a:p>
-          <a:p>
-            <a:pPr>
-              <a:lnSpc>
-                <a:spcPct val="120000"/>
-              </a:lnSpc>
-              <a:spcAft>
-                <a:spcPts val="800"/>
-              </a:spcAft>
-            </a:pPr>
-            <a:r>
-              <a:rPr sz="1350">
-                <a:solidFill>
-                  <a:srgbClr val="9FB0C6"/>
-                </a:solidFill>
-                <a:latin typeface="Inter"/>
-              </a:rPr>
-              <a:t>▸ Storage: SQLite metadata log (schema-compatible upgrade path to PostgreSQL).</a:t>
-            </a:r>
-          </a:p>
-        </p:txBody>
-      </p:sp>
-      <p:sp>
-        <p:nvSpPr>
-          <p:cNvPr id="21" name="TextBox 20"/>
+            <a:pPr algn="l">
+              <a:lnSpc>
+                <a:spcPct val="115000"/>
+              </a:lnSpc>
+            </a:pPr>
+            <a:r>
+              <a:rPr sz="1300" b="1">
+                <a:solidFill>
+                  <a:srgbClr val="3B82F6"/>
+                </a:solidFill>
+                <a:latin typeface="Consolas"/>
+              </a:rPr>
+              <a:t>GAP ANALYSIS</a:t>
+            </a:r>
+          </a:p>
+        </p:txBody>
+      </p:sp>
+      <p:sp>
+        <p:nvSpPr>
+          <p:cNvPr id="13" name="TextBox 12"/>
           <p:cNvSpPr txBox="1"/>
           <p:nvPr/>
         </p:nvSpPr>
         <p:spPr>
           <a:xfrm>
-            <a:off x="548640" y="6473952"/>
-            <a:ext cx="5486400" cy="274320"/>
+            <a:off x="7589520" y="2103120"/>
+            <a:ext cx="3794760" cy="2103120"/>
           </a:xfrm>
           <a:prstGeom prst="rect">
             <a:avLst/>
@@ -7898,6 +8150,125 @@
           </a:bodyPr>
           <a:lstStyle/>
           <a:p>
+            <a:pPr>
+              <a:lnSpc>
+                <a:spcPct val="120000"/>
+              </a:lnSpc>
+              <a:spcAft>
+                <a:spcPts val="1000"/>
+              </a:spcAft>
+            </a:pPr>
+            <a:r>
+              <a:rPr sz="1300">
+                <a:solidFill>
+                  <a:srgbClr val="9FB0C6"/>
+                </a:solidFill>
+                <a:latin typeface="Inter"/>
+              </a:rPr>
+              <a:t>▸ Disconnected-camera count and stale-detection count, both live.</a:t>
+            </a:r>
+          </a:p>
+          <a:p>
+            <a:pPr>
+              <a:lnSpc>
+                <a:spcPct val="120000"/>
+              </a:lnSpc>
+              <a:spcAft>
+                <a:spcPts val="1000"/>
+              </a:spcAft>
+            </a:pPr>
+            <a:r>
+              <a:rPr sz="1300">
+                <a:solidFill>
+                  <a:srgbClr val="9FB0C6"/>
+                </a:solidFill>
+                <a:latin typeface="Inter"/>
+              </a:rPr>
+              <a:t>▸ ANPR-viability breakdown by camera type: toll/gate/bypass viable vs. wide junction cameras situational-only.</a:t>
+            </a:r>
+          </a:p>
+          <a:p>
+            <a:pPr>
+              <a:lnSpc>
+                <a:spcPct val="120000"/>
+              </a:lnSpc>
+              <a:spcAft>
+                <a:spcPts val="1000"/>
+              </a:spcAft>
+            </a:pPr>
+            <a:r>
+              <a:rPr sz="1300">
+                <a:solidFill>
+                  <a:srgbClr val="9FB0C6"/>
+                </a:solidFill>
+                <a:latin typeface="Inter"/>
+              </a:rPr>
+              <a:t>▸ Surfaces the same camera-angle finding from our AI-analytics debugging story as an operational coverage view.</a:t>
+            </a:r>
+          </a:p>
+        </p:txBody>
+      </p:sp>
+      <p:sp>
+        <p:nvSpPr>
+          <p:cNvPr id="14" name="TextBox 13"/>
+          <p:cNvSpPr txBox="1"/>
+          <p:nvPr/>
+        </p:nvSpPr>
+        <p:spPr>
+          <a:xfrm>
+            <a:off x="7315200" y="4480560"/>
+            <a:ext cx="4297680" cy="1645920"/>
+          </a:xfrm>
+          <a:prstGeom prst="rect">
+            <a:avLst/>
+          </a:prstGeom>
+          <a:noFill/>
+        </p:spPr>
+        <p:txBody>
+          <a:bodyPr wrap="square">
+            <a:spAutoFit/>
+          </a:bodyPr>
+          <a:lstStyle/>
+          <a:p>
+            <a:pPr algn="ctr">
+              <a:lnSpc>
+                <a:spcPct val="115000"/>
+              </a:lnSpc>
+            </a:pPr>
+            <a:r>
+              <a:rPr sz="1300" b="0">
+                <a:solidFill>
+                  <a:srgbClr val="5C6B86"/>
+                </a:solidFill>
+                <a:latin typeface="Inter"/>
+              </a:rPr>
+              <a:t>[SCREENSHOT: Registry tab — map view]</a:t>
+            </a:r>
+          </a:p>
+        </p:txBody>
+      </p:sp>
+      <p:sp>
+        <p:nvSpPr>
+          <p:cNvPr id="15" name="TextBox 14"/>
+          <p:cNvSpPr txBox="1"/>
+          <p:nvPr/>
+        </p:nvSpPr>
+        <p:spPr>
+          <a:xfrm>
+            <a:off x="548640" y="6473952"/>
+            <a:ext cx="5486400" cy="274320"/>
+          </a:xfrm>
+          <a:prstGeom prst="rect">
+            <a:avLst/>
+          </a:prstGeom>
+          <a:noFill/>
+        </p:spPr>
+        <p:txBody>
+          <a:bodyPr wrap="square">
+            <a:spAutoFit/>
+          </a:bodyPr>
+          <a:lstStyle/>
+          <a:p>
             <a:pPr algn="l">
               <a:lnSpc>
                 <a:spcPct val="115000"/>
@@ -7917,7 +8288,7 @@
       </p:sp>
       <p:sp>
         <p:nvSpPr>
-          <p:cNvPr id="22" name="TextBox 21"/>
+          <p:cNvPr id="16" name="TextBox 15"/>
           <p:cNvSpPr txBox="1"/>
           <p:nvPr/>
         </p:nvSpPr>
@@ -8074,7 +8445,7 @@
                 </a:solidFill>
                 <a:latin typeface="Consolas"/>
               </a:rPr>
-              <a:t>ENGINEERING — PROVEN, NOT JUST DESIGNED</a:t>
+              <a:t>ARCHITECTURE</a:t>
             </a:r>
           </a:p>
         </p:txBody>
@@ -8113,7 +8484,7 @@
                 </a:solidFill>
                 <a:latin typeface="Inter"/>
               </a:rPr>
-              <a:t>Live Stream Ingestion</a:t>
+              <a:t>End-to-End Data Flow</a:t>
             </a:r>
           </a:p>
         </p:txBody>
@@ -8164,14 +8535,71 @@
       </p:sp>
       <p:sp>
         <p:nvSpPr>
-          <p:cNvPr id="7" name="TextBox 6"/>
+          <p:cNvPr id="7" name="Rounded Rectangle 6"/>
+          <p:cNvSpPr/>
+          <p:nvPr/>
+        </p:nvSpPr>
+        <p:spPr>
+          <a:xfrm>
+            <a:off x="380847" y="2377440"/>
+            <a:ext cx="1691640" cy="1051560"/>
+          </a:xfrm>
+          <a:prstGeom prst="roundRect">
+            <a:avLst>
+              <a:gd name="adj" fmla="val 12000"/>
+            </a:avLst>
+          </a:prstGeom>
+          <a:solidFill>
+            <a:srgbClr val="111823"/>
+          </a:solidFill>
+          <a:ln w="19050">
+            <a:solidFill>
+              <a:srgbClr val="9FB0C6"/>
+            </a:solidFill>
+          </a:ln>
+          <a:effectLst/>
+        </p:spPr>
+        <p:style>
+          <a:lnRef idx="1">
+            <a:schemeClr val="accent1"/>
+          </a:lnRef>
+          <a:fillRef idx="3">
+            <a:schemeClr val="accent1"/>
+          </a:fillRef>
+          <a:effectRef idx="2">
+            <a:schemeClr val="accent1"/>
+          </a:effectRef>
+          <a:fontRef idx="minor">
+            <a:schemeClr val="lt1"/>
+          </a:fontRef>
+        </p:style>
+        <p:txBody>
+          <a:bodyPr rtlCol="0" anchor="ctr" wrap="square"/>
+          <a:lstStyle/>
+          <a:p>
+            <a:pPr algn="ctr"/>
+            <a:r>
+              <a:rPr sz="1250" b="1">
+                <a:solidFill>
+                  <a:srgbClr val="E6EDF5"/>
+                </a:solidFill>
+              </a:rPr>
+              <a:t>Departmental
+CCTV / VMS</a:t>
+            </a:r>
+          </a:p>
+        </p:txBody>
+      </p:sp>
+      <p:sp>
+        <p:nvSpPr>
+          <p:cNvPr id="8" name="TextBox 7"/>
           <p:cNvSpPr txBox="1"/>
           <p:nvPr/>
         </p:nvSpPr>
         <p:spPr>
           <a:xfrm>
-            <a:off x="548640" y="1463040"/>
-            <a:ext cx="10881360" cy="1828800"/>
+            <a:off x="2072487" y="2697480"/>
+            <a:ext cx="256032" cy="457200"/>
           </a:xfrm>
           <a:prstGeom prst="rect">
             <a:avLst/>
@@ -8184,74 +8612,512 @@
           </a:bodyPr>
           <a:lstStyle/>
           <a:p>
-            <a:pPr>
-              <a:lnSpc>
-                <a:spcPct val="120000"/>
-              </a:lnSpc>
-              <a:spcAft>
-                <a:spcPts val="1400"/>
-              </a:spcAft>
-            </a:pPr>
-            <a:r>
-              <a:rPr sz="1600">
+            <a:pPr algn="ctr">
+              <a:lnSpc>
+                <a:spcPct val="115000"/>
+              </a:lnSpc>
+            </a:pPr>
+            <a:r>
+              <a:rPr sz="2000" b="0">
+                <a:solidFill>
+                  <a:srgbClr val="5C6B86"/>
+                </a:solidFill>
+                <a:latin typeface="Inter"/>
+              </a:rPr>
+              <a:t>→</a:t>
+            </a:r>
+          </a:p>
+        </p:txBody>
+      </p:sp>
+      <p:sp>
+        <p:nvSpPr>
+          <p:cNvPr id="9" name="Rounded Rectangle 8"/>
+          <p:cNvSpPr/>
+          <p:nvPr/>
+        </p:nvSpPr>
+        <p:spPr>
+          <a:xfrm>
+            <a:off x="2328519" y="2377440"/>
+            <a:ext cx="1691640" cy="1051560"/>
+          </a:xfrm>
+          <a:prstGeom prst="roundRect">
+            <a:avLst>
+              <a:gd name="adj" fmla="val 12000"/>
+            </a:avLst>
+          </a:prstGeom>
+          <a:solidFill>
+            <a:srgbClr val="111823"/>
+          </a:solidFill>
+          <a:ln w="19050">
+            <a:solidFill>
+              <a:srgbClr val="3B82F6"/>
+            </a:solidFill>
+          </a:ln>
+          <a:effectLst/>
+        </p:spPr>
+        <p:style>
+          <a:lnRef idx="1">
+            <a:schemeClr val="accent1"/>
+          </a:lnRef>
+          <a:fillRef idx="3">
+            <a:schemeClr val="accent1"/>
+          </a:fillRef>
+          <a:effectRef idx="2">
+            <a:schemeClr val="accent1"/>
+          </a:effectRef>
+          <a:fontRef idx="minor">
+            <a:schemeClr val="lt1"/>
+          </a:fontRef>
+        </p:style>
+        <p:txBody>
+          <a:bodyPr rtlCol="0" anchor="ctr" wrap="square"/>
+          <a:lstStyle/>
+          <a:p>
+            <a:pPr algn="ctr"/>
+            <a:r>
+              <a:rPr sz="1250" b="1">
+                <a:solidFill>
+                  <a:srgbClr val="E6EDF5"/>
+                </a:solidFill>
+              </a:rPr>
+              <a:t>Capture Layer</a:t>
+            </a:r>
+          </a:p>
+        </p:txBody>
+      </p:sp>
+      <p:sp>
+        <p:nvSpPr>
+          <p:cNvPr id="10" name="TextBox 9"/>
+          <p:cNvSpPr txBox="1"/>
+          <p:nvPr/>
+        </p:nvSpPr>
+        <p:spPr>
+          <a:xfrm>
+            <a:off x="4020159" y="2697480"/>
+            <a:ext cx="256032" cy="457200"/>
+          </a:xfrm>
+          <a:prstGeom prst="rect">
+            <a:avLst/>
+          </a:prstGeom>
+          <a:noFill/>
+        </p:spPr>
+        <p:txBody>
+          <a:bodyPr wrap="square">
+            <a:spAutoFit/>
+          </a:bodyPr>
+          <a:lstStyle/>
+          <a:p>
+            <a:pPr algn="ctr">
+              <a:lnSpc>
+                <a:spcPct val="115000"/>
+              </a:lnSpc>
+            </a:pPr>
+            <a:r>
+              <a:rPr sz="2000" b="0">
+                <a:solidFill>
+                  <a:srgbClr val="5C6B86"/>
+                </a:solidFill>
+                <a:latin typeface="Inter"/>
+              </a:rPr>
+              <a:t>→</a:t>
+            </a:r>
+          </a:p>
+        </p:txBody>
+      </p:sp>
+      <p:sp>
+        <p:nvSpPr>
+          <p:cNvPr id="11" name="Rounded Rectangle 10"/>
+          <p:cNvSpPr/>
+          <p:nvPr/>
+        </p:nvSpPr>
+        <p:spPr>
+          <a:xfrm>
+            <a:off x="4276191" y="2377440"/>
+            <a:ext cx="1691640" cy="1051560"/>
+          </a:xfrm>
+          <a:prstGeom prst="roundRect">
+            <a:avLst>
+              <a:gd name="adj" fmla="val 12000"/>
+            </a:avLst>
+          </a:prstGeom>
+          <a:solidFill>
+            <a:srgbClr val="111823"/>
+          </a:solidFill>
+          <a:ln w="19050">
+            <a:solidFill>
+              <a:srgbClr val="3B82F6"/>
+            </a:solidFill>
+          </a:ln>
+          <a:effectLst/>
+        </p:spPr>
+        <p:style>
+          <a:lnRef idx="1">
+            <a:schemeClr val="accent1"/>
+          </a:lnRef>
+          <a:fillRef idx="3">
+            <a:schemeClr val="accent1"/>
+          </a:fillRef>
+          <a:effectRef idx="2">
+            <a:schemeClr val="accent1"/>
+          </a:effectRef>
+          <a:fontRef idx="minor">
+            <a:schemeClr val="lt1"/>
+          </a:fontRef>
+        </p:style>
+        <p:txBody>
+          <a:bodyPr rtlCol="0" anchor="ctr" wrap="square"/>
+          <a:lstStyle/>
+          <a:p>
+            <a:pPr algn="ctr"/>
+            <a:r>
+              <a:rPr sz="1250" b="1">
+                <a:solidFill>
+                  <a:srgbClr val="E6EDF5"/>
+                </a:solidFill>
+              </a:rPr>
+              <a:t>ANPR
+Analytics</a:t>
+            </a:r>
+          </a:p>
+        </p:txBody>
+      </p:sp>
+      <p:sp>
+        <p:nvSpPr>
+          <p:cNvPr id="12" name="TextBox 11"/>
+          <p:cNvSpPr txBox="1"/>
+          <p:nvPr/>
+        </p:nvSpPr>
+        <p:spPr>
+          <a:xfrm>
+            <a:off x="5967831" y="2697480"/>
+            <a:ext cx="256032" cy="457200"/>
+          </a:xfrm>
+          <a:prstGeom prst="rect">
+            <a:avLst/>
+          </a:prstGeom>
+          <a:noFill/>
+        </p:spPr>
+        <p:txBody>
+          <a:bodyPr wrap="square">
+            <a:spAutoFit/>
+          </a:bodyPr>
+          <a:lstStyle/>
+          <a:p>
+            <a:pPr algn="ctr">
+              <a:lnSpc>
+                <a:spcPct val="115000"/>
+              </a:lnSpc>
+            </a:pPr>
+            <a:r>
+              <a:rPr sz="2000" b="0">
+                <a:solidFill>
+                  <a:srgbClr val="5C6B86"/>
+                </a:solidFill>
+                <a:latin typeface="Inter"/>
+              </a:rPr>
+              <a:t>→</a:t>
+            </a:r>
+          </a:p>
+        </p:txBody>
+      </p:sp>
+      <p:sp>
+        <p:nvSpPr>
+          <p:cNvPr id="13" name="Rounded Rectangle 12"/>
+          <p:cNvSpPr/>
+          <p:nvPr/>
+        </p:nvSpPr>
+        <p:spPr>
+          <a:xfrm>
+            <a:off x="6223863" y="2377440"/>
+            <a:ext cx="1691640" cy="1051560"/>
+          </a:xfrm>
+          <a:prstGeom prst="roundRect">
+            <a:avLst>
+              <a:gd name="adj" fmla="val 12000"/>
+            </a:avLst>
+          </a:prstGeom>
+          <a:solidFill>
+            <a:srgbClr val="111823"/>
+          </a:solidFill>
+          <a:ln w="19050">
+            <a:solidFill>
+              <a:srgbClr val="F59E0B"/>
+            </a:solidFill>
+          </a:ln>
+          <a:effectLst/>
+        </p:spPr>
+        <p:style>
+          <a:lnRef idx="1">
+            <a:schemeClr val="accent1"/>
+          </a:lnRef>
+          <a:fillRef idx="3">
+            <a:schemeClr val="accent1"/>
+          </a:fillRef>
+          <a:effectRef idx="2">
+            <a:schemeClr val="accent1"/>
+          </a:effectRef>
+          <a:fontRef idx="minor">
+            <a:schemeClr val="lt1"/>
+          </a:fontRef>
+        </p:style>
+        <p:txBody>
+          <a:bodyPr rtlCol="0" anchor="ctr" wrap="square"/>
+          <a:lstStyle/>
+          <a:p>
+            <a:pPr algn="ctr"/>
+            <a:r>
+              <a:rPr sz="1250" b="1">
+                <a:solidFill>
+                  <a:srgbClr val="E6EDF5"/>
+                </a:solidFill>
+              </a:rPr>
+              <a:t>Watchlist &amp;
+Alerting</a:t>
+            </a:r>
+          </a:p>
+        </p:txBody>
+      </p:sp>
+      <p:sp>
+        <p:nvSpPr>
+          <p:cNvPr id="14" name="TextBox 13"/>
+          <p:cNvSpPr txBox="1"/>
+          <p:nvPr/>
+        </p:nvSpPr>
+        <p:spPr>
+          <a:xfrm>
+            <a:off x="7915503" y="2697480"/>
+            <a:ext cx="256032" cy="457200"/>
+          </a:xfrm>
+          <a:prstGeom prst="rect">
+            <a:avLst/>
+          </a:prstGeom>
+          <a:noFill/>
+        </p:spPr>
+        <p:txBody>
+          <a:bodyPr wrap="square">
+            <a:spAutoFit/>
+          </a:bodyPr>
+          <a:lstStyle/>
+          <a:p>
+            <a:pPr algn="ctr">
+              <a:lnSpc>
+                <a:spcPct val="115000"/>
+              </a:lnSpc>
+            </a:pPr>
+            <a:r>
+              <a:rPr sz="2000" b="0">
+                <a:solidFill>
+                  <a:srgbClr val="5C6B86"/>
+                </a:solidFill>
+                <a:latin typeface="Inter"/>
+              </a:rPr>
+              <a:t>→</a:t>
+            </a:r>
+          </a:p>
+        </p:txBody>
+      </p:sp>
+      <p:sp>
+        <p:nvSpPr>
+          <p:cNvPr id="15" name="Rounded Rectangle 14"/>
+          <p:cNvSpPr/>
+          <p:nvPr/>
+        </p:nvSpPr>
+        <p:spPr>
+          <a:xfrm>
+            <a:off x="8171535" y="2377440"/>
+            <a:ext cx="1691640" cy="1051560"/>
+          </a:xfrm>
+          <a:prstGeom prst="roundRect">
+            <a:avLst>
+              <a:gd name="adj" fmla="val 12000"/>
+            </a:avLst>
+          </a:prstGeom>
+          <a:solidFill>
+            <a:srgbClr val="111823"/>
+          </a:solidFill>
+          <a:ln w="19050">
+            <a:solidFill>
+              <a:srgbClr val="3B82F6"/>
+            </a:solidFill>
+          </a:ln>
+          <a:effectLst/>
+        </p:spPr>
+        <p:style>
+          <a:lnRef idx="1">
+            <a:schemeClr val="accent1"/>
+          </a:lnRef>
+          <a:fillRef idx="3">
+            <a:schemeClr val="accent1"/>
+          </a:fillRef>
+          <a:effectRef idx="2">
+            <a:schemeClr val="accent1"/>
+          </a:effectRef>
+          <a:fontRef idx="minor">
+            <a:schemeClr val="lt1"/>
+          </a:fontRef>
+        </p:style>
+        <p:txBody>
+          <a:bodyPr rtlCol="0" anchor="ctr" wrap="square"/>
+          <a:lstStyle/>
+          <a:p>
+            <a:pPr algn="ctr"/>
+            <a:r>
+              <a:rPr sz="1250" b="1">
+                <a:solidFill>
+                  <a:srgbClr val="E6EDF5"/>
+                </a:solidFill>
+              </a:rPr>
+              <a:t>Route
+Reconstruction</a:t>
+            </a:r>
+          </a:p>
+        </p:txBody>
+      </p:sp>
+      <p:sp>
+        <p:nvSpPr>
+          <p:cNvPr id="16" name="TextBox 15"/>
+          <p:cNvSpPr txBox="1"/>
+          <p:nvPr/>
+        </p:nvSpPr>
+        <p:spPr>
+          <a:xfrm>
+            <a:off x="9863175" y="2697480"/>
+            <a:ext cx="256032" cy="457200"/>
+          </a:xfrm>
+          <a:prstGeom prst="rect">
+            <a:avLst/>
+          </a:prstGeom>
+          <a:noFill/>
+        </p:spPr>
+        <p:txBody>
+          <a:bodyPr wrap="square">
+            <a:spAutoFit/>
+          </a:bodyPr>
+          <a:lstStyle/>
+          <a:p>
+            <a:pPr algn="ctr">
+              <a:lnSpc>
+                <a:spcPct val="115000"/>
+              </a:lnSpc>
+            </a:pPr>
+            <a:r>
+              <a:rPr sz="2000" b="0">
+                <a:solidFill>
+                  <a:srgbClr val="5C6B86"/>
+                </a:solidFill>
+                <a:latin typeface="Inter"/>
+              </a:rPr>
+              <a:t>→</a:t>
+            </a:r>
+          </a:p>
+        </p:txBody>
+      </p:sp>
+      <p:sp>
+        <p:nvSpPr>
+          <p:cNvPr id="17" name="Rounded Rectangle 16"/>
+          <p:cNvSpPr/>
+          <p:nvPr/>
+        </p:nvSpPr>
+        <p:spPr>
+          <a:xfrm>
+            <a:off x="10119207" y="2377440"/>
+            <a:ext cx="1691640" cy="1051560"/>
+          </a:xfrm>
+          <a:prstGeom prst="roundRect">
+            <a:avLst>
+              <a:gd name="adj" fmla="val 12000"/>
+            </a:avLst>
+          </a:prstGeom>
+          <a:solidFill>
+            <a:srgbClr val="111823"/>
+          </a:solidFill>
+          <a:ln w="19050">
+            <a:solidFill>
+              <a:srgbClr val="22C55E"/>
+            </a:solidFill>
+          </a:ln>
+          <a:effectLst/>
+        </p:spPr>
+        <p:style>
+          <a:lnRef idx="1">
+            <a:schemeClr val="accent1"/>
+          </a:lnRef>
+          <a:fillRef idx="3">
+            <a:schemeClr val="accent1"/>
+          </a:fillRef>
+          <a:effectRef idx="2">
+            <a:schemeClr val="accent1"/>
+          </a:effectRef>
+          <a:fontRef idx="minor">
+            <a:schemeClr val="lt1"/>
+          </a:fontRef>
+        </p:style>
+        <p:txBody>
+          <a:bodyPr rtlCol="0" anchor="ctr" wrap="square"/>
+          <a:lstStyle/>
+          <a:p>
+            <a:pPr algn="ctr"/>
+            <a:r>
+              <a:rPr sz="1250" b="1">
+                <a:solidFill>
+                  <a:srgbClr val="E6EDF5"/>
+                </a:solidFill>
+              </a:rPr>
+              <a:t>Unified
+Dashboard</a:t>
+            </a:r>
+          </a:p>
+        </p:txBody>
+      </p:sp>
+      <p:sp>
+        <p:nvSpPr>
+          <p:cNvPr id="18" name="TextBox 17"/>
+          <p:cNvSpPr txBox="1"/>
+          <p:nvPr/>
+        </p:nvSpPr>
+        <p:spPr>
+          <a:xfrm>
+            <a:off x="548640" y="3931920"/>
+            <a:ext cx="11064240" cy="457200"/>
+          </a:xfrm>
+          <a:prstGeom prst="rect">
+            <a:avLst/>
+          </a:prstGeom>
+          <a:noFill/>
+        </p:spPr>
+        <p:txBody>
+          <a:bodyPr wrap="square">
+            <a:spAutoFit/>
+          </a:bodyPr>
+          <a:lstStyle/>
+          <a:p>
+            <a:pPr algn="ctr">
+              <a:lnSpc>
+                <a:spcPct val="115000"/>
+              </a:lnSpc>
+            </a:pPr>
+            <a:r>
+              <a:rPr sz="1500" b="0">
                 <a:solidFill>
                   <a:srgbClr val="9FB0C6"/>
                 </a:solidFill>
                 <a:latin typeface="Inter"/>
               </a:rPr>
-              <a:t>▸ TCP-forced RTSP, PTS-derived timing (never wall-clock or declared FPS), exponential backoff reconnect.</a:t>
-            </a:r>
-          </a:p>
-          <a:p>
-            <a:pPr>
-              <a:lnSpc>
-                <a:spcPct val="120000"/>
-              </a:lnSpc>
-              <a:spcAft>
-                <a:spcPts val="1400"/>
-              </a:spcAft>
-            </a:pPr>
-            <a:r>
-              <a:rPr sz="1600">
-                <a:solidFill>
-                  <a:srgbClr val="9FB0C6"/>
-                </a:solidFill>
-                <a:latin typeface="Inter"/>
-              </a:rPr>
-              <a:t>▸ Tolerant of decoder warm-up noise and mixed H.264 / H.265 codecs — confirmed live on the sandbox grid.</a:t>
-            </a:r>
-          </a:p>
-          <a:p>
-            <a:pPr>
-              <a:lnSpc>
-                <a:spcPct val="120000"/>
-              </a:lnSpc>
-              <a:spcAft>
-                <a:spcPts val="1400"/>
-              </a:spcAft>
-            </a:pPr>
-            <a:r>
-              <a:rPr sz="1600">
-                <a:solidFill>
-                  <a:srgbClr val="9FB0C6"/>
-                </a:solidFill>
-                <a:latin typeface="Inter"/>
-              </a:rPr>
-              <a:t>▸ Camera inventory always pulled live from the gateway catalogue — zero hardcoded camera IDs.</a:t>
-            </a:r>
-          </a:p>
-        </p:txBody>
-      </p:sp>
-      <p:sp>
-        <p:nvSpPr>
-          <p:cNvPr id="8" name="Rounded Rectangle 7"/>
+              <a:t>No video is ever centrally stored — only structured detection metadata (plate text, camera, timestamp, confidence).</a:t>
+            </a:r>
+          </a:p>
+        </p:txBody>
+      </p:sp>
+      <p:sp>
+        <p:nvSpPr>
+          <p:cNvPr id="19" name="Rounded Rectangle 18"/>
           <p:cNvSpPr/>
           <p:nvPr/>
         </p:nvSpPr>
         <p:spPr>
           <a:xfrm>
-            <a:off x="548640" y="3429000"/>
-            <a:ext cx="10881360" cy="2651760"/>
+            <a:off x="1828800" y="4663440"/>
+            <a:ext cx="8503920" cy="1371600"/>
           </a:xfrm>
           <a:prstGeom prst="roundRect">
             <a:avLst>
@@ -8292,14 +9158,14 @@
       </p:sp>
       <p:sp>
         <p:nvSpPr>
-          <p:cNvPr id="9" name="TextBox 8"/>
+          <p:cNvPr id="20" name="TextBox 19"/>
           <p:cNvSpPr txBox="1"/>
           <p:nvPr/>
         </p:nvSpPr>
         <p:spPr>
           <a:xfrm>
-            <a:off x="822960" y="3611880"/>
-            <a:ext cx="9144000" cy="365760"/>
+            <a:off x="2103120" y="4846320"/>
+            <a:ext cx="8046720" cy="1097280"/>
           </a:xfrm>
           <a:prstGeom prst="rect">
             <a:avLst/>
@@ -8312,33 +9178,74 @@
           </a:bodyPr>
           <a:lstStyle/>
           <a:p>
-            <a:pPr algn="l">
-              <a:lnSpc>
-                <a:spcPct val="115000"/>
-              </a:lnSpc>
-            </a:pPr>
-            <a:r>
-              <a:rPr sz="1300" b="1">
-                <a:solidFill>
-                  <a:srgbClr val="22C55E"/>
-                </a:solidFill>
-                <a:latin typeface="Consolas"/>
-              </a:rPr>
-              <a:t>VALIDATED AGAINST THE LIVE 30-CAMERA SANDBOX</a:t>
-            </a:r>
-          </a:p>
-        </p:txBody>
-      </p:sp>
-      <p:sp>
-        <p:nvSpPr>
-          <p:cNvPr id="10" name="TextBox 9"/>
+            <a:pPr>
+              <a:lnSpc>
+                <a:spcPct val="120000"/>
+              </a:lnSpc>
+              <a:spcAft>
+                <a:spcPts val="800"/>
+              </a:spcAft>
+            </a:pPr>
+            <a:r>
+              <a:rPr sz="1350">
+                <a:solidFill>
+                  <a:srgbClr val="9FB0C6"/>
+                </a:solidFill>
+                <a:latin typeface="Inter"/>
+              </a:rPr>
+              <a:t>▸ Capture: TCP-forced RTSP, PTS-derived timing, exponential-backoff reconnect.</a:t>
+            </a:r>
+          </a:p>
+          <a:p>
+            <a:pPr>
+              <a:lnSpc>
+                <a:spcPct val="120000"/>
+              </a:lnSpc>
+              <a:spcAft>
+                <a:spcPts val="800"/>
+              </a:spcAft>
+            </a:pPr>
+            <a:r>
+              <a:rPr sz="1350">
+                <a:solidFill>
+                  <a:srgbClr val="9FB0C6"/>
+                </a:solidFill>
+                <a:latin typeface="Inter"/>
+              </a:rPr>
+              <a:t>▸ Analytics: YOLO plate detector + PaddleOCR, CPU-only, configurable sample rate.</a:t>
+            </a:r>
+          </a:p>
+          <a:p>
+            <a:pPr>
+              <a:lnSpc>
+                <a:spcPct val="120000"/>
+              </a:lnSpc>
+              <a:spcAft>
+                <a:spcPts val="800"/>
+              </a:spcAft>
+            </a:pPr>
+            <a:r>
+              <a:rPr sz="1350">
+                <a:solidFill>
+                  <a:srgbClr val="9FB0C6"/>
+                </a:solidFill>
+                <a:latin typeface="Inter"/>
+              </a:rPr>
+              <a:t>▸ Storage: SQLite metadata log (schema-compatible upgrade path to PostgreSQL).</a:t>
+            </a:r>
+          </a:p>
+        </p:txBody>
+      </p:sp>
+      <p:sp>
+        <p:nvSpPr>
+          <p:cNvPr id="21" name="TextBox 20"/>
           <p:cNvSpPr txBox="1"/>
           <p:nvPr/>
         </p:nvSpPr>
         <p:spPr>
           <a:xfrm>
-            <a:off x="822960" y="4069080"/>
-            <a:ext cx="10058400" cy="1920240"/>
+            <a:off x="548640" y="6473952"/>
+            <a:ext cx="5486400" cy="274320"/>
           </a:xfrm>
           <a:prstGeom prst="rect">
             <a:avLst/>
@@ -8351,86 +9258,6 @@
           </a:bodyPr>
           <a:lstStyle/>
           <a:p>
-            <a:pPr>
-              <a:lnSpc>
-                <a:spcPct val="120000"/>
-              </a:lnSpc>
-              <a:spcAft>
-                <a:spcPts val="1200"/>
-              </a:spcAft>
-            </a:pPr>
-            <a:r>
-              <a:rPr sz="1500">
-                <a:solidFill>
-                  <a:srgbClr val="9FB0C6"/>
-                </a:solidFill>
-                <a:latin typeface="Inter"/>
-              </a:rPr>
-              <a:t>▸ Found and fixed a real cross-thread cv2.VideoCapture segfault during load testing — a genuine stability bug, not a hypothetical one.</a:t>
-            </a:r>
-          </a:p>
-          <a:p>
-            <a:pPr>
-              <a:lnSpc>
-                <a:spcPct val="120000"/>
-              </a:lnSpc>
-              <a:spcAft>
-                <a:spcPts val="1200"/>
-              </a:spcAft>
-            </a:pPr>
-            <a:r>
-              <a:rPr sz="1500">
-                <a:solidFill>
-                  <a:srgbClr val="9FB0C6"/>
-                </a:solidFill>
-                <a:latin typeface="Inter"/>
-              </a:rPr>
-              <a:t>▸ Confirmed automatic reconnect/recovery after a forced restart.</a:t>
-            </a:r>
-          </a:p>
-          <a:p>
-            <a:pPr>
-              <a:lnSpc>
-                <a:spcPct val="120000"/>
-              </a:lnSpc>
-              <a:spcAft>
-                <a:spcPts val="1200"/>
-              </a:spcAft>
-            </a:pPr>
-            <a:r>
-              <a:rPr sz="1500">
-                <a:solidFill>
-                  <a:srgbClr val="9FB0C6"/>
-                </a:solidFill>
-                <a:latin typeface="Inter"/>
-              </a:rPr>
-              <a:t>▸ Ran a clean, multi-camera, multi-hour unattended session: zero crashes, zero unwanted reconnects, 480+ real detections logged.</a:t>
-            </a:r>
-          </a:p>
-        </p:txBody>
-      </p:sp>
-      <p:sp>
-        <p:nvSpPr>
-          <p:cNvPr id="11" name="TextBox 10"/>
-          <p:cNvSpPr txBox="1"/>
-          <p:nvPr/>
-        </p:nvSpPr>
-        <p:spPr>
-          <a:xfrm>
-            <a:off x="548640" y="6473952"/>
-            <a:ext cx="5486400" cy="274320"/>
-          </a:xfrm>
-          <a:prstGeom prst="rect">
-            <a:avLst/>
-          </a:prstGeom>
-          <a:noFill/>
-        </p:spPr>
-        <p:txBody>
-          <a:bodyPr wrap="square">
-            <a:spAutoFit/>
-          </a:bodyPr>
-          <a:lstStyle/>
-          <a:p>
             <a:pPr algn="l">
               <a:lnSpc>
                 <a:spcPct val="115000"/>
@@ -8450,7 +9277,7 @@
       </p:sp>
       <p:sp>
         <p:nvSpPr>
-          <p:cNvPr id="12" name="TextBox 11"/>
+          <p:cNvPr id="22" name="TextBox 21"/>
           <p:cNvSpPr txBox="1"/>
           <p:nvPr/>
         </p:nvSpPr>
@@ -8607,7 +9434,7 @@
                 </a:solidFill>
                 <a:latin typeface="Consolas"/>
               </a:rPr>
-              <a:t>AI-POWERED VIDEO ANALYTICS</a:t>
+              <a:t>ENGINEERING — PROVEN, NOT JUST DESIGNED</a:t>
             </a:r>
           </a:p>
         </p:txBody>
@@ -8646,7 +9473,7 @@
                 </a:solidFill>
                 <a:latin typeface="Inter"/>
               </a:rPr>
-              <a:t>Finding — and Fixing — the Plate-Legibility Bottleneck</a:t>
+              <a:t>Live Stream Ingestion</a:t>
             </a:r>
           </a:p>
         </p:txBody>
@@ -8697,23 +9524,107 @@
       </p:sp>
       <p:sp>
         <p:nvSpPr>
-          <p:cNvPr id="7" name="Oval 6"/>
+          <p:cNvPr id="7" name="TextBox 6"/>
+          <p:cNvSpPr txBox="1"/>
+          <p:nvPr/>
+        </p:nvSpPr>
+        <p:spPr>
+          <a:xfrm>
+            <a:off x="548640" y="1463040"/>
+            <a:ext cx="10881360" cy="1828800"/>
+          </a:xfrm>
+          <a:prstGeom prst="rect">
+            <a:avLst/>
+          </a:prstGeom>
+          <a:noFill/>
+        </p:spPr>
+        <p:txBody>
+          <a:bodyPr wrap="square">
+            <a:spAutoFit/>
+          </a:bodyPr>
+          <a:lstStyle/>
+          <a:p>
+            <a:pPr>
+              <a:lnSpc>
+                <a:spcPct val="120000"/>
+              </a:lnSpc>
+              <a:spcAft>
+                <a:spcPts val="1400"/>
+              </a:spcAft>
+            </a:pPr>
+            <a:r>
+              <a:rPr sz="1600">
+                <a:solidFill>
+                  <a:srgbClr val="9FB0C6"/>
+                </a:solidFill>
+                <a:latin typeface="Inter"/>
+              </a:rPr>
+              <a:t>▸ TCP-forced RTSP, PTS-derived timing (never wall-clock or declared FPS), exponential backoff reconnect.</a:t>
+            </a:r>
+          </a:p>
+          <a:p>
+            <a:pPr>
+              <a:lnSpc>
+                <a:spcPct val="120000"/>
+              </a:lnSpc>
+              <a:spcAft>
+                <a:spcPts val="1400"/>
+              </a:spcAft>
+            </a:pPr>
+            <a:r>
+              <a:rPr sz="1600">
+                <a:solidFill>
+                  <a:srgbClr val="9FB0C6"/>
+                </a:solidFill>
+                <a:latin typeface="Inter"/>
+              </a:rPr>
+              <a:t>▸ Tolerant of decoder warm-up noise and mixed H.264 / H.265 codecs — confirmed live on the sandbox grid.</a:t>
+            </a:r>
+          </a:p>
+          <a:p>
+            <a:pPr>
+              <a:lnSpc>
+                <a:spcPct val="120000"/>
+              </a:lnSpc>
+              <a:spcAft>
+                <a:spcPts val="1400"/>
+              </a:spcAft>
+            </a:pPr>
+            <a:r>
+              <a:rPr sz="1600">
+                <a:solidFill>
+                  <a:srgbClr val="9FB0C6"/>
+                </a:solidFill>
+                <a:latin typeface="Inter"/>
+              </a:rPr>
+              <a:t>▸ Camera inventory always pulled live from the gateway catalogue — zero hardcoded camera IDs.</a:t>
+            </a:r>
+          </a:p>
+        </p:txBody>
+      </p:sp>
+      <p:sp>
+        <p:nvSpPr>
+          <p:cNvPr id="8" name="Rounded Rectangle 7"/>
           <p:cNvSpPr/>
           <p:nvPr/>
         </p:nvSpPr>
         <p:spPr>
           <a:xfrm>
-            <a:off x="548640" y="1417320"/>
-            <a:ext cx="365760" cy="365760"/>
-          </a:xfrm>
-          <a:prstGeom prst="ellipse">
-            <a:avLst/>
+            <a:off x="548640" y="3429000"/>
+            <a:ext cx="10881360" cy="2651760"/>
+          </a:xfrm>
+          <a:prstGeom prst="roundRect">
+            <a:avLst>
+              <a:gd name="adj" fmla="val 6000"/>
+            </a:avLst>
           </a:prstGeom>
           <a:solidFill>
-            <a:srgbClr val="3B82F6"/>
+            <a:srgbClr val="111823"/>
           </a:solidFill>
-          <a:ln>
-            <a:noFill/>
+          <a:ln w="12700">
+            <a:solidFill>
+              <a:srgbClr val="1E2A3A"/>
+            </a:solidFill>
           </a:ln>
           <a:effectLst/>
         </p:spPr>
@@ -8736,27 +9647,19 @@
           <a:lstStyle/>
           <a:p>
             <a:pPr algn="ctr"/>
-            <a:r>
-              <a:rPr b="1" sz="1400">
-                <a:solidFill>
-                  <a:srgbClr val="FFFFFF"/>
-                </a:solidFill>
-              </a:rPr>
-              <a:t>1</a:t>
-            </a:r>
-          </a:p>
-        </p:txBody>
-      </p:sp>
-      <p:sp>
-        <p:nvSpPr>
-          <p:cNvPr id="8" name="TextBox 7"/>
+          </a:p>
+        </p:txBody>
+      </p:sp>
+      <p:sp>
+        <p:nvSpPr>
+          <p:cNvPr id="9" name="TextBox 8"/>
           <p:cNvSpPr txBox="1"/>
           <p:nvPr/>
         </p:nvSpPr>
         <p:spPr>
           <a:xfrm>
-            <a:off x="1097280" y="1399032"/>
-            <a:ext cx="10332720" cy="777240"/>
+            <a:off x="822960" y="3611880"/>
+            <a:ext cx="9144000" cy="365760"/>
           </a:xfrm>
           <a:prstGeom prst="rect">
             <a:avLst/>
@@ -8771,69 +9674,17 @@
           <a:p>
             <a:pPr algn="l">
               <a:lnSpc>
-                <a:spcPct val="110000"/>
-              </a:lnSpc>
-            </a:pPr>
-            <a:r>
-              <a:rPr sz="1350" b="0">
-                <a:solidFill>
-                  <a:srgbClr val="9FB0C6"/>
-                </a:solidFill>
-                <a:latin typeface="Inter"/>
-              </a:rPr>
-              <a:t>Most sandbox cameras are wide-angle overhead junction cams — genuinely not plate-resolvable at distance. An honest finding, not a failure.</a:t>
-            </a:r>
-          </a:p>
-        </p:txBody>
-      </p:sp>
-      <p:sp>
-        <p:nvSpPr>
-          <p:cNvPr id="9" name="Oval 8"/>
-          <p:cNvSpPr/>
-          <p:nvPr/>
-        </p:nvSpPr>
-        <p:spPr>
-          <a:xfrm>
-            <a:off x="548640" y="2350008"/>
-            <a:ext cx="365760" cy="365760"/>
-          </a:xfrm>
-          <a:prstGeom prst="ellipse">
-            <a:avLst/>
-          </a:prstGeom>
-          <a:solidFill>
-            <a:srgbClr val="3B82F6"/>
-          </a:solidFill>
-          <a:ln>
-            <a:noFill/>
-          </a:ln>
-          <a:effectLst/>
-        </p:spPr>
-        <p:style>
-          <a:lnRef idx="1">
-            <a:schemeClr val="accent1"/>
-          </a:lnRef>
-          <a:fillRef idx="3">
-            <a:schemeClr val="accent1"/>
-          </a:fillRef>
-          <a:effectRef idx="2">
-            <a:schemeClr val="accent1"/>
-          </a:effectRef>
-          <a:fontRef idx="minor">
-            <a:schemeClr val="lt1"/>
-          </a:fontRef>
-        </p:style>
-        <p:txBody>
-          <a:bodyPr rtlCol="0" anchor="ctr"/>
-          <a:lstStyle/>
-          <a:p>
-            <a:pPr algn="ctr"/>
-            <a:r>
-              <a:rPr b="1" sz="1400">
-                <a:solidFill>
-                  <a:srgbClr val="FFFFFF"/>
-                </a:solidFill>
-              </a:rPr>
-              <a:t>2</a:t>
+                <a:spcPct val="115000"/>
+              </a:lnSpc>
+            </a:pPr>
+            <a:r>
+              <a:rPr sz="1300" b="1">
+                <a:solidFill>
+                  <a:srgbClr val="22C55E"/>
+                </a:solidFill>
+                <a:latin typeface="Consolas"/>
+              </a:rPr>
+              <a:t>VALIDATED AGAINST THE LIVE 30-CAMERA SANDBOX</a:t>
             </a:r>
           </a:p>
         </p:txBody>
@@ -8846,8 +9697,8 @@
         </p:nvSpPr>
         <p:spPr>
           <a:xfrm>
-            <a:off x="1097280" y="2331720"/>
-            <a:ext cx="10332720" cy="777240"/>
+            <a:off x="822960" y="4069080"/>
+            <a:ext cx="10058400" cy="1920240"/>
           </a:xfrm>
           <a:prstGeom prst="rect">
             <a:avLst/>
@@ -8860,85 +9711,74 @@
           </a:bodyPr>
           <a:lstStyle/>
           <a:p>
-            <a:pPr algn="l">
-              <a:lnSpc>
-                <a:spcPct val="110000"/>
-              </a:lnSpc>
-            </a:pPr>
-            <a:r>
-              <a:rPr sz="1350" b="0">
+            <a:pPr>
+              <a:lnSpc>
+                <a:spcPct val="120000"/>
+              </a:lnSpc>
+              <a:spcAft>
+                <a:spcPts val="1200"/>
+              </a:spcAft>
+            </a:pPr>
+            <a:r>
+              <a:rPr sz="1500">
                 <a:solidFill>
                   <a:srgbClr val="9FB0C6"/>
                 </a:solidFill>
                 <a:latin typeface="Inter"/>
               </a:rPr>
-              <a:t>Went back to the camera catalogue's own display names and found a toll-plaza camera ("Tollnaka") — camera metadata, not just camera count, was the actionable signal.</a:t>
-            </a:r>
-          </a:p>
-        </p:txBody>
-      </p:sp>
-      <p:sp>
-        <p:nvSpPr>
-          <p:cNvPr id="11" name="Oval 10"/>
-          <p:cNvSpPr/>
-          <p:nvPr/>
-        </p:nvSpPr>
-        <p:spPr>
-          <a:xfrm>
-            <a:off x="548640" y="3282696"/>
-            <a:ext cx="365760" cy="365760"/>
-          </a:xfrm>
-          <a:prstGeom prst="ellipse">
-            <a:avLst/>
-          </a:prstGeom>
-          <a:solidFill>
-            <a:srgbClr val="3B82F6"/>
-          </a:solidFill>
-          <a:ln>
-            <a:noFill/>
-          </a:ln>
-          <a:effectLst/>
-        </p:spPr>
-        <p:style>
-          <a:lnRef idx="1">
-            <a:schemeClr val="accent1"/>
-          </a:lnRef>
-          <a:fillRef idx="3">
-            <a:schemeClr val="accent1"/>
-          </a:fillRef>
-          <a:effectRef idx="2">
-            <a:schemeClr val="accent1"/>
-          </a:effectRef>
-          <a:fontRef idx="minor">
-            <a:schemeClr val="lt1"/>
-          </a:fontRef>
-        </p:style>
-        <p:txBody>
-          <a:bodyPr rtlCol="0" anchor="ctr"/>
-          <a:lstStyle/>
-          <a:p>
-            <a:pPr algn="ctr"/>
-            <a:r>
-              <a:rPr b="1" sz="1400">
-                <a:solidFill>
-                  <a:srgbClr val="FFFFFF"/>
-                </a:solidFill>
-              </a:rPr>
-              <a:t>3</a:t>
-            </a:r>
-          </a:p>
-        </p:txBody>
-      </p:sp>
-      <p:sp>
-        <p:nvSpPr>
-          <p:cNvPr id="12" name="TextBox 11"/>
+              <a:t>▸ Found and fixed a real cross-thread cv2.VideoCapture segfault during load testing — a genuine stability bug, not a hypothetical one.</a:t>
+            </a:r>
+          </a:p>
+          <a:p>
+            <a:pPr>
+              <a:lnSpc>
+                <a:spcPct val="120000"/>
+              </a:lnSpc>
+              <a:spcAft>
+                <a:spcPts val="1200"/>
+              </a:spcAft>
+            </a:pPr>
+            <a:r>
+              <a:rPr sz="1500">
+                <a:solidFill>
+                  <a:srgbClr val="9FB0C6"/>
+                </a:solidFill>
+                <a:latin typeface="Inter"/>
+              </a:rPr>
+              <a:t>▸ Confirmed automatic reconnect/recovery after a forced restart.</a:t>
+            </a:r>
+          </a:p>
+          <a:p>
+            <a:pPr>
+              <a:lnSpc>
+                <a:spcPct val="120000"/>
+              </a:lnSpc>
+              <a:spcAft>
+                <a:spcPts val="1200"/>
+              </a:spcAft>
+            </a:pPr>
+            <a:r>
+              <a:rPr sz="1500">
+                <a:solidFill>
+                  <a:srgbClr val="9FB0C6"/>
+                </a:solidFill>
+                <a:latin typeface="Inter"/>
+              </a:rPr>
+              <a:t>▸ Ran a clean, multi-camera, multi-hour unattended session: zero crashes, zero unwanted reconnects, 480+ real detections logged.</a:t>
+            </a:r>
+          </a:p>
+        </p:txBody>
+      </p:sp>
+      <p:sp>
+        <p:nvSpPr>
+          <p:cNvPr id="11" name="TextBox 10"/>
           <p:cNvSpPr txBox="1"/>
           <p:nvPr/>
         </p:nvSpPr>
         <p:spPr>
           <a:xfrm>
-            <a:off x="1097280" y="3264408"/>
-            <a:ext cx="10332720" cy="777240"/>
+            <a:off x="548640" y="6473952"/>
+            <a:ext cx="5486400" cy="274320"/>
           </a:xfrm>
           <a:prstGeom prst="rect">
             <a:avLst/>
@@ -8953,227 +9793,6 @@
           <a:p>
             <a:pPr algn="l">
               <a:lnSpc>
-                <a:spcPct val="110000"/>
-              </a:lnSpc>
-            </a:pPr>
-            <a:r>
-              <a:rPr sz="1350" b="0">
-                <a:solidFill>
-                  <a:srgbClr val="9FB0C6"/>
-                </a:solidFill>
-                <a:latin typeface="Inter"/>
-              </a:rPr>
-              <a:t>On that camera's legible plate crop, our first OCR engine (EasyOCR) capped at ~0.3 confidence after heavy tuning. Swapping to PaddleOCR on the identical crop, no other change: 0.87 confidence.</a:t>
-            </a:r>
-          </a:p>
-        </p:txBody>
-      </p:sp>
-      <p:sp>
-        <p:nvSpPr>
-          <p:cNvPr id="13" name="Oval 12"/>
-          <p:cNvSpPr/>
-          <p:nvPr/>
-        </p:nvSpPr>
-        <p:spPr>
-          <a:xfrm>
-            <a:off x="548640" y="4215384"/>
-            <a:ext cx="365760" cy="365760"/>
-          </a:xfrm>
-          <a:prstGeom prst="ellipse">
-            <a:avLst/>
-          </a:prstGeom>
-          <a:solidFill>
-            <a:srgbClr val="3B82F6"/>
-          </a:solidFill>
-          <a:ln>
-            <a:noFill/>
-          </a:ln>
-          <a:effectLst/>
-        </p:spPr>
-        <p:style>
-          <a:lnRef idx="1">
-            <a:schemeClr val="accent1"/>
-          </a:lnRef>
-          <a:fillRef idx="3">
-            <a:schemeClr val="accent1"/>
-          </a:fillRef>
-          <a:effectRef idx="2">
-            <a:schemeClr val="accent1"/>
-          </a:effectRef>
-          <a:fontRef idx="minor">
-            <a:schemeClr val="lt1"/>
-          </a:fontRef>
-        </p:style>
-        <p:txBody>
-          <a:bodyPr rtlCol="0" anchor="ctr"/>
-          <a:lstStyle/>
-          <a:p>
-            <a:pPr algn="ctr"/>
-            <a:r>
-              <a:rPr b="1" sz="1400">
-                <a:solidFill>
-                  <a:srgbClr val="FFFFFF"/>
-                </a:solidFill>
-              </a:rPr>
-              <a:t>4</a:t>
-            </a:r>
-          </a:p>
-        </p:txBody>
-      </p:sp>
-      <p:sp>
-        <p:nvSpPr>
-          <p:cNvPr id="14" name="TextBox 13"/>
-          <p:cNvSpPr txBox="1"/>
-          <p:nvPr/>
-        </p:nvSpPr>
-        <p:spPr>
-          <a:xfrm>
-            <a:off x="1097280" y="4197096"/>
-            <a:ext cx="10332720" cy="777240"/>
-          </a:xfrm>
-          <a:prstGeom prst="rect">
-            <a:avLst/>
-          </a:prstGeom>
-          <a:noFill/>
-        </p:spPr>
-        <p:txBody>
-          <a:bodyPr wrap="square">
-            <a:spAutoFit/>
-          </a:bodyPr>
-          <a:lstStyle/>
-          <a:p>
-            <a:pPr algn="l">
-              <a:lnSpc>
-                <a:spcPct val="110000"/>
-              </a:lnSpc>
-            </a:pPr>
-            <a:r>
-              <a:rPr sz="1350" b="0">
-                <a:solidFill>
-                  <a:srgbClr val="9FB0C6"/>
-                </a:solidFill>
-                <a:latin typeface="Inter"/>
-              </a:rPr>
-              <a:t>Even then the real pipeline still failed — root cause was our own bounding-box crop clipping characters. Fixed by padding the detector's box 75% of its own size, verified against real detector output.</a:t>
-            </a:r>
-          </a:p>
-        </p:txBody>
-      </p:sp>
-      <p:sp>
-        <p:nvSpPr>
-          <p:cNvPr id="15" name="Oval 14"/>
-          <p:cNvSpPr/>
-          <p:nvPr/>
-        </p:nvSpPr>
-        <p:spPr>
-          <a:xfrm>
-            <a:off x="548640" y="5148072"/>
-            <a:ext cx="365760" cy="365760"/>
-          </a:xfrm>
-          <a:prstGeom prst="ellipse">
-            <a:avLst/>
-          </a:prstGeom>
-          <a:solidFill>
-            <a:srgbClr val="3B82F6"/>
-          </a:solidFill>
-          <a:ln>
-            <a:noFill/>
-          </a:ln>
-          <a:effectLst/>
-        </p:spPr>
-        <p:style>
-          <a:lnRef idx="1">
-            <a:schemeClr val="accent1"/>
-          </a:lnRef>
-          <a:fillRef idx="3">
-            <a:schemeClr val="accent1"/>
-          </a:fillRef>
-          <a:effectRef idx="2">
-            <a:schemeClr val="accent1"/>
-          </a:effectRef>
-          <a:fontRef idx="minor">
-            <a:schemeClr val="lt1"/>
-          </a:fontRef>
-        </p:style>
-        <p:txBody>
-          <a:bodyPr rtlCol="0" anchor="ctr"/>
-          <a:lstStyle/>
-          <a:p>
-            <a:pPr algn="ctr"/>
-            <a:r>
-              <a:rPr b="1" sz="1400">
-                <a:solidFill>
-                  <a:srgbClr val="FFFFFF"/>
-                </a:solidFill>
-              </a:rPr>
-              <a:t>5</a:t>
-            </a:r>
-          </a:p>
-        </p:txBody>
-      </p:sp>
-      <p:sp>
-        <p:nvSpPr>
-          <p:cNvPr id="16" name="TextBox 15"/>
-          <p:cNvSpPr txBox="1"/>
-          <p:nvPr/>
-        </p:nvSpPr>
-        <p:spPr>
-          <a:xfrm>
-            <a:off x="1097280" y="5129784"/>
-            <a:ext cx="10332720" cy="777240"/>
-          </a:xfrm>
-          <a:prstGeom prst="rect">
-            <a:avLst/>
-          </a:prstGeom>
-          <a:noFill/>
-        </p:spPr>
-        <p:txBody>
-          <a:bodyPr wrap="square">
-            <a:spAutoFit/>
-          </a:bodyPr>
-          <a:lstStyle/>
-          <a:p>
-            <a:pPr algn="l">
-              <a:lnSpc>
-                <a:spcPct val="110000"/>
-              </a:lnSpc>
-            </a:pPr>
-            <a:r>
-              <a:rPr sz="1350" b="0">
-                <a:solidFill>
-                  <a:srgbClr val="9FB0C6"/>
-                </a:solidFill>
-                <a:latin typeface="Inter"/>
-              </a:rPr>
-              <a:t>Result over a multi-hour unattended run: 480+ detections above threshold across three independently-confirmed cameras — full plausible Indian plates, not fragments (e.g. GJ05AU9828 at 0.96 confidence).</a:t>
-            </a:r>
-          </a:p>
-        </p:txBody>
-      </p:sp>
-      <p:sp>
-        <p:nvSpPr>
-          <p:cNvPr id="17" name="TextBox 16"/>
-          <p:cNvSpPr txBox="1"/>
-          <p:nvPr/>
-        </p:nvSpPr>
-        <p:spPr>
-          <a:xfrm>
-            <a:off x="548640" y="6473952"/>
-            <a:ext cx="5486400" cy="274320"/>
-          </a:xfrm>
-          <a:prstGeom prst="rect">
-            <a:avLst/>
-          </a:prstGeom>
-          <a:noFill/>
-        </p:spPr>
-        <p:txBody>
-          <a:bodyPr wrap="square">
-            <a:spAutoFit/>
-          </a:bodyPr>
-          <a:lstStyle/>
-          <a:p>
-            <a:pPr algn="l">
-              <a:lnSpc>
                 <a:spcPct val="115000"/>
               </a:lnSpc>
             </a:pPr>
@@ -9191,7 +9810,7 @@
       </p:sp>
       <p:sp>
         <p:nvSpPr>
-          <p:cNvPr id="18" name="TextBox 17"/>
+          <p:cNvPr id="12" name="TextBox 11"/>
           <p:cNvSpPr txBox="1"/>
           <p:nvPr/>
         </p:nvSpPr>
@@ -9348,7 +9967,7 @@
                 </a:solidFill>
                 <a:latin typeface="Consolas"/>
               </a:rPr>
-              <a:t>AI ANALYTICS — LIVE EVIDENCE</a:t>
+              <a:t>AI-POWERED VIDEO ANALYTICS</a:t>
             </a:r>
           </a:p>
         </p:txBody>
@@ -9387,7 +10006,7 @@
                 </a:solidFill>
                 <a:latin typeface="Inter"/>
               </a:rPr>
-              <a:t>Detection Feed: Watch the AI Working in Real Time</a:t>
+              <a:t>Finding — and Fixing — the Plate-Legibility Bottleneck</a:t>
             </a:r>
           </a:p>
         </p:txBody>
@@ -9436,35 +10055,58 @@
           </a:p>
         </p:txBody>
       </p:sp>
-      <p:pic>
-        <p:nvPicPr>
-          <p:cNvPr id="7" name="Picture 6" descr="detection_feed.png"/>
-          <p:cNvPicPr>
-            <a:picLocks noChangeAspect="1"/>
-          </p:cNvPicPr>
-          <p:nvPr/>
-        </p:nvPicPr>
-        <p:blipFill>
-          <a:blip r:embed="rId3"/>
-          <a:stretch>
-            <a:fillRect/>
-          </a:stretch>
-        </p:blipFill>
-        <p:spPr>
-          <a:xfrm>
-            <a:off x="1005840" y="1463040"/>
-            <a:ext cx="10149840" cy="5119924"/>
-          </a:xfrm>
-          <a:prstGeom prst="rect">
-            <a:avLst/>
-          </a:prstGeom>
-          <a:ln w="19050">
-            <a:solidFill>
-              <a:srgbClr val="1E2A3A"/>
-            </a:solidFill>
+      <p:sp>
+        <p:nvSpPr>
+          <p:cNvPr id="7" name="Oval 6"/>
+          <p:cNvSpPr/>
+          <p:nvPr/>
+        </p:nvSpPr>
+        <p:spPr>
+          <a:xfrm>
+            <a:off x="548640" y="1417320"/>
+            <a:ext cx="365760" cy="365760"/>
+          </a:xfrm>
+          <a:prstGeom prst="ellipse">
+            <a:avLst/>
+          </a:prstGeom>
+          <a:solidFill>
+            <a:srgbClr val="3B82F6"/>
+          </a:solidFill>
+          <a:ln>
+            <a:noFill/>
           </a:ln>
-        </p:spPr>
-      </p:pic>
+          <a:effectLst/>
+        </p:spPr>
+        <p:style>
+          <a:lnRef idx="1">
+            <a:schemeClr val="accent1"/>
+          </a:lnRef>
+          <a:fillRef idx="3">
+            <a:schemeClr val="accent1"/>
+          </a:fillRef>
+          <a:effectRef idx="2">
+            <a:schemeClr val="accent1"/>
+          </a:effectRef>
+          <a:fontRef idx="minor">
+            <a:schemeClr val="lt1"/>
+          </a:fontRef>
+        </p:style>
+        <p:txBody>
+          <a:bodyPr rtlCol="0" anchor="ctr"/>
+          <a:lstStyle/>
+          <a:p>
+            <a:pPr algn="ctr"/>
+            <a:r>
+              <a:rPr b="1" sz="1400">
+                <a:solidFill>
+                  <a:srgbClr val="FFFFFF"/>
+                </a:solidFill>
+              </a:rPr>
+              <a:t>1</a:t>
+            </a:r>
+          </a:p>
+        </p:txBody>
+      </p:sp>
       <p:sp>
         <p:nvSpPr>
           <p:cNvPr id="8" name="TextBox 7"/>
@@ -9473,8 +10115,8 @@
         </p:nvSpPr>
         <p:spPr>
           <a:xfrm>
-            <a:off x="1005840" y="6637828"/>
-            <a:ext cx="10149840" cy="274320"/>
+            <a:off x="1097280" y="1399032"/>
+            <a:ext cx="10332720" cy="777240"/>
           </a:xfrm>
           <a:prstGeom prst="rect">
             <a:avLst/>
@@ -9487,33 +10129,85 @@
           </a:bodyPr>
           <a:lstStyle/>
           <a:p>
-            <a:pPr algn="ctr">
-              <a:lnSpc>
-                <a:spcPct val="115000"/>
-              </a:lnSpc>
-            </a:pPr>
-            <a:r>
-              <a:rPr sz="1100" b="0">
-                <a:solidFill>
-                  <a:srgbClr val="5C6B86"/>
-                </a:solidFill>
-                <a:latin typeface="Consolas"/>
-              </a:rPr>
-              <a:t>Real crop + real annotated frame (bounding box drawn by the detector) for two different live-detected vehicles — not staged.</a:t>
-            </a:r>
-          </a:p>
-        </p:txBody>
-      </p:sp>
-      <p:sp>
-        <p:nvSpPr>
-          <p:cNvPr id="9" name="TextBox 8"/>
+            <a:pPr algn="l">
+              <a:lnSpc>
+                <a:spcPct val="110000"/>
+              </a:lnSpc>
+            </a:pPr>
+            <a:r>
+              <a:rPr sz="1350" b="0">
+                <a:solidFill>
+                  <a:srgbClr val="9FB0C6"/>
+                </a:solidFill>
+                <a:latin typeface="Inter"/>
+              </a:rPr>
+              <a:t>Most sandbox cameras are wide-angle overhead junction cams — genuinely not plate-resolvable at distance. An honest finding, not a failure.</a:t>
+            </a:r>
+          </a:p>
+        </p:txBody>
+      </p:sp>
+      <p:sp>
+        <p:nvSpPr>
+          <p:cNvPr id="9" name="Oval 8"/>
+          <p:cNvSpPr/>
+          <p:nvPr/>
+        </p:nvSpPr>
+        <p:spPr>
+          <a:xfrm>
+            <a:off x="548640" y="2350008"/>
+            <a:ext cx="365760" cy="365760"/>
+          </a:xfrm>
+          <a:prstGeom prst="ellipse">
+            <a:avLst/>
+          </a:prstGeom>
+          <a:solidFill>
+            <a:srgbClr val="3B82F6"/>
+          </a:solidFill>
+          <a:ln>
+            <a:noFill/>
+          </a:ln>
+          <a:effectLst/>
+        </p:spPr>
+        <p:style>
+          <a:lnRef idx="1">
+            <a:schemeClr val="accent1"/>
+          </a:lnRef>
+          <a:fillRef idx="3">
+            <a:schemeClr val="accent1"/>
+          </a:fillRef>
+          <a:effectRef idx="2">
+            <a:schemeClr val="accent1"/>
+          </a:effectRef>
+          <a:fontRef idx="minor">
+            <a:schemeClr val="lt1"/>
+          </a:fontRef>
+        </p:style>
+        <p:txBody>
+          <a:bodyPr rtlCol="0" anchor="ctr"/>
+          <a:lstStyle/>
+          <a:p>
+            <a:pPr algn="ctr"/>
+            <a:r>
+              <a:rPr b="1" sz="1400">
+                <a:solidFill>
+                  <a:srgbClr val="FFFFFF"/>
+                </a:solidFill>
+              </a:rPr>
+              <a:t>2</a:t>
+            </a:r>
+          </a:p>
+        </p:txBody>
+      </p:sp>
+      <p:sp>
+        <p:nvSpPr>
+          <p:cNvPr id="10" name="TextBox 9"/>
           <p:cNvSpPr txBox="1"/>
           <p:nvPr/>
         </p:nvSpPr>
         <p:spPr>
           <a:xfrm>
-            <a:off x="548640" y="6473952"/>
-            <a:ext cx="5486400" cy="274320"/>
+            <a:off x="1097280" y="2331720"/>
+            <a:ext cx="10332720" cy="777240"/>
           </a:xfrm>
           <a:prstGeom prst="rect">
             <a:avLst/>
@@ -9528,6 +10222,318 @@
           <a:p>
             <a:pPr algn="l">
               <a:lnSpc>
+                <a:spcPct val="110000"/>
+              </a:lnSpc>
+            </a:pPr>
+            <a:r>
+              <a:rPr sz="1350" b="0">
+                <a:solidFill>
+                  <a:srgbClr val="9FB0C6"/>
+                </a:solidFill>
+                <a:latin typeface="Inter"/>
+              </a:rPr>
+              <a:t>Went back to the camera catalogue's own display names and found a toll-plaza camera ("Tollnaka") — camera metadata, not just camera count, was the actionable signal.</a:t>
+            </a:r>
+          </a:p>
+        </p:txBody>
+      </p:sp>
+      <p:sp>
+        <p:nvSpPr>
+          <p:cNvPr id="11" name="Oval 10"/>
+          <p:cNvSpPr/>
+          <p:nvPr/>
+        </p:nvSpPr>
+        <p:spPr>
+          <a:xfrm>
+            <a:off x="548640" y="3282696"/>
+            <a:ext cx="365760" cy="365760"/>
+          </a:xfrm>
+          <a:prstGeom prst="ellipse">
+            <a:avLst/>
+          </a:prstGeom>
+          <a:solidFill>
+            <a:srgbClr val="3B82F6"/>
+          </a:solidFill>
+          <a:ln>
+            <a:noFill/>
+          </a:ln>
+          <a:effectLst/>
+        </p:spPr>
+        <p:style>
+          <a:lnRef idx="1">
+            <a:schemeClr val="accent1"/>
+          </a:lnRef>
+          <a:fillRef idx="3">
+            <a:schemeClr val="accent1"/>
+          </a:fillRef>
+          <a:effectRef idx="2">
+            <a:schemeClr val="accent1"/>
+          </a:effectRef>
+          <a:fontRef idx="minor">
+            <a:schemeClr val="lt1"/>
+          </a:fontRef>
+        </p:style>
+        <p:txBody>
+          <a:bodyPr rtlCol="0" anchor="ctr"/>
+          <a:lstStyle/>
+          <a:p>
+            <a:pPr algn="ctr"/>
+            <a:r>
+              <a:rPr b="1" sz="1400">
+                <a:solidFill>
+                  <a:srgbClr val="FFFFFF"/>
+                </a:solidFill>
+              </a:rPr>
+              <a:t>3</a:t>
+            </a:r>
+          </a:p>
+        </p:txBody>
+      </p:sp>
+      <p:sp>
+        <p:nvSpPr>
+          <p:cNvPr id="12" name="TextBox 11"/>
+          <p:cNvSpPr txBox="1"/>
+          <p:nvPr/>
+        </p:nvSpPr>
+        <p:spPr>
+          <a:xfrm>
+            <a:off x="1097280" y="3264408"/>
+            <a:ext cx="10332720" cy="777240"/>
+          </a:xfrm>
+          <a:prstGeom prst="rect">
+            <a:avLst/>
+          </a:prstGeom>
+          <a:noFill/>
+        </p:spPr>
+        <p:txBody>
+          <a:bodyPr wrap="square">
+            <a:spAutoFit/>
+          </a:bodyPr>
+          <a:lstStyle/>
+          <a:p>
+            <a:pPr algn="l">
+              <a:lnSpc>
+                <a:spcPct val="110000"/>
+              </a:lnSpc>
+            </a:pPr>
+            <a:r>
+              <a:rPr sz="1350" b="0">
+                <a:solidFill>
+                  <a:srgbClr val="9FB0C6"/>
+                </a:solidFill>
+                <a:latin typeface="Inter"/>
+              </a:rPr>
+              <a:t>On that camera's legible plate crop, our first OCR engine (EasyOCR) capped at ~0.3 confidence after heavy tuning. Swapping to PaddleOCR on the identical crop, no other change: 0.87 confidence.</a:t>
+            </a:r>
+          </a:p>
+        </p:txBody>
+      </p:sp>
+      <p:sp>
+        <p:nvSpPr>
+          <p:cNvPr id="13" name="Oval 12"/>
+          <p:cNvSpPr/>
+          <p:nvPr/>
+        </p:nvSpPr>
+        <p:spPr>
+          <a:xfrm>
+            <a:off x="548640" y="4215384"/>
+            <a:ext cx="365760" cy="365760"/>
+          </a:xfrm>
+          <a:prstGeom prst="ellipse">
+            <a:avLst/>
+          </a:prstGeom>
+          <a:solidFill>
+            <a:srgbClr val="3B82F6"/>
+          </a:solidFill>
+          <a:ln>
+            <a:noFill/>
+          </a:ln>
+          <a:effectLst/>
+        </p:spPr>
+        <p:style>
+          <a:lnRef idx="1">
+            <a:schemeClr val="accent1"/>
+          </a:lnRef>
+          <a:fillRef idx="3">
+            <a:schemeClr val="accent1"/>
+          </a:fillRef>
+          <a:effectRef idx="2">
+            <a:schemeClr val="accent1"/>
+          </a:effectRef>
+          <a:fontRef idx="minor">
+            <a:schemeClr val="lt1"/>
+          </a:fontRef>
+        </p:style>
+        <p:txBody>
+          <a:bodyPr rtlCol="0" anchor="ctr"/>
+          <a:lstStyle/>
+          <a:p>
+            <a:pPr algn="ctr"/>
+            <a:r>
+              <a:rPr b="1" sz="1400">
+                <a:solidFill>
+                  <a:srgbClr val="FFFFFF"/>
+                </a:solidFill>
+              </a:rPr>
+              <a:t>4</a:t>
+            </a:r>
+          </a:p>
+        </p:txBody>
+      </p:sp>
+      <p:sp>
+        <p:nvSpPr>
+          <p:cNvPr id="14" name="TextBox 13"/>
+          <p:cNvSpPr txBox="1"/>
+          <p:nvPr/>
+        </p:nvSpPr>
+        <p:spPr>
+          <a:xfrm>
+            <a:off x="1097280" y="4197096"/>
+            <a:ext cx="10332720" cy="777240"/>
+          </a:xfrm>
+          <a:prstGeom prst="rect">
+            <a:avLst/>
+          </a:prstGeom>
+          <a:noFill/>
+        </p:spPr>
+        <p:txBody>
+          <a:bodyPr wrap="square">
+            <a:spAutoFit/>
+          </a:bodyPr>
+          <a:lstStyle/>
+          <a:p>
+            <a:pPr algn="l">
+              <a:lnSpc>
+                <a:spcPct val="110000"/>
+              </a:lnSpc>
+            </a:pPr>
+            <a:r>
+              <a:rPr sz="1350" b="0">
+                <a:solidFill>
+                  <a:srgbClr val="9FB0C6"/>
+                </a:solidFill>
+                <a:latin typeface="Inter"/>
+              </a:rPr>
+              <a:t>Even then the real pipeline still failed — root cause was our own bounding-box crop clipping characters. Fixed by padding the detector's box 75% of its own size, verified against real detector output.</a:t>
+            </a:r>
+          </a:p>
+        </p:txBody>
+      </p:sp>
+      <p:sp>
+        <p:nvSpPr>
+          <p:cNvPr id="15" name="Oval 14"/>
+          <p:cNvSpPr/>
+          <p:nvPr/>
+        </p:nvSpPr>
+        <p:spPr>
+          <a:xfrm>
+            <a:off x="548640" y="5148072"/>
+            <a:ext cx="365760" cy="365760"/>
+          </a:xfrm>
+          <a:prstGeom prst="ellipse">
+            <a:avLst/>
+          </a:prstGeom>
+          <a:solidFill>
+            <a:srgbClr val="3B82F6"/>
+          </a:solidFill>
+          <a:ln>
+            <a:noFill/>
+          </a:ln>
+          <a:effectLst/>
+        </p:spPr>
+        <p:style>
+          <a:lnRef idx="1">
+            <a:schemeClr val="accent1"/>
+          </a:lnRef>
+          <a:fillRef idx="3">
+            <a:schemeClr val="accent1"/>
+          </a:fillRef>
+          <a:effectRef idx="2">
+            <a:schemeClr val="accent1"/>
+          </a:effectRef>
+          <a:fontRef idx="minor">
+            <a:schemeClr val="lt1"/>
+          </a:fontRef>
+        </p:style>
+        <p:txBody>
+          <a:bodyPr rtlCol="0" anchor="ctr"/>
+          <a:lstStyle/>
+          <a:p>
+            <a:pPr algn="ctr"/>
+            <a:r>
+              <a:rPr b="1" sz="1400">
+                <a:solidFill>
+                  <a:srgbClr val="FFFFFF"/>
+                </a:solidFill>
+              </a:rPr>
+              <a:t>5</a:t>
+            </a:r>
+          </a:p>
+        </p:txBody>
+      </p:sp>
+      <p:sp>
+        <p:nvSpPr>
+          <p:cNvPr id="16" name="TextBox 15"/>
+          <p:cNvSpPr txBox="1"/>
+          <p:nvPr/>
+        </p:nvSpPr>
+        <p:spPr>
+          <a:xfrm>
+            <a:off x="1097280" y="5129784"/>
+            <a:ext cx="10332720" cy="777240"/>
+          </a:xfrm>
+          <a:prstGeom prst="rect">
+            <a:avLst/>
+          </a:prstGeom>
+          <a:noFill/>
+        </p:spPr>
+        <p:txBody>
+          <a:bodyPr wrap="square">
+            <a:spAutoFit/>
+          </a:bodyPr>
+          <a:lstStyle/>
+          <a:p>
+            <a:pPr algn="l">
+              <a:lnSpc>
+                <a:spcPct val="110000"/>
+              </a:lnSpc>
+            </a:pPr>
+            <a:r>
+              <a:rPr sz="1350" b="0">
+                <a:solidFill>
+                  <a:srgbClr val="9FB0C6"/>
+                </a:solidFill>
+                <a:latin typeface="Inter"/>
+              </a:rPr>
+              <a:t>Result over a multi-hour unattended run: 480+ detections above threshold across three independently-confirmed cameras — full plausible Indian plates, not fragments (e.g. GJ05AU9828 at 0.96 confidence).</a:t>
+            </a:r>
+          </a:p>
+        </p:txBody>
+      </p:sp>
+      <p:sp>
+        <p:nvSpPr>
+          <p:cNvPr id="17" name="TextBox 16"/>
+          <p:cNvSpPr txBox="1"/>
+          <p:nvPr/>
+        </p:nvSpPr>
+        <p:spPr>
+          <a:xfrm>
+            <a:off x="548640" y="6473952"/>
+            <a:ext cx="5486400" cy="274320"/>
+          </a:xfrm>
+          <a:prstGeom prst="rect">
+            <a:avLst/>
+          </a:prstGeom>
+          <a:noFill/>
+        </p:spPr>
+        <p:txBody>
+          <a:bodyPr wrap="square">
+            <a:spAutoFit/>
+          </a:bodyPr>
+          <a:lstStyle/>
+          <a:p>
+            <a:pPr algn="l">
+              <a:lnSpc>
                 <a:spcPct val="115000"/>
               </a:lnSpc>
             </a:pPr>
@@ -9545,7 +10551,7 @@
       </p:sp>
       <p:sp>
         <p:nvSpPr>
-          <p:cNvPr id="10" name="TextBox 9"/>
+          <p:cNvPr id="18" name="TextBox 17"/>
           <p:cNvSpPr txBox="1"/>
           <p:nvPr/>
         </p:nvSpPr>
@@ -9702,7 +10708,7 @@
                 </a:solidFill>
                 <a:latin typeface="Consolas"/>
               </a:rPr>
-              <a:t>WATCHLIST CORRELATION</a:t>
+              <a:t>AI ANALYTICS — LIVE EVIDENCE</a:t>
             </a:r>
           </a:p>
         </p:txBody>
@@ -9741,7 +10747,7 @@
                 </a:solidFill>
                 <a:latin typeface="Inter"/>
               </a:rPr>
-              <a:t>Real-Time Alerting</a:t>
+              <a:t>Detection Feed: Watch the AI Working in Real Time</a:t>
             </a:r>
           </a:p>
         </p:txBody>
@@ -9790,108 +10796,9 @@
           </a:p>
         </p:txBody>
       </p:sp>
-      <p:sp>
-        <p:nvSpPr>
-          <p:cNvPr id="7" name="TextBox 6"/>
-          <p:cNvSpPr txBox="1"/>
-          <p:nvPr/>
-        </p:nvSpPr>
-        <p:spPr>
-          <a:xfrm>
-            <a:off x="548640" y="1463040"/>
-            <a:ext cx="5120640" cy="4114800"/>
-          </a:xfrm>
-          <a:prstGeom prst="rect">
-            <a:avLst/>
-          </a:prstGeom>
-          <a:noFill/>
-        </p:spPr>
-        <p:txBody>
-          <a:bodyPr wrap="square">
-            <a:spAutoFit/>
-          </a:bodyPr>
-          <a:lstStyle/>
-          <a:p>
-            <a:pPr>
-              <a:lnSpc>
-                <a:spcPct val="120000"/>
-              </a:lnSpc>
-              <a:spcAft>
-                <a:spcPts val="1600"/>
-              </a:spcAft>
-            </a:pPr>
-            <a:r>
-              <a:rPr sz="1550">
-                <a:solidFill>
-                  <a:srgbClr val="9FB0C6"/>
-                </a:solidFill>
-                <a:latin typeface="Inter"/>
-              </a:rPr>
-              <a:t>▸ Every OCR read — not sampled after the fact — is normalized and matched immediately.</a:t>
-            </a:r>
-          </a:p>
-          <a:p>
-            <a:pPr>
-              <a:lnSpc>
-                <a:spcPct val="120000"/>
-              </a:lnSpc>
-              <a:spcAft>
-                <a:spcPts val="1600"/>
-              </a:spcAft>
-            </a:pPr>
-            <a:r>
-              <a:rPr sz="1550">
-                <a:solidFill>
-                  <a:srgbClr val="9FB0C6"/>
-                </a:solidFill>
-                <a:latin typeface="Inter"/>
-              </a:rPr>
-              <a:t>▸ Two-pass matching: exact + OCR-confusion-aware pass (0/O, 1/I, 5/S, 8/B, 2/Z), then fuzzy-similarity fallback.</a:t>
-            </a:r>
-          </a:p>
-          <a:p>
-            <a:pPr>
-              <a:lnSpc>
-                <a:spcPct val="120000"/>
-              </a:lnSpc>
-              <a:spcAft>
-                <a:spcPts val="1600"/>
-              </a:spcAft>
-            </a:pPr>
-            <a:r>
-              <a:rPr sz="1550">
-                <a:solidFill>
-                  <a:srgbClr val="9FB0C6"/>
-                </a:solidFill>
-                <a:latin typeface="Inter"/>
-              </a:rPr>
-              <a:t>▸ A match writes an alert with camera, plate, PTS timestamp, confidence, and matched entry — visible on the dashboard within seconds, no manual refresh.</a:t>
-            </a:r>
-          </a:p>
-          <a:p>
-            <a:pPr>
-              <a:lnSpc>
-                <a:spcPct val="120000"/>
-              </a:lnSpc>
-              <a:spcAft>
-                <a:spcPts val="1600"/>
-              </a:spcAft>
-            </a:pPr>
-            <a:r>
-              <a:rPr sz="1550">
-                <a:solidFill>
-                  <a:srgbClr val="9FB0C6"/>
-                </a:solidFill>
-                <a:latin typeface="Inter"/>
-              </a:rPr>
-              <a:t>▸ Designed to plug into VAHAN / eGujCop-CCTNS as the real watchlist source in production; a representative watchlist is used for this demo, as explicitly permitted.</a:t>
-            </a:r>
-          </a:p>
-        </p:txBody>
-      </p:sp>
       <p:pic>
         <p:nvPicPr>
-          <p:cNvPr id="8" name="Picture 7" descr="alert.png"/>
+          <p:cNvPr id="7" name="Picture 6" descr="detection_feed.png"/>
           <p:cNvPicPr>
             <a:picLocks noChangeAspect="1"/>
           </p:cNvPicPr>
@@ -9905,8 +10812,8 @@
         </p:blipFill>
         <p:spPr>
           <a:xfrm>
-            <a:off x="5989320" y="1463040"/>
-            <a:ext cx="5623560" cy="2657770"/>
+            <a:off x="1005840" y="1463040"/>
+            <a:ext cx="10149840" cy="5119924"/>
           </a:xfrm>
           <a:prstGeom prst="rect">
             <a:avLst/>
@@ -9920,14 +10827,14 @@
       </p:pic>
       <p:sp>
         <p:nvSpPr>
-          <p:cNvPr id="9" name="TextBox 8"/>
+          <p:cNvPr id="8" name="TextBox 7"/>
           <p:cNvSpPr txBox="1"/>
           <p:nvPr/>
         </p:nvSpPr>
         <p:spPr>
           <a:xfrm>
-            <a:off x="5989320" y="4175674"/>
-            <a:ext cx="5623560" cy="274320"/>
+            <a:off x="1005840" y="6637828"/>
+            <a:ext cx="10149840" cy="274320"/>
           </a:xfrm>
           <a:prstGeom prst="rect">
             <a:avLst/>
@@ -9952,14 +10859,14 @@
                 </a:solidFill>
                 <a:latin typeface="Consolas"/>
               </a:rPr>
-              <a:t>Real watchlist match — 100% confidence, real plate crop, real timestamp.</a:t>
-            </a:r>
-          </a:p>
-        </p:txBody>
-      </p:sp>
-      <p:sp>
-        <p:nvSpPr>
-          <p:cNvPr id="10" name="TextBox 9"/>
+              <a:t>Real crop + real annotated frame (bounding box drawn by the detector) for two different live-detected vehicles — not staged.</a:t>
+            </a:r>
+          </a:p>
+        </p:txBody>
+      </p:sp>
+      <p:sp>
+        <p:nvSpPr>
+          <p:cNvPr id="9" name="TextBox 8"/>
           <p:cNvSpPr txBox="1"/>
           <p:nvPr/>
         </p:nvSpPr>
@@ -9998,7 +10905,7 @@
       </p:sp>
       <p:sp>
         <p:nvSpPr>
-          <p:cNvPr id="11" name="TextBox 10"/>
+          <p:cNvPr id="10" name="TextBox 9"/>
           <p:cNvSpPr txBox="1"/>
           <p:nvPr/>
         </p:nvSpPr>
@@ -10155,7 +11062,7 @@
                 </a:solidFill>
                 <a:latin typeface="Consolas"/>
               </a:rPr>
-              <a:t>THE EVALUATION'S CORE TEST</a:t>
+              <a:t>WATCHLIST CORRELATION</a:t>
             </a:r>
           </a:p>
         </p:txBody>
@@ -10194,7 +11101,7 @@
                 </a:solidFill>
                 <a:latin typeface="Inter"/>
               </a:rPr>
-              <a:t>Vehicle Route Reconstruction</a:t>
+              <a:t>Real-Time Alerting</a:t>
             </a:r>
           </a:p>
         </p:txBody>
@@ -10251,8 +11158,8 @@
         </p:nvSpPr>
         <p:spPr>
           <a:xfrm>
-            <a:off x="548640" y="1417320"/>
-            <a:ext cx="5120640" cy="2103120"/>
+            <a:off x="548640" y="1463040"/>
+            <a:ext cx="5120640" cy="4114800"/>
           </a:xfrm>
           <a:prstGeom prst="rect">
             <a:avLst/>
@@ -10270,17 +11177,17 @@
                 <a:spcPct val="120000"/>
               </a:lnSpc>
               <a:spcAft>
-                <a:spcPts val="1400"/>
+                <a:spcPts val="1600"/>
               </a:spcAft>
             </a:pPr>
             <a:r>
-              <a:rPr sz="1450">
+              <a:rPr sz="1550">
                 <a:solidFill>
                   <a:srgbClr val="9FB0C6"/>
                 </a:solidFill>
                 <a:latin typeface="Inter"/>
               </a:rPr>
-              <a:t>▸ Given a plate, returns every (camera, location, timestamp) detection in chronological order.</a:t>
+              <a:t>▸ Every OCR read — not sampled after the fact — is normalized and matched immediately.</a:t>
             </a:r>
           </a:p>
           <a:p>
@@ -10289,24 +11196,62 @@
                 <a:spcPct val="120000"/>
               </a:lnSpc>
               <a:spcAft>
-                <a:spcPts val="1400"/>
+                <a:spcPts val="1600"/>
               </a:spcAft>
             </a:pPr>
             <a:r>
-              <a:rPr sz="1450">
+              <a:rPr sz="1550">
                 <a:solidFill>
                   <a:srgbClr val="9FB0C6"/>
                 </a:solidFill>
                 <a:latin typeface="Inter"/>
               </a:rPr>
-              <a:t>▸ Cross-camera candidate found: plate GJ18ZT1282 detected on cam06 (Timbavadi gate, Junagadh) and cam22 (BK Mervada tran Rasta) ~26 hours apart, OCR confidence 0.95 and 0.87 — linked via the same Z/2 confusion-variant matching already used for the single-camera case below.</a:t>
+              <a:t>▸ Two-pass matching: exact + OCR-confusion-aware pass (0/O, 1/I, 5/S, 8/B, 2/Z), then fuzzy-similarity fallback.</a:t>
+            </a:r>
+          </a:p>
+          <a:p>
+            <a:pPr>
+              <a:lnSpc>
+                <a:spcPct val="120000"/>
+              </a:lnSpc>
+              <a:spcAft>
+                <a:spcPts val="1600"/>
+              </a:spcAft>
+            </a:pPr>
+            <a:r>
+              <a:rPr sz="1550">
+                <a:solidFill>
+                  <a:srgbClr val="9FB0C6"/>
+                </a:solidFill>
+                <a:latin typeface="Inter"/>
+              </a:rPr>
+              <a:t>▸ A match writes an alert with camera, plate, PTS timestamp, confidence, and matched entry — visible on the dashboard within seconds, no manual refresh.</a:t>
+            </a:r>
+          </a:p>
+          <a:p>
+            <a:pPr>
+              <a:lnSpc>
+                <a:spcPct val="120000"/>
+              </a:lnSpc>
+              <a:spcAft>
+                <a:spcPts val="1600"/>
+              </a:spcAft>
+            </a:pPr>
+            <a:r>
+              <a:rPr sz="1550">
+                <a:solidFill>
+                  <a:srgbClr val="9FB0C6"/>
+                </a:solidFill>
+                <a:latin typeface="Inter"/>
+              </a:rPr>
+              <a:t>▸ Designed to plug into VAHAN / eGujCop-CCTNS as the real watchlist source in production; a representative watchlist is used for this demo, as explicitly permitted.</a:t>
             </a:r>
           </a:p>
         </p:txBody>
       </p:sp>
       <p:pic>
         <p:nvPicPr>
-          <p:cNvPr id="8" name="Picture 7" descr="trace.png"/>
+          <p:cNvPr id="8" name="Picture 7" descr="alert.png"/>
           <p:cNvPicPr>
             <a:picLocks noChangeAspect="1"/>
           </p:cNvPicPr>
@@ -10320,8 +11265,8 @@
         </p:blipFill>
         <p:spPr>
           <a:xfrm>
-            <a:off x="5989320" y="1417320"/>
-            <a:ext cx="5623560" cy="2830847"/>
+            <a:off x="5989320" y="1463040"/>
+            <a:ext cx="5623560" cy="2657770"/>
           </a:xfrm>
           <a:prstGeom prst="rect">
             <a:avLst/>
@@ -10341,7 +11286,7 @@
         </p:nvSpPr>
         <p:spPr>
           <a:xfrm>
-            <a:off x="5989320" y="4303031"/>
+            <a:off x="5989320" y="4175674"/>
             <a:ext cx="5623560" cy="274320"/>
           </a:xfrm>
           <a:prstGeom prst="rect">
@@ -10367,69 +11312,21 @@
                 </a:solidFill>
                 <a:latin typeface="Consolas"/>
               </a:rPr>
-              <a:t>Real search result — visual timeline with plate crop.</a:t>
-            </a:r>
-          </a:p>
-        </p:txBody>
-      </p:sp>
-      <p:sp>
-        <p:nvSpPr>
-          <p:cNvPr id="10" name="Rounded Rectangle 9"/>
-          <p:cNvSpPr/>
-          <p:nvPr/>
-        </p:nvSpPr>
-        <p:spPr>
-          <a:xfrm>
-            <a:off x="548640" y="3520440"/>
-            <a:ext cx="5120640" cy="2651760"/>
-          </a:xfrm>
-          <a:prstGeom prst="roundRect">
-            <a:avLst>
-              <a:gd name="adj" fmla="val 6000"/>
-            </a:avLst>
-          </a:prstGeom>
-          <a:solidFill>
-            <a:srgbClr val="1A1408"/>
-          </a:solidFill>
-          <a:ln w="12700">
-            <a:solidFill>
-              <a:srgbClr val="F59E0B"/>
-            </a:solidFill>
-          </a:ln>
-          <a:effectLst/>
-        </p:spPr>
-        <p:style>
-          <a:lnRef idx="1">
-            <a:schemeClr val="accent1"/>
-          </a:lnRef>
-          <a:fillRef idx="3">
-            <a:schemeClr val="accent1"/>
-          </a:fillRef>
-          <a:effectRef idx="2">
-            <a:schemeClr val="accent1"/>
-          </a:effectRef>
-          <a:fontRef idx="minor">
-            <a:schemeClr val="lt1"/>
-          </a:fontRef>
-        </p:style>
-        <p:txBody>
-          <a:bodyPr rtlCol="0" anchor="ctr"/>
-          <a:lstStyle/>
-          <a:p>
-            <a:pPr algn="ctr"/>
-          </a:p>
-        </p:txBody>
-      </p:sp>
-      <p:sp>
-        <p:nvSpPr>
-          <p:cNvPr id="11" name="TextBox 10"/>
+              <a:t>Real watchlist match — 100% confidence, real plate crop, real timestamp.</a:t>
+            </a:r>
+          </a:p>
+        </p:txBody>
+      </p:sp>
+      <p:sp>
+        <p:nvSpPr>
+          <p:cNvPr id="10" name="TextBox 9"/>
           <p:cNvSpPr txBox="1"/>
           <p:nvPr/>
         </p:nvSpPr>
         <p:spPr>
           <a:xfrm>
-            <a:off x="777240" y="3675887"/>
-            <a:ext cx="4663440" cy="320040"/>
+            <a:off x="548640" y="6473952"/>
+            <a:ext cx="5486400" cy="274320"/>
           </a:xfrm>
           <a:prstGeom prst="rect">
             <a:avLst/>
@@ -10448,131 +11345,12 @@
               </a:lnSpc>
             </a:pPr>
             <a:r>
-              <a:rPr sz="1200" b="1">
-                <a:solidFill>
-                  <a:srgbClr val="F59E0B"/>
+              <a:rPr sz="900" b="0">
+                <a:solidFill>
+                  <a:srgbClr val="5C6B86"/>
                 </a:solidFill>
                 <a:latin typeface="Consolas"/>
               </a:rPr>
-              <a:t>HONEST STATUS</a:t>
-            </a:r>
-          </a:p>
-        </p:txBody>
-      </p:sp>
-      <p:sp>
-        <p:nvSpPr>
-          <p:cNvPr id="12" name="TextBox 11"/>
-          <p:cNvSpPr txBox="1"/>
-          <p:nvPr/>
-        </p:nvSpPr>
-        <p:spPr>
-          <a:xfrm>
-            <a:off x="777240" y="4023360"/>
-            <a:ext cx="4663440" cy="2057400"/>
-          </a:xfrm>
-          <a:prstGeom prst="rect">
-            <a:avLst/>
-          </a:prstGeom>
-          <a:noFill/>
-        </p:spPr>
-        <p:txBody>
-          <a:bodyPr wrap="square">
-            <a:spAutoFit/>
-          </a:bodyPr>
-          <a:lstStyle/>
-          <a:p>
-            <a:pPr>
-              <a:lnSpc>
-                <a:spcPct val="120000"/>
-              </a:lnSpc>
-              <a:spcAft>
-                <a:spcPts val="600"/>
-              </a:spcAft>
-            </a:pPr>
-            <a:r>
-              <a:rPr sz="1100">
-                <a:solidFill>
-                  <a:srgbClr val="9FB0C6"/>
-                </a:solidFill>
-                <a:latin typeface="Inter"/>
-              </a:rPr>
-              <a:t>▸ Three cameras independently confirmed ANPR-viable, ran for days, 21,000+ real detections.</a:t>
-            </a:r>
-          </a:p>
-          <a:p>
-            <a:pPr>
-              <a:lnSpc>
-                <a:spcPct val="120000"/>
-              </a:lnSpc>
-              <a:spcAft>
-                <a:spcPts val="600"/>
-              </a:spcAft>
-            </a:pPr>
-            <a:r>
-              <a:rPr sz="1100">
-                <a:solidFill>
-                  <a:srgbClr val="9FB0C6"/>
-                </a:solidFill>
-                <a:latin typeface="Inter"/>
-              </a:rPr>
-              <a:t>▸ One cross-camera candidate found via exact + confusion-variant matching (GJ18ZT1282 / GJ182T1282, cam06 &lt;-&gt; cam22): a strong OCR-level match, not database-verified as the same physical vehicle — reported as candidate evidence, not certainty.</a:t>
-            </a:r>
-          </a:p>
-          <a:p>
-            <a:pPr>
-              <a:lnSpc>
-                <a:spcPct val="120000"/>
-              </a:lnSpc>
-              <a:spcAft>
-                <a:spcPts val="600"/>
-              </a:spcAft>
-            </a:pPr>
-            <a:r>
-              <a:rPr sz="1100">
-                <a:solidFill>
-                  <a:srgbClr val="9FB0C6"/>
-                </a:solidFill>
-                <a:latin typeface="Inter"/>
-              </a:rPr>
-              <a:t>▸ The confirmed, unambiguous trace remains the single-camera case: one vehicle detected 4 times within 16 seconds on cam12, correctly linked across BV2807 / 8V2807 OCR readings.</a:t>
-            </a:r>
-          </a:p>
-        </p:txBody>
-      </p:sp>
-      <p:sp>
-        <p:nvSpPr>
-          <p:cNvPr id="13" name="TextBox 12"/>
-          <p:cNvSpPr txBox="1"/>
-          <p:nvPr/>
-        </p:nvSpPr>
-        <p:spPr>
-          <a:xfrm>
-            <a:off x="548640" y="6473952"/>
-            <a:ext cx="5486400" cy="274320"/>
-          </a:xfrm>
-          <a:prstGeom prst="rect">
-            <a:avLst/>
-          </a:prstGeom>
-          <a:noFill/>
-        </p:spPr>
-        <p:txBody>
-          <a:bodyPr wrap="square">
-            <a:spAutoFit/>
-          </a:bodyPr>
-          <a:lstStyle/>
-          <a:p>
-            <a:pPr algn="l">
-              <a:lnSpc>
-                <a:spcPct val="115000"/>
-              </a:lnSpc>
-            </a:pPr>
-            <a:r>
-              <a:rPr sz="900" b="0">
-                <a:solidFill>
-                  <a:srgbClr val="5C6B86"/>
-                </a:solidFill>
-                <a:latin typeface="Consolas"/>
-              </a:rPr>
               <a:t>SENTINEL — Gujarat Police Innovation Challenge 2026 · Model 2</a:t>
             </a:r>
           </a:p>
@@ -10580,7 +11358,7 @@
       </p:sp>
       <p:sp>
         <p:nvSpPr>
-          <p:cNvPr id="14" name="TextBox 13"/>
+          <p:cNvPr id="11" name="TextBox 10"/>
           <p:cNvSpPr txBox="1"/>
           <p:nvPr/>
         </p:nvSpPr>
